--- a/Qualification/input/Content/images/DDI_P-gp_Compound_Network.pptx
+++ b/Qualification/input/Content/images/DDI_P-gp_Compound_Network.pptx
@@ -2,12 +2,12 @@
 <file path=ppt/presentation.xml><?xml version="1.0" encoding="utf-8"?>
 <p:presentation xmlns:a="http://schemas.openxmlformats.org/drawingml/2006/main" xmlns:r="http://schemas.openxmlformats.org/officeDocument/2006/relationships" xmlns:p="http://schemas.openxmlformats.org/presentationml/2006/main" saveSubsetFonts="1">
   <p:sldMasterIdLst>
-    <p:sldMasterId id="2147483660" r:id="rId5"/>
+    <p:sldMasterId id="2147483672" r:id="rId5"/>
   </p:sldMasterIdLst>
   <p:sldIdLst>
     <p:sldId id="257" r:id="rId6"/>
   </p:sldIdLst>
-  <p:sldSz cx="10080625" cy="5040313"/>
+  <p:sldSz cx="8999538" cy="5040313"/>
   <p:notesSz cx="6858000" cy="9144000"/>
   <p:custDataLst>
     <p:tags r:id="rId7"/>
@@ -115,9 +115,294 @@
 </p:presentation>
 </file>
 
+<file path=ppt/revisionInfo.xml><?xml version="1.0" encoding="utf-8"?>
+<p1510:revInfo xmlns:a="http://schemas.openxmlformats.org/drawingml/2006/main" xmlns:r="http://schemas.openxmlformats.org/officeDocument/2006/relationships" xmlns:p1510="http://schemas.microsoft.com/office/powerpoint/2015/10/main">
+  <p1510:revLst>
+    <p1510:client id="{1F743189-2BFA-49ED-8B7A-3B26B7C9A270}" v="3" dt="2026-06-23T15:04:20.739"/>
+  </p1510:revLst>
+</p1510:revInfo>
+</file>
+
+<file path=ppt/changesInfos/changesInfo1.xml><?xml version="1.0" encoding="utf-8"?>
+<pc:chgInfo xmlns:a="http://schemas.openxmlformats.org/drawingml/2006/main" xmlns:r="http://schemas.openxmlformats.org/officeDocument/2006/relationships" xmlns:ac="http://schemas.microsoft.com/office/drawing/2013/main/command" xmlns:pc="http://schemas.microsoft.com/office/powerpoint/2013/main/command">
+  <pc:docChgLst>
+    <pc:chgData name="Hanke,Dr.,Nina (CPS ClinPh) BIP-DE-I" userId="d96c1b01-9ca2-4848-98f1-bb30d05930aa" providerId="ADAL" clId="{A5EFD3DA-AE80-4756-B139-A64124DEACB0}"/>
+    <pc:docChg chg="undo redo custSel modSld">
+      <pc:chgData name="Hanke,Dr.,Nina (CPS ClinPh) BIP-DE-I" userId="d96c1b01-9ca2-4848-98f1-bb30d05930aa" providerId="ADAL" clId="{A5EFD3DA-AE80-4756-B139-A64124DEACB0}" dt="2026-06-23T15:04:20.739" v="139" actId="164"/>
+      <pc:docMkLst>
+        <pc:docMk/>
+      </pc:docMkLst>
+      <pc:sldChg chg="addSp delSp modSp mod chgLayout">
+        <pc:chgData name="Hanke,Dr.,Nina (CPS ClinPh) BIP-DE-I" userId="d96c1b01-9ca2-4848-98f1-bb30d05930aa" providerId="ADAL" clId="{A5EFD3DA-AE80-4756-B139-A64124DEACB0}" dt="2026-06-23T15:04:20.739" v="139" actId="164"/>
+        <pc:sldMkLst>
+          <pc:docMk/>
+          <pc:sldMk cId="2088911489" sldId="257"/>
+        </pc:sldMkLst>
+        <pc:spChg chg="mod">
+          <ac:chgData name="Hanke,Dr.,Nina (CPS ClinPh) BIP-DE-I" userId="d96c1b01-9ca2-4848-98f1-bb30d05930aa" providerId="ADAL" clId="{A5EFD3DA-AE80-4756-B139-A64124DEACB0}" dt="2026-06-23T15:01:43.567" v="45" actId="1036"/>
+          <ac:spMkLst>
+            <pc:docMk/>
+            <pc:sldMk cId="2088911489" sldId="257"/>
+            <ac:spMk id="13" creationId="{B47A2F28-05AD-E08C-D62F-2B355417CF42}"/>
+          </ac:spMkLst>
+        </pc:spChg>
+        <pc:spChg chg="mod">
+          <ac:chgData name="Hanke,Dr.,Nina (CPS ClinPh) BIP-DE-I" userId="d96c1b01-9ca2-4848-98f1-bb30d05930aa" providerId="ADAL" clId="{A5EFD3DA-AE80-4756-B139-A64124DEACB0}" dt="2026-06-23T14:59:55.246" v="20"/>
+          <ac:spMkLst>
+            <pc:docMk/>
+            <pc:sldMk cId="2088911489" sldId="257"/>
+            <ac:spMk id="14" creationId="{9FA69C33-F653-ECCF-0169-D7739BE7DE74}"/>
+          </ac:spMkLst>
+        </pc:spChg>
+        <pc:spChg chg="del mod">
+          <ac:chgData name="Hanke,Dr.,Nina (CPS ClinPh) BIP-DE-I" userId="d96c1b01-9ca2-4848-98f1-bb30d05930aa" providerId="ADAL" clId="{A5EFD3DA-AE80-4756-B139-A64124DEACB0}" dt="2026-06-23T15:00:01.074" v="21" actId="478"/>
+          <ac:spMkLst>
+            <pc:docMk/>
+            <pc:sldMk cId="2088911489" sldId="257"/>
+            <ac:spMk id="15" creationId="{F29916F2-0A3D-462B-142B-22EFE77146EC}"/>
+          </ac:spMkLst>
+        </pc:spChg>
+        <pc:spChg chg="mod">
+          <ac:chgData name="Hanke,Dr.,Nina (CPS ClinPh) BIP-DE-I" userId="d96c1b01-9ca2-4848-98f1-bb30d05930aa" providerId="ADAL" clId="{A5EFD3DA-AE80-4756-B139-A64124DEACB0}" dt="2026-06-23T14:59:55.246" v="20"/>
+          <ac:spMkLst>
+            <pc:docMk/>
+            <pc:sldMk cId="2088911489" sldId="257"/>
+            <ac:spMk id="16" creationId="{FAEEA506-9E99-0620-5474-552E4B8AB421}"/>
+          </ac:spMkLst>
+        </pc:spChg>
+        <pc:spChg chg="mod">
+          <ac:chgData name="Hanke,Dr.,Nina (CPS ClinPh) BIP-DE-I" userId="d96c1b01-9ca2-4848-98f1-bb30d05930aa" providerId="ADAL" clId="{A5EFD3DA-AE80-4756-B139-A64124DEACB0}" dt="2026-06-23T14:59:55.246" v="20"/>
+          <ac:spMkLst>
+            <pc:docMk/>
+            <pc:sldMk cId="2088911489" sldId="257"/>
+            <ac:spMk id="17" creationId="{4BC66516-0225-9376-98E0-E3C56EE24628}"/>
+          </ac:spMkLst>
+        </pc:spChg>
+        <pc:spChg chg="mod">
+          <ac:chgData name="Hanke,Dr.,Nina (CPS ClinPh) BIP-DE-I" userId="d96c1b01-9ca2-4848-98f1-bb30d05930aa" providerId="ADAL" clId="{A5EFD3DA-AE80-4756-B139-A64124DEACB0}" dt="2026-06-23T14:59:55.246" v="20"/>
+          <ac:spMkLst>
+            <pc:docMk/>
+            <pc:sldMk cId="2088911489" sldId="257"/>
+            <ac:spMk id="20" creationId="{9B6EB250-512B-E9EF-A835-21490F1E887B}"/>
+          </ac:spMkLst>
+        </pc:spChg>
+        <pc:spChg chg="mod">
+          <ac:chgData name="Hanke,Dr.,Nina (CPS ClinPh) BIP-DE-I" userId="d96c1b01-9ca2-4848-98f1-bb30d05930aa" providerId="ADAL" clId="{A5EFD3DA-AE80-4756-B139-A64124DEACB0}" dt="2026-06-23T14:59:55.246" v="20"/>
+          <ac:spMkLst>
+            <pc:docMk/>
+            <pc:sldMk cId="2088911489" sldId="257"/>
+            <ac:spMk id="21" creationId="{ECF526B3-0B08-A252-82DB-426F2F34CDB7}"/>
+          </ac:spMkLst>
+        </pc:spChg>
+        <pc:spChg chg="mod">
+          <ac:chgData name="Hanke,Dr.,Nina (CPS ClinPh) BIP-DE-I" userId="d96c1b01-9ca2-4848-98f1-bb30d05930aa" providerId="ADAL" clId="{A5EFD3DA-AE80-4756-B139-A64124DEACB0}" dt="2026-06-23T14:59:55.246" v="20"/>
+          <ac:spMkLst>
+            <pc:docMk/>
+            <pc:sldMk cId="2088911489" sldId="257"/>
+            <ac:spMk id="22" creationId="{B6FD63F9-DD07-D3D2-CFC5-5BEE09C24A0F}"/>
+          </ac:spMkLst>
+        </pc:spChg>
+        <pc:spChg chg="mod">
+          <ac:chgData name="Hanke,Dr.,Nina (CPS ClinPh) BIP-DE-I" userId="d96c1b01-9ca2-4848-98f1-bb30d05930aa" providerId="ADAL" clId="{A5EFD3DA-AE80-4756-B139-A64124DEACB0}" dt="2026-06-23T14:59:55.246" v="20"/>
+          <ac:spMkLst>
+            <pc:docMk/>
+            <pc:sldMk cId="2088911489" sldId="257"/>
+            <ac:spMk id="23" creationId="{F179497C-7561-259C-418B-EB784ED1D0E5}"/>
+          </ac:spMkLst>
+        </pc:spChg>
+        <pc:spChg chg="del">
+          <ac:chgData name="Hanke,Dr.,Nina (CPS ClinPh) BIP-DE-I" userId="d96c1b01-9ca2-4848-98f1-bb30d05930aa" providerId="ADAL" clId="{A5EFD3DA-AE80-4756-B139-A64124DEACB0}" dt="2026-06-23T14:58:25.061" v="0" actId="478"/>
+          <ac:spMkLst>
+            <pc:docMk/>
+            <pc:sldMk cId="2088911489" sldId="257"/>
+            <ac:spMk id="27" creationId="{3529796A-F003-4598-96A5-F678DAE42860}"/>
+          </ac:spMkLst>
+        </pc:spChg>
+        <pc:spChg chg="add del mod ord">
+          <ac:chgData name="Hanke,Dr.,Nina (CPS ClinPh) BIP-DE-I" userId="d96c1b01-9ca2-4848-98f1-bb30d05930aa" providerId="ADAL" clId="{A5EFD3DA-AE80-4756-B139-A64124DEACB0}" dt="2026-06-23T15:02:58.957" v="69" actId="6264"/>
+          <ac:spMkLst>
+            <pc:docMk/>
+            <pc:sldMk cId="2088911489" sldId="257"/>
+            <ac:spMk id="34" creationId="{F0CC0BB9-5E5A-386C-D900-FEF791F6FC51}"/>
+          </ac:spMkLst>
+        </pc:spChg>
+        <pc:spChg chg="add del mod ord">
+          <ac:chgData name="Hanke,Dr.,Nina (CPS ClinPh) BIP-DE-I" userId="d96c1b01-9ca2-4848-98f1-bb30d05930aa" providerId="ADAL" clId="{A5EFD3DA-AE80-4756-B139-A64124DEACB0}" dt="2026-06-23T15:02:58.957" v="69" actId="6264"/>
+          <ac:spMkLst>
+            <pc:docMk/>
+            <pc:sldMk cId="2088911489" sldId="257"/>
+            <ac:spMk id="35" creationId="{02B8066A-3393-C5F6-B9AE-CAEA31D2F1D5}"/>
+          </ac:spMkLst>
+        </pc:spChg>
+        <pc:spChg chg="mod">
+          <ac:chgData name="Hanke,Dr.,Nina (CPS ClinPh) BIP-DE-I" userId="d96c1b01-9ca2-4848-98f1-bb30d05930aa" providerId="ADAL" clId="{A5EFD3DA-AE80-4756-B139-A64124DEACB0}" dt="2026-06-23T15:03:22.734" v="99" actId="14100"/>
+          <ac:spMkLst>
+            <pc:docMk/>
+            <pc:sldMk cId="2088911489" sldId="257"/>
+            <ac:spMk id="56" creationId="{0A357C56-BAD9-4853-91EE-2F1649F1828A}"/>
+          </ac:spMkLst>
+        </pc:spChg>
+        <pc:spChg chg="del">
+          <ac:chgData name="Hanke,Dr.,Nina (CPS ClinPh) BIP-DE-I" userId="d96c1b01-9ca2-4848-98f1-bb30d05930aa" providerId="ADAL" clId="{A5EFD3DA-AE80-4756-B139-A64124DEACB0}" dt="2026-06-23T14:59:19.893" v="15" actId="478"/>
+          <ac:spMkLst>
+            <pc:docMk/>
+            <pc:sldMk cId="2088911489" sldId="257"/>
+            <ac:spMk id="73" creationId="{3B36568C-F1AC-4C56-82E9-751A6283020E}"/>
+          </ac:spMkLst>
+        </pc:spChg>
+        <pc:spChg chg="del">
+          <ac:chgData name="Hanke,Dr.,Nina (CPS ClinPh) BIP-DE-I" userId="d96c1b01-9ca2-4848-98f1-bb30d05930aa" providerId="ADAL" clId="{A5EFD3DA-AE80-4756-B139-A64124DEACB0}" dt="2026-06-23T14:59:18.799" v="14" actId="478"/>
+          <ac:spMkLst>
+            <pc:docMk/>
+            <pc:sldMk cId="2088911489" sldId="257"/>
+            <ac:spMk id="74" creationId="{30AE1D67-1A73-4290-BF1C-838E2810220E}"/>
+          </ac:spMkLst>
+        </pc:spChg>
+        <pc:spChg chg="del mod">
+          <ac:chgData name="Hanke,Dr.,Nina (CPS ClinPh) BIP-DE-I" userId="d96c1b01-9ca2-4848-98f1-bb30d05930aa" providerId="ADAL" clId="{A5EFD3DA-AE80-4756-B139-A64124DEACB0}" dt="2026-06-23T14:59:27.025" v="19" actId="478"/>
+          <ac:spMkLst>
+            <pc:docMk/>
+            <pc:sldMk cId="2088911489" sldId="257"/>
+            <ac:spMk id="75" creationId="{234E6B2D-5E04-446D-9D83-8C86BAA818DE}"/>
+          </ac:spMkLst>
+        </pc:spChg>
+        <pc:spChg chg="del mod">
+          <ac:chgData name="Hanke,Dr.,Nina (CPS ClinPh) BIP-DE-I" userId="d96c1b01-9ca2-4848-98f1-bb30d05930aa" providerId="ADAL" clId="{A5EFD3DA-AE80-4756-B139-A64124DEACB0}" dt="2026-06-23T14:58:58.187" v="6" actId="478"/>
+          <ac:spMkLst>
+            <pc:docMk/>
+            <pc:sldMk cId="2088911489" sldId="257"/>
+            <ac:spMk id="82" creationId="{901ABB62-9433-4052-B7AC-CC55EEC6EB10}"/>
+          </ac:spMkLst>
+        </pc:spChg>
+        <pc:spChg chg="del">
+          <ac:chgData name="Hanke,Dr.,Nina (CPS ClinPh) BIP-DE-I" userId="d96c1b01-9ca2-4848-98f1-bb30d05930aa" providerId="ADAL" clId="{A5EFD3DA-AE80-4756-B139-A64124DEACB0}" dt="2026-06-23T14:59:21.512" v="16" actId="478"/>
+          <ac:spMkLst>
+            <pc:docMk/>
+            <pc:sldMk cId="2088911489" sldId="257"/>
+            <ac:spMk id="91" creationId="{AEA17713-094A-4BDC-A237-886245610EB6}"/>
+          </ac:spMkLst>
+        </pc:spChg>
+        <pc:spChg chg="del">
+          <ac:chgData name="Hanke,Dr.,Nina (CPS ClinPh) BIP-DE-I" userId="d96c1b01-9ca2-4848-98f1-bb30d05930aa" providerId="ADAL" clId="{A5EFD3DA-AE80-4756-B139-A64124DEACB0}" dt="2026-06-23T14:59:00.710" v="7" actId="478"/>
+          <ac:spMkLst>
+            <pc:docMk/>
+            <pc:sldMk cId="2088911489" sldId="257"/>
+            <ac:spMk id="96" creationId="{FD52EBD5-9379-49D0-8F14-2E922C6AE592}"/>
+          </ac:spMkLst>
+        </pc:spChg>
+        <pc:spChg chg="del">
+          <ac:chgData name="Hanke,Dr.,Nina (CPS ClinPh) BIP-DE-I" userId="d96c1b01-9ca2-4848-98f1-bb30d05930aa" providerId="ADAL" clId="{A5EFD3DA-AE80-4756-B139-A64124DEACB0}" dt="2026-06-23T14:58:46.232" v="4" actId="478"/>
+          <ac:spMkLst>
+            <pc:docMk/>
+            <pc:sldMk cId="2088911489" sldId="257"/>
+            <ac:spMk id="225" creationId="{158BD913-E196-4523-91A6-0074CF2173D6}"/>
+          </ac:spMkLst>
+        </pc:spChg>
+        <pc:spChg chg="del">
+          <ac:chgData name="Hanke,Dr.,Nina (CPS ClinPh) BIP-DE-I" userId="d96c1b01-9ca2-4848-98f1-bb30d05930aa" providerId="ADAL" clId="{A5EFD3DA-AE80-4756-B139-A64124DEACB0}" dt="2026-06-23T14:59:25.469" v="18" actId="478"/>
+          <ac:spMkLst>
+            <pc:docMk/>
+            <pc:sldMk cId="2088911489" sldId="257"/>
+            <ac:spMk id="244" creationId="{F387589C-E349-4DAC-8146-D780AB632BC4}"/>
+          </ac:spMkLst>
+        </pc:spChg>
+        <pc:grpChg chg="add del mod">
+          <ac:chgData name="Hanke,Dr.,Nina (CPS ClinPh) BIP-DE-I" userId="d96c1b01-9ca2-4848-98f1-bb30d05930aa" providerId="ADAL" clId="{A5EFD3DA-AE80-4756-B139-A64124DEACB0}" dt="2026-06-23T15:04:20.739" v="139" actId="164"/>
+          <ac:grpSpMkLst>
+            <pc:docMk/>
+            <pc:sldMk cId="2088911489" sldId="257"/>
+            <ac:grpSpMk id="2" creationId="{BCAE344D-4F0E-B748-6127-5C543E13F4BC}"/>
+          </ac:grpSpMkLst>
+        </pc:grpChg>
+        <pc:grpChg chg="mod">
+          <ac:chgData name="Hanke,Dr.,Nina (CPS ClinPh) BIP-DE-I" userId="d96c1b01-9ca2-4848-98f1-bb30d05930aa" providerId="ADAL" clId="{A5EFD3DA-AE80-4756-B139-A64124DEACB0}" dt="2026-06-23T15:04:20.739" v="139" actId="164"/>
+          <ac:grpSpMkLst>
+            <pc:docMk/>
+            <pc:sldMk cId="2088911489" sldId="257"/>
+            <ac:grpSpMk id="11" creationId="{2922F67E-2DB7-2990-EE2E-9673A11E6930}"/>
+          </ac:grpSpMkLst>
+        </pc:grpChg>
+        <pc:grpChg chg="add mod">
+          <ac:chgData name="Hanke,Dr.,Nina (CPS ClinPh) BIP-DE-I" userId="d96c1b01-9ca2-4848-98f1-bb30d05930aa" providerId="ADAL" clId="{A5EFD3DA-AE80-4756-B139-A64124DEACB0}" dt="2026-06-23T15:04:20.739" v="139" actId="164"/>
+          <ac:grpSpMkLst>
+            <pc:docMk/>
+            <pc:sldMk cId="2088911489" sldId="257"/>
+            <ac:grpSpMk id="36" creationId="{29FE66A5-143A-7B46-44F1-7AFCDE5A4FD8}"/>
+          </ac:grpSpMkLst>
+        </pc:grpChg>
+        <pc:grpChg chg="del">
+          <ac:chgData name="Hanke,Dr.,Nina (CPS ClinPh) BIP-DE-I" userId="d96c1b01-9ca2-4848-98f1-bb30d05930aa" providerId="ADAL" clId="{A5EFD3DA-AE80-4756-B139-A64124DEACB0}" dt="2026-06-23T14:59:21.512" v="16" actId="478"/>
+          <ac:grpSpMkLst>
+            <pc:docMk/>
+            <pc:sldMk cId="2088911489" sldId="257"/>
+            <ac:grpSpMk id="176" creationId="{4BBF0E06-1277-4994-AFE9-B37C048D848A}"/>
+          </ac:grpSpMkLst>
+        </pc:grpChg>
+        <pc:picChg chg="del">
+          <ac:chgData name="Hanke,Dr.,Nina (CPS ClinPh) BIP-DE-I" userId="d96c1b01-9ca2-4848-98f1-bb30d05930aa" providerId="ADAL" clId="{A5EFD3DA-AE80-4756-B139-A64124DEACB0}" dt="2026-06-23T14:58:25.844" v="1" actId="478"/>
+          <ac:picMkLst>
+            <pc:docMk/>
+            <pc:sldMk cId="2088911489" sldId="257"/>
+            <ac:picMk id="26" creationId="{A5DF4011-45B9-1D7F-98F9-EE7FEB6E0726}"/>
+          </ac:picMkLst>
+        </pc:picChg>
+        <pc:picChg chg="mod">
+          <ac:chgData name="Hanke,Dr.,Nina (CPS ClinPh) BIP-DE-I" userId="d96c1b01-9ca2-4848-98f1-bb30d05930aa" providerId="ADAL" clId="{A5EFD3DA-AE80-4756-B139-A64124DEACB0}" dt="2026-06-23T14:59:55.246" v="20"/>
+          <ac:picMkLst>
+            <pc:docMk/>
+            <pc:sldMk cId="2088911489" sldId="257"/>
+            <ac:picMk id="33" creationId="{C9CE784B-DBE1-3AC9-A7FA-2F744289B107}"/>
+          </ac:picMkLst>
+        </pc:picChg>
+        <pc:cxnChg chg="del mod">
+          <ac:chgData name="Hanke,Dr.,Nina (CPS ClinPh) BIP-DE-I" userId="d96c1b01-9ca2-4848-98f1-bb30d05930aa" providerId="ADAL" clId="{A5EFD3DA-AE80-4756-B139-A64124DEACB0}" dt="2026-06-23T14:59:12.412" v="11" actId="478"/>
+          <ac:cxnSpMkLst>
+            <pc:docMk/>
+            <pc:sldMk cId="2088911489" sldId="257"/>
+            <ac:cxnSpMk id="104" creationId="{0FF9BEFE-B7A9-4FF4-89BB-33781F91CA30}"/>
+          </ac:cxnSpMkLst>
+        </pc:cxnChg>
+        <pc:cxnChg chg="del mod">
+          <ac:chgData name="Hanke,Dr.,Nina (CPS ClinPh) BIP-DE-I" userId="d96c1b01-9ca2-4848-98f1-bb30d05930aa" providerId="ADAL" clId="{A5EFD3DA-AE80-4756-B139-A64124DEACB0}" dt="2026-06-23T14:59:09.905" v="10" actId="478"/>
+          <ac:cxnSpMkLst>
+            <pc:docMk/>
+            <pc:sldMk cId="2088911489" sldId="257"/>
+            <ac:cxnSpMk id="112" creationId="{D0917519-090A-4A49-ABD9-982827D3038F}"/>
+          </ac:cxnSpMkLst>
+        </pc:cxnChg>
+        <pc:cxnChg chg="del mod">
+          <ac:chgData name="Hanke,Dr.,Nina (CPS ClinPh) BIP-DE-I" userId="d96c1b01-9ca2-4848-98f1-bb30d05930aa" providerId="ADAL" clId="{A5EFD3DA-AE80-4756-B139-A64124DEACB0}" dt="2026-06-23T14:59:23.702" v="17" actId="478"/>
+          <ac:cxnSpMkLst>
+            <pc:docMk/>
+            <pc:sldMk cId="2088911489" sldId="257"/>
+            <ac:cxnSpMk id="117" creationId="{9D2E5A2F-7F8C-401C-9C6A-2AF1D20AB953}"/>
+          </ac:cxnSpMkLst>
+        </pc:cxnChg>
+        <pc:cxnChg chg="del mod">
+          <ac:chgData name="Hanke,Dr.,Nina (CPS ClinPh) BIP-DE-I" userId="d96c1b01-9ca2-4848-98f1-bb30d05930aa" providerId="ADAL" clId="{A5EFD3DA-AE80-4756-B139-A64124DEACB0}" dt="2026-06-23T14:59:07.896" v="9" actId="478"/>
+          <ac:cxnSpMkLst>
+            <pc:docMk/>
+            <pc:sldMk cId="2088911489" sldId="257"/>
+            <ac:cxnSpMk id="143" creationId="{BA060CCB-E7DC-4D18-9D56-E48AC35FC14C}"/>
+          </ac:cxnSpMkLst>
+        </pc:cxnChg>
+        <pc:cxnChg chg="del mod">
+          <ac:chgData name="Hanke,Dr.,Nina (CPS ClinPh) BIP-DE-I" userId="d96c1b01-9ca2-4848-98f1-bb30d05930aa" providerId="ADAL" clId="{A5EFD3DA-AE80-4756-B139-A64124DEACB0}" dt="2026-06-23T14:59:06.213" v="8" actId="478"/>
+          <ac:cxnSpMkLst>
+            <pc:docMk/>
+            <pc:sldMk cId="2088911489" sldId="257"/>
+            <ac:cxnSpMk id="149" creationId="{DDE87805-09A5-4843-BA6D-48B3ED16FC1F}"/>
+          </ac:cxnSpMkLst>
+        </pc:cxnChg>
+      </pc:sldChg>
+    </pc:docChg>
+  </pc:docChgLst>
+</pc:chgInfo>
+</file>
+
 <file path=ppt/slideLayouts/slideLayout1.xml><?xml version="1.0" encoding="utf-8"?>
 <p:sldLayout xmlns:a="http://schemas.openxmlformats.org/drawingml/2006/main" xmlns:r="http://schemas.openxmlformats.org/officeDocument/2006/relationships" xmlns:p="http://schemas.openxmlformats.org/presentationml/2006/main" type="title" preserve="1">
-  <p:cSld name="Titelfolie">
+  <p:cSld name="Title Slide">
     <p:spTree>
       <p:nvGrpSpPr>
         <p:cNvPr id="1" name=""/>
@@ -144,8 +429,8 @@
         </p:nvSpPr>
         <p:spPr>
           <a:xfrm>
-            <a:off x="1260078" y="824885"/>
-            <a:ext cx="7560469" cy="1754776"/>
+            <a:off x="1124942" y="824885"/>
+            <a:ext cx="6749654" cy="1754776"/>
           </a:xfrm>
         </p:spPr>
         <p:txBody>
@@ -157,8 +442,8 @@
           </a:lstStyle>
           <a:p>
             <a:r>
-              <a:rPr lang="de-DE"/>
-              <a:t>Mastertitelformat bearbeiten</a:t>
+              <a:rPr lang="en-US"/>
+              <a:t>Click to edit Master title style</a:t>
             </a:r>
             <a:endParaRPr lang="en-US" dirty="0"/>
           </a:p>
@@ -176,8 +461,8 @@
         </p:nvSpPr>
         <p:spPr>
           <a:xfrm>
-            <a:off x="1260078" y="2647331"/>
-            <a:ext cx="7560469" cy="1216909"/>
+            <a:off x="1124942" y="2647331"/>
+            <a:ext cx="6749654" cy="1216909"/>
           </a:xfrm>
         </p:spPr>
         <p:txBody>
@@ -222,8 +507,8 @@
           </a:lstStyle>
           <a:p>
             <a:r>
-              <a:rPr lang="de-DE"/>
-              <a:t>Master-Untertitelformat bearbeiten</a:t>
+              <a:rPr lang="en-US"/>
+              <a:t>Click to edit Master subtitle style</a:t>
             </a:r>
             <a:endParaRPr lang="en-US" dirty="0"/>
           </a:p>
@@ -246,7 +531,7 @@
           <a:p>
             <a:fld id="{3A25AF7A-D1F1-44F6-9E50-C79D58050BA4}" type="datetimeFigureOut">
               <a:rPr lang="en-US" smtClean="0"/>
-              <a:t>11/26/2024</a:t>
+              <a:t>6/23/2026</a:t>
             </a:fld>
             <a:endParaRPr lang="en-US" dirty="0"/>
           </a:p>
@@ -288,7 +573,7 @@
           <a:p>
             <a:fld id="{84E92838-740C-420B-9518-DF4A7DEF82EA}" type="slidenum">
               <a:rPr lang="en-US" smtClean="0"/>
-              <a:t>‹Nr.›</a:t>
+              <a:t>‹#›</a:t>
             </a:fld>
             <a:endParaRPr lang="en-US" dirty="0"/>
           </a:p>
@@ -297,7 +582,7 @@
     </p:spTree>
     <p:extLst>
       <p:ext uri="{BB962C8B-B14F-4D97-AF65-F5344CB8AC3E}">
-        <p14:creationId xmlns:p14="http://schemas.microsoft.com/office/powerpoint/2010/main" val="4132872590"/>
+        <p14:creationId xmlns:p14="http://schemas.microsoft.com/office/powerpoint/2010/main" val="3936347708"/>
       </p:ext>
     </p:extLst>
   </p:cSld>
@@ -309,7 +594,7 @@
 
 <file path=ppt/slideLayouts/slideLayout10.xml><?xml version="1.0" encoding="utf-8"?>
 <p:sldLayout xmlns:a="http://schemas.openxmlformats.org/drawingml/2006/main" xmlns:r="http://schemas.openxmlformats.org/officeDocument/2006/relationships" xmlns:p="http://schemas.openxmlformats.org/presentationml/2006/main" type="vertTx" preserve="1">
-  <p:cSld name="Titel und vertikaler Text">
+  <p:cSld name="Title and Vertical Text">
     <p:spTree>
       <p:nvGrpSpPr>
         <p:cNvPr id="1" name=""/>
@@ -340,8 +625,8 @@
           <a:lstStyle/>
           <a:p>
             <a:r>
-              <a:rPr lang="de-DE"/>
-              <a:t>Mastertitelformat bearbeiten</a:t>
+              <a:rPr lang="en-US"/>
+              <a:t>Click to edit Master title style</a:t>
             </a:r>
             <a:endParaRPr lang="en-US" dirty="0"/>
           </a:p>
@@ -364,36 +649,36 @@
           <a:p>
             <a:pPr lvl="0"/>
             <a:r>
-              <a:rPr lang="de-DE"/>
-              <a:t>Mastertextformat bearbeiten</a:t>
+              <a:rPr lang="en-US"/>
+              <a:t>Click to edit Master text styles</a:t>
             </a:r>
           </a:p>
           <a:p>
             <a:pPr lvl="1"/>
             <a:r>
-              <a:rPr lang="de-DE"/>
-              <a:t>Zweite Ebene</a:t>
+              <a:rPr lang="en-US"/>
+              <a:t>Second level</a:t>
             </a:r>
           </a:p>
           <a:p>
             <a:pPr lvl="2"/>
             <a:r>
-              <a:rPr lang="de-DE"/>
-              <a:t>Dritte Ebene</a:t>
+              <a:rPr lang="en-US"/>
+              <a:t>Third level</a:t>
             </a:r>
           </a:p>
           <a:p>
             <a:pPr lvl="3"/>
             <a:r>
-              <a:rPr lang="de-DE"/>
-              <a:t>Vierte Ebene</a:t>
+              <a:rPr lang="en-US"/>
+              <a:t>Fourth level</a:t>
             </a:r>
           </a:p>
           <a:p>
             <a:pPr lvl="4"/>
             <a:r>
-              <a:rPr lang="de-DE"/>
-              <a:t>Fünfte Ebene</a:t>
+              <a:rPr lang="en-US"/>
+              <a:t>Fifth level</a:t>
             </a:r>
             <a:endParaRPr lang="en-US" dirty="0"/>
           </a:p>
@@ -416,7 +701,7 @@
           <a:p>
             <a:fld id="{3A25AF7A-D1F1-44F6-9E50-C79D58050BA4}" type="datetimeFigureOut">
               <a:rPr lang="en-US" smtClean="0"/>
-              <a:t>11/26/2024</a:t>
+              <a:t>6/23/2026</a:t>
             </a:fld>
             <a:endParaRPr lang="en-US" dirty="0"/>
           </a:p>
@@ -458,7 +743,7 @@
           <a:p>
             <a:fld id="{84E92838-740C-420B-9518-DF4A7DEF82EA}" type="slidenum">
               <a:rPr lang="en-US" smtClean="0"/>
-              <a:t>‹Nr.›</a:t>
+              <a:t>‹#›</a:t>
             </a:fld>
             <a:endParaRPr lang="en-US" dirty="0"/>
           </a:p>
@@ -467,7 +752,7 @@
     </p:spTree>
     <p:extLst>
       <p:ext uri="{BB962C8B-B14F-4D97-AF65-F5344CB8AC3E}">
-        <p14:creationId xmlns:p14="http://schemas.microsoft.com/office/powerpoint/2010/main" val="4249003738"/>
+        <p14:creationId xmlns:p14="http://schemas.microsoft.com/office/powerpoint/2010/main" val="981479867"/>
       </p:ext>
     </p:extLst>
   </p:cSld>
@@ -479,7 +764,7 @@
 
 <file path=ppt/slideLayouts/slideLayout11.xml><?xml version="1.0" encoding="utf-8"?>
 <p:sldLayout xmlns:a="http://schemas.openxmlformats.org/drawingml/2006/main" xmlns:r="http://schemas.openxmlformats.org/officeDocument/2006/relationships" xmlns:p="http://schemas.openxmlformats.org/presentationml/2006/main" type="vertTitleAndTx" preserve="1">
-  <p:cSld name="Vertikaler Titel und Text">
+  <p:cSld name="Vertical Title and Text">
     <p:spTree>
       <p:nvGrpSpPr>
         <p:cNvPr id="1" name=""/>
@@ -506,8 +791,8 @@
         </p:nvSpPr>
         <p:spPr>
           <a:xfrm>
-            <a:off x="7213947" y="268350"/>
-            <a:ext cx="2173635" cy="4271432"/>
+            <a:off x="6440295" y="268350"/>
+            <a:ext cx="1940525" cy="4271432"/>
           </a:xfrm>
         </p:spPr>
         <p:txBody>
@@ -515,8 +800,8 @@
           <a:lstStyle/>
           <a:p>
             <a:r>
-              <a:rPr lang="de-DE"/>
-              <a:t>Mastertitelformat bearbeiten</a:t>
+              <a:rPr lang="en-US"/>
+              <a:t>Click to edit Master title style</a:t>
             </a:r>
             <a:endParaRPr lang="en-US" dirty="0"/>
           </a:p>
@@ -534,8 +819,8 @@
         </p:nvSpPr>
         <p:spPr>
           <a:xfrm>
-            <a:off x="693043" y="268350"/>
-            <a:ext cx="6394896" cy="4271432"/>
+            <a:off x="618718" y="268350"/>
+            <a:ext cx="5709082" cy="4271432"/>
           </a:xfrm>
         </p:spPr>
         <p:txBody>
@@ -544,36 +829,36 @@
           <a:p>
             <a:pPr lvl="0"/>
             <a:r>
-              <a:rPr lang="de-DE"/>
-              <a:t>Mastertextformat bearbeiten</a:t>
+              <a:rPr lang="en-US"/>
+              <a:t>Click to edit Master text styles</a:t>
             </a:r>
           </a:p>
           <a:p>
             <a:pPr lvl="1"/>
             <a:r>
-              <a:rPr lang="de-DE"/>
-              <a:t>Zweite Ebene</a:t>
+              <a:rPr lang="en-US"/>
+              <a:t>Second level</a:t>
             </a:r>
           </a:p>
           <a:p>
             <a:pPr lvl="2"/>
             <a:r>
-              <a:rPr lang="de-DE"/>
-              <a:t>Dritte Ebene</a:t>
+              <a:rPr lang="en-US"/>
+              <a:t>Third level</a:t>
             </a:r>
           </a:p>
           <a:p>
             <a:pPr lvl="3"/>
             <a:r>
-              <a:rPr lang="de-DE"/>
-              <a:t>Vierte Ebene</a:t>
+              <a:rPr lang="en-US"/>
+              <a:t>Fourth level</a:t>
             </a:r>
           </a:p>
           <a:p>
             <a:pPr lvl="4"/>
             <a:r>
-              <a:rPr lang="de-DE"/>
-              <a:t>Fünfte Ebene</a:t>
+              <a:rPr lang="en-US"/>
+              <a:t>Fifth level</a:t>
             </a:r>
             <a:endParaRPr lang="en-US" dirty="0"/>
           </a:p>
@@ -596,7 +881,7 @@
           <a:p>
             <a:fld id="{3A25AF7A-D1F1-44F6-9E50-C79D58050BA4}" type="datetimeFigureOut">
               <a:rPr lang="en-US" smtClean="0"/>
-              <a:t>11/26/2024</a:t>
+              <a:t>6/23/2026</a:t>
             </a:fld>
             <a:endParaRPr lang="en-US" dirty="0"/>
           </a:p>
@@ -638,7 +923,7 @@
           <a:p>
             <a:fld id="{84E92838-740C-420B-9518-DF4A7DEF82EA}" type="slidenum">
               <a:rPr lang="en-US" smtClean="0"/>
-              <a:t>‹Nr.›</a:t>
+              <a:t>‹#›</a:t>
             </a:fld>
             <a:endParaRPr lang="en-US" dirty="0"/>
           </a:p>
@@ -647,7 +932,7 @@
     </p:spTree>
     <p:extLst>
       <p:ext uri="{BB962C8B-B14F-4D97-AF65-F5344CB8AC3E}">
-        <p14:creationId xmlns:p14="http://schemas.microsoft.com/office/powerpoint/2010/main" val="3567288883"/>
+        <p14:creationId xmlns:p14="http://schemas.microsoft.com/office/powerpoint/2010/main" val="3935860958"/>
       </p:ext>
     </p:extLst>
   </p:cSld>
@@ -659,7 +944,7 @@
 
 <file path=ppt/slideLayouts/slideLayout2.xml><?xml version="1.0" encoding="utf-8"?>
 <p:sldLayout xmlns:a="http://schemas.openxmlformats.org/drawingml/2006/main" xmlns:r="http://schemas.openxmlformats.org/officeDocument/2006/relationships" xmlns:p="http://schemas.openxmlformats.org/presentationml/2006/main" type="obj" preserve="1">
-  <p:cSld name="Titel und Inhalt">
+  <p:cSld name="Title and Content">
     <p:spTree>
       <p:nvGrpSpPr>
         <p:cNvPr id="1" name=""/>
@@ -690,8 +975,8 @@
           <a:lstStyle/>
           <a:p>
             <a:r>
-              <a:rPr lang="de-DE"/>
-              <a:t>Mastertitelformat bearbeiten</a:t>
+              <a:rPr lang="en-US"/>
+              <a:t>Click to edit Master title style</a:t>
             </a:r>
             <a:endParaRPr lang="en-US" dirty="0"/>
           </a:p>
@@ -714,36 +999,36 @@
           <a:p>
             <a:pPr lvl="0"/>
             <a:r>
-              <a:rPr lang="de-DE"/>
-              <a:t>Mastertextformat bearbeiten</a:t>
+              <a:rPr lang="en-US"/>
+              <a:t>Click to edit Master text styles</a:t>
             </a:r>
           </a:p>
           <a:p>
             <a:pPr lvl="1"/>
             <a:r>
-              <a:rPr lang="de-DE"/>
-              <a:t>Zweite Ebene</a:t>
+              <a:rPr lang="en-US"/>
+              <a:t>Second level</a:t>
             </a:r>
           </a:p>
           <a:p>
             <a:pPr lvl="2"/>
             <a:r>
-              <a:rPr lang="de-DE"/>
-              <a:t>Dritte Ebene</a:t>
+              <a:rPr lang="en-US"/>
+              <a:t>Third level</a:t>
             </a:r>
           </a:p>
           <a:p>
             <a:pPr lvl="3"/>
             <a:r>
-              <a:rPr lang="de-DE"/>
-              <a:t>Vierte Ebene</a:t>
+              <a:rPr lang="en-US"/>
+              <a:t>Fourth level</a:t>
             </a:r>
           </a:p>
           <a:p>
             <a:pPr lvl="4"/>
             <a:r>
-              <a:rPr lang="de-DE"/>
-              <a:t>Fünfte Ebene</a:t>
+              <a:rPr lang="en-US"/>
+              <a:t>Fifth level</a:t>
             </a:r>
             <a:endParaRPr lang="en-US" dirty="0"/>
           </a:p>
@@ -766,7 +1051,7 @@
           <a:p>
             <a:fld id="{3A25AF7A-D1F1-44F6-9E50-C79D58050BA4}" type="datetimeFigureOut">
               <a:rPr lang="en-US" smtClean="0"/>
-              <a:t>11/26/2024</a:t>
+              <a:t>6/23/2026</a:t>
             </a:fld>
             <a:endParaRPr lang="en-US" dirty="0"/>
           </a:p>
@@ -808,7 +1093,7 @@
           <a:p>
             <a:fld id="{84E92838-740C-420B-9518-DF4A7DEF82EA}" type="slidenum">
               <a:rPr lang="en-US" smtClean="0"/>
-              <a:t>‹Nr.›</a:t>
+              <a:t>‹#›</a:t>
             </a:fld>
             <a:endParaRPr lang="en-US" dirty="0"/>
           </a:p>
@@ -817,7 +1102,7 @@
     </p:spTree>
     <p:extLst>
       <p:ext uri="{BB962C8B-B14F-4D97-AF65-F5344CB8AC3E}">
-        <p14:creationId xmlns:p14="http://schemas.microsoft.com/office/powerpoint/2010/main" val="1891691148"/>
+        <p14:creationId xmlns:p14="http://schemas.microsoft.com/office/powerpoint/2010/main" val="934449513"/>
       </p:ext>
     </p:extLst>
   </p:cSld>
@@ -829,7 +1114,7 @@
 
 <file path=ppt/slideLayouts/slideLayout3.xml><?xml version="1.0" encoding="utf-8"?>
 <p:sldLayout xmlns:a="http://schemas.openxmlformats.org/drawingml/2006/main" xmlns:r="http://schemas.openxmlformats.org/officeDocument/2006/relationships" xmlns:p="http://schemas.openxmlformats.org/presentationml/2006/main" type="secHead" preserve="1">
-  <p:cSld name="Abschnitts-&#10;überschrift">
+  <p:cSld name="Section Header">
     <p:spTree>
       <p:nvGrpSpPr>
         <p:cNvPr id="1" name=""/>
@@ -856,8 +1141,8 @@
         </p:nvSpPr>
         <p:spPr>
           <a:xfrm>
-            <a:off x="687793" y="1256579"/>
-            <a:ext cx="8694539" cy="2096630"/>
+            <a:off x="614031" y="1256579"/>
+            <a:ext cx="7762102" cy="2096630"/>
           </a:xfrm>
         </p:spPr>
         <p:txBody>
@@ -869,8 +1154,8 @@
           </a:lstStyle>
           <a:p>
             <a:r>
-              <a:rPr lang="de-DE"/>
-              <a:t>Mastertitelformat bearbeiten</a:t>
+              <a:rPr lang="en-US"/>
+              <a:t>Click to edit Master title style</a:t>
             </a:r>
             <a:endParaRPr lang="en-US" dirty="0"/>
           </a:p>
@@ -888,8 +1173,8 @@
         </p:nvSpPr>
         <p:spPr>
           <a:xfrm>
-            <a:off x="687793" y="3373044"/>
-            <a:ext cx="8694539" cy="1102568"/>
+            <a:off x="614031" y="3373044"/>
+            <a:ext cx="7762102" cy="1102568"/>
           </a:xfrm>
         </p:spPr>
         <p:txBody>
@@ -989,8 +1274,8 @@
           <a:p>
             <a:pPr lvl="0"/>
             <a:r>
-              <a:rPr lang="de-DE"/>
-              <a:t>Mastertextformat bearbeiten</a:t>
+              <a:rPr lang="en-US"/>
+              <a:t>Click to edit Master text styles</a:t>
             </a:r>
           </a:p>
         </p:txBody>
@@ -1012,7 +1297,7 @@
           <a:p>
             <a:fld id="{3A25AF7A-D1F1-44F6-9E50-C79D58050BA4}" type="datetimeFigureOut">
               <a:rPr lang="en-US" smtClean="0"/>
-              <a:t>11/26/2024</a:t>
+              <a:t>6/23/2026</a:t>
             </a:fld>
             <a:endParaRPr lang="en-US" dirty="0"/>
           </a:p>
@@ -1054,7 +1339,7 @@
           <a:p>
             <a:fld id="{84E92838-740C-420B-9518-DF4A7DEF82EA}" type="slidenum">
               <a:rPr lang="en-US" smtClean="0"/>
-              <a:t>‹Nr.›</a:t>
+              <a:t>‹#›</a:t>
             </a:fld>
             <a:endParaRPr lang="en-US" dirty="0"/>
           </a:p>
@@ -1063,7 +1348,7 @@
     </p:spTree>
     <p:extLst>
       <p:ext uri="{BB962C8B-B14F-4D97-AF65-F5344CB8AC3E}">
-        <p14:creationId xmlns:p14="http://schemas.microsoft.com/office/powerpoint/2010/main" val="3561907992"/>
+        <p14:creationId xmlns:p14="http://schemas.microsoft.com/office/powerpoint/2010/main" val="4253093554"/>
       </p:ext>
     </p:extLst>
   </p:cSld>
@@ -1075,7 +1360,7 @@
 
 <file path=ppt/slideLayouts/slideLayout4.xml><?xml version="1.0" encoding="utf-8"?>
 <p:sldLayout xmlns:a="http://schemas.openxmlformats.org/drawingml/2006/main" xmlns:r="http://schemas.openxmlformats.org/officeDocument/2006/relationships" xmlns:p="http://schemas.openxmlformats.org/presentationml/2006/main" type="twoObj" preserve="1">
-  <p:cSld name="Zwei Inhalte">
+  <p:cSld name="Two Content">
     <p:spTree>
       <p:nvGrpSpPr>
         <p:cNvPr id="1" name=""/>
@@ -1106,8 +1391,8 @@
           <a:lstStyle/>
           <a:p>
             <a:r>
-              <a:rPr lang="de-DE"/>
-              <a:t>Mastertitelformat bearbeiten</a:t>
+              <a:rPr lang="en-US"/>
+              <a:t>Click to edit Master title style</a:t>
             </a:r>
             <a:endParaRPr lang="en-US" dirty="0"/>
           </a:p>
@@ -1125,8 +1410,8 @@
         </p:nvSpPr>
         <p:spPr>
           <a:xfrm>
-            <a:off x="693043" y="1341750"/>
-            <a:ext cx="4284266" cy="3198032"/>
+            <a:off x="618718" y="1341750"/>
+            <a:ext cx="3824804" cy="3198032"/>
           </a:xfrm>
         </p:spPr>
         <p:txBody>
@@ -1135,36 +1420,36 @@
           <a:p>
             <a:pPr lvl="0"/>
             <a:r>
-              <a:rPr lang="de-DE"/>
-              <a:t>Mastertextformat bearbeiten</a:t>
+              <a:rPr lang="en-US"/>
+              <a:t>Click to edit Master text styles</a:t>
             </a:r>
           </a:p>
           <a:p>
             <a:pPr lvl="1"/>
             <a:r>
-              <a:rPr lang="de-DE"/>
-              <a:t>Zweite Ebene</a:t>
+              <a:rPr lang="en-US"/>
+              <a:t>Second level</a:t>
             </a:r>
           </a:p>
           <a:p>
             <a:pPr lvl="2"/>
             <a:r>
-              <a:rPr lang="de-DE"/>
-              <a:t>Dritte Ebene</a:t>
+              <a:rPr lang="en-US"/>
+              <a:t>Third level</a:t>
             </a:r>
           </a:p>
           <a:p>
             <a:pPr lvl="3"/>
             <a:r>
-              <a:rPr lang="de-DE"/>
-              <a:t>Vierte Ebene</a:t>
+              <a:rPr lang="en-US"/>
+              <a:t>Fourth level</a:t>
             </a:r>
           </a:p>
           <a:p>
             <a:pPr lvl="4"/>
             <a:r>
-              <a:rPr lang="de-DE"/>
-              <a:t>Fünfte Ebene</a:t>
+              <a:rPr lang="en-US"/>
+              <a:t>Fifth level</a:t>
             </a:r>
             <a:endParaRPr lang="en-US" dirty="0"/>
           </a:p>
@@ -1182,8 +1467,8 @@
         </p:nvSpPr>
         <p:spPr>
           <a:xfrm>
-            <a:off x="5103316" y="1341750"/>
-            <a:ext cx="4284266" cy="3198032"/>
+            <a:off x="4556016" y="1341750"/>
+            <a:ext cx="3824804" cy="3198032"/>
           </a:xfrm>
         </p:spPr>
         <p:txBody>
@@ -1192,36 +1477,36 @@
           <a:p>
             <a:pPr lvl="0"/>
             <a:r>
-              <a:rPr lang="de-DE"/>
-              <a:t>Mastertextformat bearbeiten</a:t>
+              <a:rPr lang="en-US"/>
+              <a:t>Click to edit Master text styles</a:t>
             </a:r>
           </a:p>
           <a:p>
             <a:pPr lvl="1"/>
             <a:r>
-              <a:rPr lang="de-DE"/>
-              <a:t>Zweite Ebene</a:t>
+              <a:rPr lang="en-US"/>
+              <a:t>Second level</a:t>
             </a:r>
           </a:p>
           <a:p>
             <a:pPr lvl="2"/>
             <a:r>
-              <a:rPr lang="de-DE"/>
-              <a:t>Dritte Ebene</a:t>
+              <a:rPr lang="en-US"/>
+              <a:t>Third level</a:t>
             </a:r>
           </a:p>
           <a:p>
             <a:pPr lvl="3"/>
             <a:r>
-              <a:rPr lang="de-DE"/>
-              <a:t>Vierte Ebene</a:t>
+              <a:rPr lang="en-US"/>
+              <a:t>Fourth level</a:t>
             </a:r>
           </a:p>
           <a:p>
             <a:pPr lvl="4"/>
             <a:r>
-              <a:rPr lang="de-DE"/>
-              <a:t>Fünfte Ebene</a:t>
+              <a:rPr lang="en-US"/>
+              <a:t>Fifth level</a:t>
             </a:r>
             <a:endParaRPr lang="en-US" dirty="0"/>
           </a:p>
@@ -1244,7 +1529,7 @@
           <a:p>
             <a:fld id="{3A25AF7A-D1F1-44F6-9E50-C79D58050BA4}" type="datetimeFigureOut">
               <a:rPr lang="en-US" smtClean="0"/>
-              <a:t>11/26/2024</a:t>
+              <a:t>6/23/2026</a:t>
             </a:fld>
             <a:endParaRPr lang="en-US" dirty="0"/>
           </a:p>
@@ -1286,7 +1571,7 @@
           <a:p>
             <a:fld id="{84E92838-740C-420B-9518-DF4A7DEF82EA}" type="slidenum">
               <a:rPr lang="en-US" smtClean="0"/>
-              <a:t>‹Nr.›</a:t>
+              <a:t>‹#›</a:t>
             </a:fld>
             <a:endParaRPr lang="en-US" dirty="0"/>
           </a:p>
@@ -1295,7 +1580,7 @@
     </p:spTree>
     <p:extLst>
       <p:ext uri="{BB962C8B-B14F-4D97-AF65-F5344CB8AC3E}">
-        <p14:creationId xmlns:p14="http://schemas.microsoft.com/office/powerpoint/2010/main" val="1026806623"/>
+        <p14:creationId xmlns:p14="http://schemas.microsoft.com/office/powerpoint/2010/main" val="1981750471"/>
       </p:ext>
     </p:extLst>
   </p:cSld>
@@ -1307,7 +1592,7 @@
 
 <file path=ppt/slideLayouts/slideLayout5.xml><?xml version="1.0" encoding="utf-8"?>
 <p:sldLayout xmlns:a="http://schemas.openxmlformats.org/drawingml/2006/main" xmlns:r="http://schemas.openxmlformats.org/officeDocument/2006/relationships" xmlns:p="http://schemas.openxmlformats.org/presentationml/2006/main" type="twoTxTwoObj" preserve="1">
-  <p:cSld name="Vergleich">
+  <p:cSld name="Comparison">
     <p:spTree>
       <p:nvGrpSpPr>
         <p:cNvPr id="1" name=""/>
@@ -1334,8 +1619,8 @@
         </p:nvSpPr>
         <p:spPr>
           <a:xfrm>
-            <a:off x="694356" y="268350"/>
-            <a:ext cx="8694539" cy="974228"/>
+            <a:off x="619890" y="268350"/>
+            <a:ext cx="7762102" cy="974228"/>
           </a:xfrm>
         </p:spPr>
         <p:txBody>
@@ -1343,8 +1628,8 @@
           <a:lstStyle/>
           <a:p>
             <a:r>
-              <a:rPr lang="de-DE"/>
-              <a:t>Mastertitelformat bearbeiten</a:t>
+              <a:rPr lang="en-US"/>
+              <a:t>Click to edit Master title style</a:t>
             </a:r>
             <a:endParaRPr lang="en-US" dirty="0"/>
           </a:p>
@@ -1362,8 +1647,8 @@
         </p:nvSpPr>
         <p:spPr>
           <a:xfrm>
-            <a:off x="694357" y="1235577"/>
-            <a:ext cx="4264576" cy="605537"/>
+            <a:off x="619891" y="1235577"/>
+            <a:ext cx="3807226" cy="605537"/>
           </a:xfrm>
         </p:spPr>
         <p:txBody>
@@ -1409,8 +1694,8 @@
           <a:p>
             <a:pPr lvl="0"/>
             <a:r>
-              <a:rPr lang="de-DE"/>
-              <a:t>Mastertextformat bearbeiten</a:t>
+              <a:rPr lang="en-US"/>
+              <a:t>Click to edit Master text styles</a:t>
             </a:r>
           </a:p>
         </p:txBody>
@@ -1427,8 +1712,8 @@
         </p:nvSpPr>
         <p:spPr>
           <a:xfrm>
-            <a:off x="694357" y="1841114"/>
-            <a:ext cx="4264576" cy="2708002"/>
+            <a:off x="619891" y="1841114"/>
+            <a:ext cx="3807226" cy="2708002"/>
           </a:xfrm>
         </p:spPr>
         <p:txBody>
@@ -1437,36 +1722,36 @@
           <a:p>
             <a:pPr lvl="0"/>
             <a:r>
-              <a:rPr lang="de-DE"/>
-              <a:t>Mastertextformat bearbeiten</a:t>
+              <a:rPr lang="en-US"/>
+              <a:t>Click to edit Master text styles</a:t>
             </a:r>
           </a:p>
           <a:p>
             <a:pPr lvl="1"/>
             <a:r>
-              <a:rPr lang="de-DE"/>
-              <a:t>Zweite Ebene</a:t>
+              <a:rPr lang="en-US"/>
+              <a:t>Second level</a:t>
             </a:r>
           </a:p>
           <a:p>
             <a:pPr lvl="2"/>
             <a:r>
-              <a:rPr lang="de-DE"/>
-              <a:t>Dritte Ebene</a:t>
+              <a:rPr lang="en-US"/>
+              <a:t>Third level</a:t>
             </a:r>
           </a:p>
           <a:p>
             <a:pPr lvl="3"/>
             <a:r>
-              <a:rPr lang="de-DE"/>
-              <a:t>Vierte Ebene</a:t>
+              <a:rPr lang="en-US"/>
+              <a:t>Fourth level</a:t>
             </a:r>
           </a:p>
           <a:p>
             <a:pPr lvl="4"/>
             <a:r>
-              <a:rPr lang="de-DE"/>
-              <a:t>Fünfte Ebene</a:t>
+              <a:rPr lang="en-US"/>
+              <a:t>Fifth level</a:t>
             </a:r>
             <a:endParaRPr lang="en-US" dirty="0"/>
           </a:p>
@@ -1484,8 +1769,8 @@
         </p:nvSpPr>
         <p:spPr>
           <a:xfrm>
-            <a:off x="5103316" y="1235577"/>
-            <a:ext cx="4285579" cy="605537"/>
+            <a:off x="4556016" y="1235577"/>
+            <a:ext cx="3825976" cy="605537"/>
           </a:xfrm>
         </p:spPr>
         <p:txBody>
@@ -1531,8 +1816,8 @@
           <a:p>
             <a:pPr lvl="0"/>
             <a:r>
-              <a:rPr lang="de-DE"/>
-              <a:t>Mastertextformat bearbeiten</a:t>
+              <a:rPr lang="en-US"/>
+              <a:t>Click to edit Master text styles</a:t>
             </a:r>
           </a:p>
         </p:txBody>
@@ -1549,8 +1834,8 @@
         </p:nvSpPr>
         <p:spPr>
           <a:xfrm>
-            <a:off x="5103316" y="1841114"/>
-            <a:ext cx="4285579" cy="2708002"/>
+            <a:off x="4556016" y="1841114"/>
+            <a:ext cx="3825976" cy="2708002"/>
           </a:xfrm>
         </p:spPr>
         <p:txBody>
@@ -1559,36 +1844,36 @@
           <a:p>
             <a:pPr lvl="0"/>
             <a:r>
-              <a:rPr lang="de-DE"/>
-              <a:t>Mastertextformat bearbeiten</a:t>
+              <a:rPr lang="en-US"/>
+              <a:t>Click to edit Master text styles</a:t>
             </a:r>
           </a:p>
           <a:p>
             <a:pPr lvl="1"/>
             <a:r>
-              <a:rPr lang="de-DE"/>
-              <a:t>Zweite Ebene</a:t>
+              <a:rPr lang="en-US"/>
+              <a:t>Second level</a:t>
             </a:r>
           </a:p>
           <a:p>
             <a:pPr lvl="2"/>
             <a:r>
-              <a:rPr lang="de-DE"/>
-              <a:t>Dritte Ebene</a:t>
+              <a:rPr lang="en-US"/>
+              <a:t>Third level</a:t>
             </a:r>
           </a:p>
           <a:p>
             <a:pPr lvl="3"/>
             <a:r>
-              <a:rPr lang="de-DE"/>
-              <a:t>Vierte Ebene</a:t>
+              <a:rPr lang="en-US"/>
+              <a:t>Fourth level</a:t>
             </a:r>
           </a:p>
           <a:p>
             <a:pPr lvl="4"/>
             <a:r>
-              <a:rPr lang="de-DE"/>
-              <a:t>Fünfte Ebene</a:t>
+              <a:rPr lang="en-US"/>
+              <a:t>Fifth level</a:t>
             </a:r>
             <a:endParaRPr lang="en-US" dirty="0"/>
           </a:p>
@@ -1611,7 +1896,7 @@
           <a:p>
             <a:fld id="{3A25AF7A-D1F1-44F6-9E50-C79D58050BA4}" type="datetimeFigureOut">
               <a:rPr lang="en-US" smtClean="0"/>
-              <a:t>11/26/2024</a:t>
+              <a:t>6/23/2026</a:t>
             </a:fld>
             <a:endParaRPr lang="en-US" dirty="0"/>
           </a:p>
@@ -1653,7 +1938,7 @@
           <a:p>
             <a:fld id="{84E92838-740C-420B-9518-DF4A7DEF82EA}" type="slidenum">
               <a:rPr lang="en-US" smtClean="0"/>
-              <a:t>‹Nr.›</a:t>
+              <a:t>‹#›</a:t>
             </a:fld>
             <a:endParaRPr lang="en-US" dirty="0"/>
           </a:p>
@@ -1662,7 +1947,7 @@
     </p:spTree>
     <p:extLst>
       <p:ext uri="{BB962C8B-B14F-4D97-AF65-F5344CB8AC3E}">
-        <p14:creationId xmlns:p14="http://schemas.microsoft.com/office/powerpoint/2010/main" val="4149035886"/>
+        <p14:creationId xmlns:p14="http://schemas.microsoft.com/office/powerpoint/2010/main" val="2691611013"/>
       </p:ext>
     </p:extLst>
   </p:cSld>
@@ -1674,7 +1959,7 @@
 
 <file path=ppt/slideLayouts/slideLayout6.xml><?xml version="1.0" encoding="utf-8"?>
 <p:sldLayout xmlns:a="http://schemas.openxmlformats.org/drawingml/2006/main" xmlns:r="http://schemas.openxmlformats.org/officeDocument/2006/relationships" xmlns:p="http://schemas.openxmlformats.org/presentationml/2006/main" type="titleOnly" preserve="1">
-  <p:cSld name="Nur Titel">
+  <p:cSld name="Title Only">
     <p:spTree>
       <p:nvGrpSpPr>
         <p:cNvPr id="1" name=""/>
@@ -1705,8 +1990,8 @@
           <a:lstStyle/>
           <a:p>
             <a:r>
-              <a:rPr lang="de-DE"/>
-              <a:t>Mastertitelformat bearbeiten</a:t>
+              <a:rPr lang="en-US"/>
+              <a:t>Click to edit Master title style</a:t>
             </a:r>
             <a:endParaRPr lang="en-US" dirty="0"/>
           </a:p>
@@ -1729,7 +2014,7 @@
           <a:p>
             <a:fld id="{3A25AF7A-D1F1-44F6-9E50-C79D58050BA4}" type="datetimeFigureOut">
               <a:rPr lang="en-US" smtClean="0"/>
-              <a:t>11/26/2024</a:t>
+              <a:t>6/23/2026</a:t>
             </a:fld>
             <a:endParaRPr lang="en-US" dirty="0"/>
           </a:p>
@@ -1771,7 +2056,7 @@
           <a:p>
             <a:fld id="{84E92838-740C-420B-9518-DF4A7DEF82EA}" type="slidenum">
               <a:rPr lang="en-US" smtClean="0"/>
-              <a:t>‹Nr.›</a:t>
+              <a:t>‹#›</a:t>
             </a:fld>
             <a:endParaRPr lang="en-US" dirty="0"/>
           </a:p>
@@ -1780,7 +2065,7 @@
     </p:spTree>
     <p:extLst>
       <p:ext uri="{BB962C8B-B14F-4D97-AF65-F5344CB8AC3E}">
-        <p14:creationId xmlns:p14="http://schemas.microsoft.com/office/powerpoint/2010/main" val="1363155565"/>
+        <p14:creationId xmlns:p14="http://schemas.microsoft.com/office/powerpoint/2010/main" val="407720651"/>
       </p:ext>
     </p:extLst>
   </p:cSld>
@@ -1792,7 +2077,7 @@
 
 <file path=ppt/slideLayouts/slideLayout7.xml><?xml version="1.0" encoding="utf-8"?>
 <p:sldLayout xmlns:a="http://schemas.openxmlformats.org/drawingml/2006/main" xmlns:r="http://schemas.openxmlformats.org/officeDocument/2006/relationships" xmlns:p="http://schemas.openxmlformats.org/presentationml/2006/main" type="blank" preserve="1">
-  <p:cSld name="Leer">
+  <p:cSld name="Blank">
     <p:spTree>
       <p:nvGrpSpPr>
         <p:cNvPr id="1" name=""/>
@@ -1824,7 +2109,7 @@
           <a:p>
             <a:fld id="{3A25AF7A-D1F1-44F6-9E50-C79D58050BA4}" type="datetimeFigureOut">
               <a:rPr lang="en-US" smtClean="0"/>
-              <a:t>11/26/2024</a:t>
+              <a:t>6/23/2026</a:t>
             </a:fld>
             <a:endParaRPr lang="en-US" dirty="0"/>
           </a:p>
@@ -1866,7 +2151,7 @@
           <a:p>
             <a:fld id="{84E92838-740C-420B-9518-DF4A7DEF82EA}" type="slidenum">
               <a:rPr lang="en-US" smtClean="0"/>
-              <a:t>‹Nr.›</a:t>
+              <a:t>‹#›</a:t>
             </a:fld>
             <a:endParaRPr lang="en-US" dirty="0"/>
           </a:p>
@@ -1875,7 +2160,7 @@
     </p:spTree>
     <p:extLst>
       <p:ext uri="{BB962C8B-B14F-4D97-AF65-F5344CB8AC3E}">
-        <p14:creationId xmlns:p14="http://schemas.microsoft.com/office/powerpoint/2010/main" val="3686524515"/>
+        <p14:creationId xmlns:p14="http://schemas.microsoft.com/office/powerpoint/2010/main" val="6573746"/>
       </p:ext>
     </p:extLst>
   </p:cSld>
@@ -1887,7 +2172,7 @@
 
 <file path=ppt/slideLayouts/slideLayout8.xml><?xml version="1.0" encoding="utf-8"?>
 <p:sldLayout xmlns:a="http://schemas.openxmlformats.org/drawingml/2006/main" xmlns:r="http://schemas.openxmlformats.org/officeDocument/2006/relationships" xmlns:p="http://schemas.openxmlformats.org/presentationml/2006/main" type="objTx" preserve="1">
-  <p:cSld name="Inhalt mit Überschrift">
+  <p:cSld name="Content with Caption">
     <p:spTree>
       <p:nvGrpSpPr>
         <p:cNvPr id="1" name=""/>
@@ -1914,8 +2199,8 @@
         </p:nvSpPr>
         <p:spPr>
           <a:xfrm>
-            <a:off x="694356" y="336021"/>
-            <a:ext cx="3251264" cy="1176073"/>
+            <a:off x="619891" y="336021"/>
+            <a:ext cx="2902585" cy="1176073"/>
           </a:xfrm>
         </p:spPr>
         <p:txBody>
@@ -1927,8 +2212,8 @@
           </a:lstStyle>
           <a:p>
             <a:r>
-              <a:rPr lang="de-DE"/>
-              <a:t>Mastertitelformat bearbeiten</a:t>
+              <a:rPr lang="en-US"/>
+              <a:t>Click to edit Master title style</a:t>
             </a:r>
             <a:endParaRPr lang="en-US" dirty="0"/>
           </a:p>
@@ -1946,8 +2231,8 @@
         </p:nvSpPr>
         <p:spPr>
           <a:xfrm>
-            <a:off x="4285579" y="725712"/>
-            <a:ext cx="5103316" cy="3581889"/>
+            <a:off x="3825976" y="725712"/>
+            <a:ext cx="4556016" cy="3581889"/>
           </a:xfrm>
         </p:spPr>
         <p:txBody>
@@ -1984,36 +2269,36 @@
           <a:p>
             <a:pPr lvl="0"/>
             <a:r>
-              <a:rPr lang="de-DE"/>
-              <a:t>Mastertextformat bearbeiten</a:t>
+              <a:rPr lang="en-US"/>
+              <a:t>Click to edit Master text styles</a:t>
             </a:r>
           </a:p>
           <a:p>
             <a:pPr lvl="1"/>
             <a:r>
-              <a:rPr lang="de-DE"/>
-              <a:t>Zweite Ebene</a:t>
+              <a:rPr lang="en-US"/>
+              <a:t>Second level</a:t>
             </a:r>
           </a:p>
           <a:p>
             <a:pPr lvl="2"/>
             <a:r>
-              <a:rPr lang="de-DE"/>
-              <a:t>Dritte Ebene</a:t>
+              <a:rPr lang="en-US"/>
+              <a:t>Third level</a:t>
             </a:r>
           </a:p>
           <a:p>
             <a:pPr lvl="3"/>
             <a:r>
-              <a:rPr lang="de-DE"/>
-              <a:t>Vierte Ebene</a:t>
+              <a:rPr lang="en-US"/>
+              <a:t>Fourth level</a:t>
             </a:r>
           </a:p>
           <a:p>
             <a:pPr lvl="4"/>
             <a:r>
-              <a:rPr lang="de-DE"/>
-              <a:t>Fünfte Ebene</a:t>
+              <a:rPr lang="en-US"/>
+              <a:t>Fifth level</a:t>
             </a:r>
             <a:endParaRPr lang="en-US" dirty="0"/>
           </a:p>
@@ -2031,8 +2316,8 @@
         </p:nvSpPr>
         <p:spPr>
           <a:xfrm>
-            <a:off x="694356" y="1512094"/>
-            <a:ext cx="3251264" cy="2801341"/>
+            <a:off x="619891" y="1512094"/>
+            <a:ext cx="2902585" cy="2801341"/>
           </a:xfrm>
         </p:spPr>
         <p:txBody>
@@ -2078,8 +2363,8 @@
           <a:p>
             <a:pPr lvl="0"/>
             <a:r>
-              <a:rPr lang="de-DE"/>
-              <a:t>Mastertextformat bearbeiten</a:t>
+              <a:rPr lang="en-US"/>
+              <a:t>Click to edit Master text styles</a:t>
             </a:r>
           </a:p>
         </p:txBody>
@@ -2101,7 +2386,7 @@
           <a:p>
             <a:fld id="{3A25AF7A-D1F1-44F6-9E50-C79D58050BA4}" type="datetimeFigureOut">
               <a:rPr lang="en-US" smtClean="0"/>
-              <a:t>11/26/2024</a:t>
+              <a:t>6/23/2026</a:t>
             </a:fld>
             <a:endParaRPr lang="en-US" dirty="0"/>
           </a:p>
@@ -2143,7 +2428,7 @@
           <a:p>
             <a:fld id="{84E92838-740C-420B-9518-DF4A7DEF82EA}" type="slidenum">
               <a:rPr lang="en-US" smtClean="0"/>
-              <a:t>‹Nr.›</a:t>
+              <a:t>‹#›</a:t>
             </a:fld>
             <a:endParaRPr lang="en-US" dirty="0"/>
           </a:p>
@@ -2152,7 +2437,7 @@
     </p:spTree>
     <p:extLst>
       <p:ext uri="{BB962C8B-B14F-4D97-AF65-F5344CB8AC3E}">
-        <p14:creationId xmlns:p14="http://schemas.microsoft.com/office/powerpoint/2010/main" val="4001602018"/>
+        <p14:creationId xmlns:p14="http://schemas.microsoft.com/office/powerpoint/2010/main" val="3039262923"/>
       </p:ext>
     </p:extLst>
   </p:cSld>
@@ -2164,7 +2449,7 @@
 
 <file path=ppt/slideLayouts/slideLayout9.xml><?xml version="1.0" encoding="utf-8"?>
 <p:sldLayout xmlns:a="http://schemas.openxmlformats.org/drawingml/2006/main" xmlns:r="http://schemas.openxmlformats.org/officeDocument/2006/relationships" xmlns:p="http://schemas.openxmlformats.org/presentationml/2006/main" type="picTx" preserve="1">
-  <p:cSld name="Bild mit Überschrift">
+  <p:cSld name="Picture with Caption">
     <p:spTree>
       <p:nvGrpSpPr>
         <p:cNvPr id="1" name=""/>
@@ -2191,8 +2476,8 @@
         </p:nvSpPr>
         <p:spPr>
           <a:xfrm>
-            <a:off x="694356" y="336021"/>
-            <a:ext cx="3251264" cy="1176073"/>
+            <a:off x="619891" y="336021"/>
+            <a:ext cx="2902585" cy="1176073"/>
           </a:xfrm>
         </p:spPr>
         <p:txBody>
@@ -2204,8 +2489,8 @@
           </a:lstStyle>
           <a:p>
             <a:r>
-              <a:rPr lang="de-DE"/>
-              <a:t>Mastertitelformat bearbeiten</a:t>
+              <a:rPr lang="en-US"/>
+              <a:t>Click to edit Master title style</a:t>
             </a:r>
             <a:endParaRPr lang="en-US" dirty="0"/>
           </a:p>
@@ -2223,8 +2508,8 @@
         </p:nvSpPr>
         <p:spPr>
           <a:xfrm>
-            <a:off x="4285579" y="725712"/>
-            <a:ext cx="5103316" cy="3581889"/>
+            <a:off x="3825976" y="725712"/>
+            <a:ext cx="4556016" cy="3581889"/>
           </a:xfrm>
         </p:spPr>
         <p:txBody>
@@ -2269,8 +2554,8 @@
           </a:lstStyle>
           <a:p>
             <a:r>
-              <a:rPr lang="de-DE" dirty="0"/>
-              <a:t>Bild durch Klicken auf Symbol hinzufügen</a:t>
+              <a:rPr lang="en-US"/>
+              <a:t>Click icon to add picture</a:t>
             </a:r>
             <a:endParaRPr lang="en-US" dirty="0"/>
           </a:p>
@@ -2288,8 +2573,8 @@
         </p:nvSpPr>
         <p:spPr>
           <a:xfrm>
-            <a:off x="694356" y="1512094"/>
-            <a:ext cx="3251264" cy="2801341"/>
+            <a:off x="619891" y="1512094"/>
+            <a:ext cx="2902585" cy="2801341"/>
           </a:xfrm>
         </p:spPr>
         <p:txBody>
@@ -2335,8 +2620,8 @@
           <a:p>
             <a:pPr lvl="0"/>
             <a:r>
-              <a:rPr lang="de-DE"/>
-              <a:t>Mastertextformat bearbeiten</a:t>
+              <a:rPr lang="en-US"/>
+              <a:t>Click to edit Master text styles</a:t>
             </a:r>
           </a:p>
         </p:txBody>
@@ -2358,7 +2643,7 @@
           <a:p>
             <a:fld id="{3A25AF7A-D1F1-44F6-9E50-C79D58050BA4}" type="datetimeFigureOut">
               <a:rPr lang="en-US" smtClean="0"/>
-              <a:t>11/26/2024</a:t>
+              <a:t>6/23/2026</a:t>
             </a:fld>
             <a:endParaRPr lang="en-US" dirty="0"/>
           </a:p>
@@ -2400,7 +2685,7 @@
           <a:p>
             <a:fld id="{84E92838-740C-420B-9518-DF4A7DEF82EA}" type="slidenum">
               <a:rPr lang="en-US" smtClean="0"/>
-              <a:t>‹Nr.›</a:t>
+              <a:t>‹#›</a:t>
             </a:fld>
             <a:endParaRPr lang="en-US" dirty="0"/>
           </a:p>
@@ -2409,7 +2694,7 @@
     </p:spTree>
     <p:extLst>
       <p:ext uri="{BB962C8B-B14F-4D97-AF65-F5344CB8AC3E}">
-        <p14:creationId xmlns:p14="http://schemas.microsoft.com/office/powerpoint/2010/main" val="2759177782"/>
+        <p14:creationId xmlns:p14="http://schemas.microsoft.com/office/powerpoint/2010/main" val="2494421480"/>
       </p:ext>
     </p:extLst>
   </p:cSld>
@@ -2453,8 +2738,8 @@
         </p:nvSpPr>
         <p:spPr>
           <a:xfrm>
-            <a:off x="693043" y="268350"/>
-            <a:ext cx="8694539" cy="974228"/>
+            <a:off x="618718" y="268350"/>
+            <a:ext cx="7762102" cy="974228"/>
           </a:xfrm>
           <a:prstGeom prst="rect">
             <a:avLst/>
@@ -2467,8 +2752,8 @@
           <a:lstStyle/>
           <a:p>
             <a:r>
-              <a:rPr lang="de-DE"/>
-              <a:t>Mastertitelformat bearbeiten</a:t>
+              <a:rPr lang="en-US"/>
+              <a:t>Click to edit Master title style</a:t>
             </a:r>
             <a:endParaRPr lang="en-US" dirty="0"/>
           </a:p>
@@ -2486,8 +2771,8 @@
         </p:nvSpPr>
         <p:spPr>
           <a:xfrm>
-            <a:off x="693043" y="1341750"/>
-            <a:ext cx="8694539" cy="3198032"/>
+            <a:off x="618718" y="1341750"/>
+            <a:ext cx="7762102" cy="3198032"/>
           </a:xfrm>
           <a:prstGeom prst="rect">
             <a:avLst/>
@@ -2501,36 +2786,36 @@
           <a:p>
             <a:pPr lvl="0"/>
             <a:r>
-              <a:rPr lang="de-DE"/>
-              <a:t>Mastertextformat bearbeiten</a:t>
+              <a:rPr lang="en-US"/>
+              <a:t>Click to edit Master text styles</a:t>
             </a:r>
           </a:p>
           <a:p>
             <a:pPr lvl="1"/>
             <a:r>
-              <a:rPr lang="de-DE"/>
-              <a:t>Zweite Ebene</a:t>
+              <a:rPr lang="en-US"/>
+              <a:t>Second level</a:t>
             </a:r>
           </a:p>
           <a:p>
             <a:pPr lvl="2"/>
             <a:r>
-              <a:rPr lang="de-DE"/>
-              <a:t>Dritte Ebene</a:t>
+              <a:rPr lang="en-US"/>
+              <a:t>Third level</a:t>
             </a:r>
           </a:p>
           <a:p>
             <a:pPr lvl="3"/>
             <a:r>
-              <a:rPr lang="de-DE"/>
-              <a:t>Vierte Ebene</a:t>
+              <a:rPr lang="en-US"/>
+              <a:t>Fourth level</a:t>
             </a:r>
           </a:p>
           <a:p>
             <a:pPr lvl="4"/>
             <a:r>
-              <a:rPr lang="de-DE"/>
-              <a:t>Fünfte Ebene</a:t>
+              <a:rPr lang="en-US"/>
+              <a:t>Fifth level</a:t>
             </a:r>
             <a:endParaRPr lang="en-US" dirty="0"/>
           </a:p>
@@ -2548,8 +2833,8 @@
         </p:nvSpPr>
         <p:spPr>
           <a:xfrm>
-            <a:off x="693043" y="4671624"/>
-            <a:ext cx="2268141" cy="268350"/>
+            <a:off x="618718" y="4671624"/>
+            <a:ext cx="2024896" cy="268350"/>
           </a:xfrm>
           <a:prstGeom prst="rect">
             <a:avLst/>
@@ -2571,7 +2856,7 @@
           <a:p>
             <a:fld id="{3A25AF7A-D1F1-44F6-9E50-C79D58050BA4}" type="datetimeFigureOut">
               <a:rPr lang="en-US" smtClean="0"/>
-              <a:t>11/26/2024</a:t>
+              <a:t>6/23/2026</a:t>
             </a:fld>
             <a:endParaRPr lang="en-US" dirty="0"/>
           </a:p>
@@ -2589,8 +2874,8 @@
         </p:nvSpPr>
         <p:spPr>
           <a:xfrm>
-            <a:off x="3339207" y="4671624"/>
-            <a:ext cx="3402211" cy="268350"/>
+            <a:off x="2981097" y="4671624"/>
+            <a:ext cx="3037344" cy="268350"/>
           </a:xfrm>
           <a:prstGeom prst="rect">
             <a:avLst/>
@@ -2626,8 +2911,8 @@
         </p:nvSpPr>
         <p:spPr>
           <a:xfrm>
-            <a:off x="7119441" y="4671624"/>
-            <a:ext cx="2268141" cy="268350"/>
+            <a:off x="6355924" y="4671624"/>
+            <a:ext cx="2024896" cy="268350"/>
           </a:xfrm>
           <a:prstGeom prst="rect">
             <a:avLst/>
@@ -2649,7 +2934,7 @@
           <a:p>
             <a:fld id="{84E92838-740C-420B-9518-DF4A7DEF82EA}" type="slidenum">
               <a:rPr lang="en-US" smtClean="0"/>
-              <a:t>‹Nr.›</a:t>
+              <a:t>‹#›</a:t>
             </a:fld>
             <a:endParaRPr lang="en-US" dirty="0"/>
           </a:p>
@@ -2658,23 +2943,23 @@
     </p:spTree>
     <p:extLst>
       <p:ext uri="{BB962C8B-B14F-4D97-AF65-F5344CB8AC3E}">
-        <p14:creationId xmlns:p14="http://schemas.microsoft.com/office/powerpoint/2010/main" val="3945091451"/>
+        <p14:creationId xmlns:p14="http://schemas.microsoft.com/office/powerpoint/2010/main" val="223258274"/>
       </p:ext>
     </p:extLst>
   </p:cSld>
   <p:clrMap bg1="lt1" tx1="dk1" bg2="lt2" tx2="dk2" accent1="accent1" accent2="accent2" accent3="accent3" accent4="accent4" accent5="accent5" accent6="accent6" hlink="hlink" folHlink="folHlink"/>
   <p:sldLayoutIdLst>
-    <p:sldLayoutId id="2147483661" r:id="rId1"/>
-    <p:sldLayoutId id="2147483662" r:id="rId2"/>
-    <p:sldLayoutId id="2147483663" r:id="rId3"/>
-    <p:sldLayoutId id="2147483664" r:id="rId4"/>
-    <p:sldLayoutId id="2147483665" r:id="rId5"/>
-    <p:sldLayoutId id="2147483666" r:id="rId6"/>
-    <p:sldLayoutId id="2147483667" r:id="rId7"/>
-    <p:sldLayoutId id="2147483668" r:id="rId8"/>
-    <p:sldLayoutId id="2147483669" r:id="rId9"/>
-    <p:sldLayoutId id="2147483670" r:id="rId10"/>
-    <p:sldLayoutId id="2147483671" r:id="rId11"/>
+    <p:sldLayoutId id="2147483673" r:id="rId1"/>
+    <p:sldLayoutId id="2147483674" r:id="rId2"/>
+    <p:sldLayoutId id="2147483675" r:id="rId3"/>
+    <p:sldLayoutId id="2147483676" r:id="rId4"/>
+    <p:sldLayoutId id="2147483677" r:id="rId5"/>
+    <p:sldLayoutId id="2147483678" r:id="rId6"/>
+    <p:sldLayoutId id="2147483679" r:id="rId7"/>
+    <p:sldLayoutId id="2147483680" r:id="rId8"/>
+    <p:sldLayoutId id="2147483681" r:id="rId9"/>
+    <p:sldLayoutId id="2147483682" r:id="rId10"/>
+    <p:sldLayoutId id="2147483683" r:id="rId11"/>
   </p:sldLayoutIdLst>
   <p:txStyles>
     <p:titleStyle>
@@ -2978,10 +3263,10 @@
       </p:grpSpPr>
       <p:grpSp>
         <p:nvGrpSpPr>
-          <p:cNvPr id="2" name="Group 1">
+          <p:cNvPr id="36" name="Group 35">
             <a:extLst>
               <a:ext uri="{FF2B5EF4-FFF2-40B4-BE49-F238E27FC236}">
-                <a16:creationId xmlns:a16="http://schemas.microsoft.com/office/drawing/2014/main" id="{BCAE344D-4F0E-B748-6127-5C543E13F4BC}"/>
+                <a16:creationId xmlns:a16="http://schemas.microsoft.com/office/drawing/2014/main" id="{29FE66A5-143A-7B46-44F1-7AFCDE5A4FD8}"/>
               </a:ext>
             </a:extLst>
           </p:cNvPr>
@@ -2990,108 +3275,18 @@
         </p:nvGrpSpPr>
         <p:grpSpPr>
           <a:xfrm>
-            <a:off x="625" y="0"/>
-            <a:ext cx="10080000" cy="5040000"/>
-            <a:chOff x="625" y="0"/>
-            <a:chExt cx="10080000" cy="5040000"/>
+            <a:off x="-16043" y="0"/>
+            <a:ext cx="9000000" cy="5040000"/>
+            <a:chOff x="-16043" y="0"/>
+            <a:chExt cx="9000000" cy="5040000"/>
           </a:xfrm>
         </p:grpSpPr>
-        <p:sp>
-          <p:nvSpPr>
-            <p:cNvPr id="90" name="Rechteck 89">
+        <p:grpSp>
+          <p:nvGrpSpPr>
+            <p:cNvPr id="2" name="Group 1">
               <a:extLst>
                 <a:ext uri="{FF2B5EF4-FFF2-40B4-BE49-F238E27FC236}">
-                  <a16:creationId xmlns:a16="http://schemas.microsoft.com/office/drawing/2014/main" id="{A44146A4-80AA-4FB5-8B0A-6BB19B353D43}"/>
-                </a:ext>
-              </a:extLst>
-            </p:cNvPr>
-            <p:cNvSpPr/>
-            <p:nvPr/>
-          </p:nvSpPr>
-          <p:spPr bwMode="gray">
-            <a:xfrm rot="16200000">
-              <a:off x="-371049" y="3582269"/>
-              <a:ext cx="1791642" cy="548087"/>
-            </a:xfrm>
-            <a:prstGeom prst="rect">
-              <a:avLst/>
-            </a:prstGeom>
-            <a:gradFill flip="none" rotWithShape="1">
-              <a:gsLst>
-                <a:gs pos="0">
-                  <a:srgbClr val="00BCFF">
-                    <a:shade val="30000"/>
-                    <a:satMod val="115000"/>
-                  </a:srgbClr>
-                </a:gs>
-                <a:gs pos="50000">
-                  <a:srgbClr val="00BCFF">
-                    <a:shade val="67500"/>
-                    <a:satMod val="115000"/>
-                  </a:srgbClr>
-                </a:gs>
-                <a:gs pos="100000">
-                  <a:srgbClr val="00BCFF">
-                    <a:shade val="100000"/>
-                    <a:satMod val="115000"/>
-                  </a:srgbClr>
-                </a:gs>
-              </a:gsLst>
-              <a:lin ang="2700000" scaled="1"/>
-              <a:tileRect/>
-            </a:gradFill>
-            <a:ln w="25400" cap="flat" cmpd="sng" algn="ctr">
-              <a:noFill/>
-              <a:prstDash val="solid"/>
-            </a:ln>
-            <a:effectLst/>
-          </p:spPr>
-          <p:txBody>
-            <a:bodyPr rtlCol="0" anchor="ctr"/>
-            <a:lstStyle/>
-            <a:p>
-              <a:pPr marL="0" marR="0" lvl="0" indent="0" algn="ctr" defTabSz="914400" eaLnBrk="1" fontAlgn="auto" latinLnBrk="0" hangingPunct="1">
-                <a:lnSpc>
-                  <a:spcPct val="100000"/>
-                </a:lnSpc>
-                <a:spcBef>
-                  <a:spcPts val="0"/>
-                </a:spcBef>
-                <a:spcAft>
-                  <a:spcPts val="0"/>
-                </a:spcAft>
-                <a:buClrTx/>
-                <a:buSzTx/>
-                <a:buFontTx/>
-                <a:buNone/>
-                <a:tabLst/>
-                <a:defRPr/>
-              </a:pPr>
-              <a:r>
-                <a:rPr kumimoji="0" lang="de-DE" sz="1600" b="1" i="0" u="none" strike="noStrike" kern="0" cap="none" spc="0" normalizeH="0" baseline="0" noProof="0" dirty="0">
-                  <a:ln>
-                    <a:noFill/>
-                  </a:ln>
-                  <a:solidFill>
-                    <a:srgbClr val="FFFFFF"/>
-                  </a:solidFill>
-                  <a:effectLst/>
-                  <a:uLnTx/>
-                  <a:uFillTx/>
-                  <a:latin typeface="Arial"/>
-                  <a:cs typeface="Arial"/>
-                </a:rPr>
-                <a:t>Victim</a:t>
-              </a:r>
-            </a:p>
-          </p:txBody>
-        </p:sp>
-        <p:grpSp>
-          <p:nvGrpSpPr>
-            <p:cNvPr id="176" name="Gruppieren 175">
-              <a:extLst>
-                <a:ext uri="{FF2B5EF4-FFF2-40B4-BE49-F238E27FC236}">
-                  <a16:creationId xmlns:a16="http://schemas.microsoft.com/office/drawing/2014/main" id="{4BBF0E06-1277-4994-AFE9-B37C048D848A}"/>
+                  <a16:creationId xmlns:a16="http://schemas.microsoft.com/office/drawing/2014/main" id="{BCAE344D-4F0E-B748-6127-5C543E13F4BC}"/>
                 </a:ext>
               </a:extLst>
             </p:cNvPr>
@@ -3100,326 +3295,988 @@
           </p:nvGrpSpPr>
           <p:grpSpPr>
             <a:xfrm>
-              <a:off x="962526" y="544462"/>
-              <a:ext cx="7853001" cy="3462771"/>
-              <a:chOff x="962526" y="380347"/>
-              <a:chExt cx="7853001" cy="3462771"/>
+              <a:off x="-16043" y="0"/>
+              <a:ext cx="9000000" cy="5040000"/>
+              <a:chOff x="625" y="0"/>
+              <a:chExt cx="9000000" cy="5040000"/>
             </a:xfrm>
           </p:grpSpPr>
           <p:sp>
             <p:nvSpPr>
-              <p:cNvPr id="73" name="Textfeld 72">
+              <p:cNvPr id="90" name="Rechteck 89">
                 <a:extLst>
                   <a:ext uri="{FF2B5EF4-FFF2-40B4-BE49-F238E27FC236}">
-                    <a16:creationId xmlns:a16="http://schemas.microsoft.com/office/drawing/2014/main" id="{3B36568C-F1AC-4C56-82E9-751A6283020E}"/>
+                    <a16:creationId xmlns:a16="http://schemas.microsoft.com/office/drawing/2014/main" id="{A44146A4-80AA-4FB5-8B0A-6BB19B353D43}"/>
                   </a:ext>
                 </a:extLst>
               </p:cNvPr>
-              <p:cNvSpPr txBox="1"/>
+              <p:cNvSpPr/>
               <p:nvPr/>
             </p:nvSpPr>
-            <p:spPr>
+            <p:spPr bwMode="gray">
+              <a:xfrm rot="16200000">
+                <a:off x="-371049" y="3582269"/>
+                <a:ext cx="1791642" cy="548087"/>
+              </a:xfrm>
+              <a:prstGeom prst="rect">
+                <a:avLst/>
+              </a:prstGeom>
+              <a:gradFill flip="none" rotWithShape="1">
+                <a:gsLst>
+                  <a:gs pos="0">
+                    <a:srgbClr val="00BCFF">
+                      <a:shade val="30000"/>
+                      <a:satMod val="115000"/>
+                    </a:srgbClr>
+                  </a:gs>
+                  <a:gs pos="50000">
+                    <a:srgbClr val="00BCFF">
+                      <a:shade val="67500"/>
+                      <a:satMod val="115000"/>
+                    </a:srgbClr>
+                  </a:gs>
+                  <a:gs pos="100000">
+                    <a:srgbClr val="00BCFF">
+                      <a:shade val="100000"/>
+                      <a:satMod val="115000"/>
+                    </a:srgbClr>
+                  </a:gs>
+                </a:gsLst>
+                <a:lin ang="2700000" scaled="1"/>
+                <a:tileRect/>
+              </a:gradFill>
+              <a:ln w="25400" cap="flat" cmpd="sng" algn="ctr">
+                <a:noFill/>
+                <a:prstDash val="solid"/>
+              </a:ln>
+              <a:effectLst/>
+            </p:spPr>
+            <p:txBody>
+              <a:bodyPr rtlCol="0" anchor="ctr"/>
+              <a:lstStyle/>
+              <a:p>
+                <a:pPr algn="ctr" defTabSz="914400">
+                  <a:defRPr/>
+                </a:pPr>
+                <a:r>
+                  <a:rPr lang="de-DE" sz="1600" b="1" kern="0" dirty="0">
+                    <a:solidFill>
+                      <a:srgbClr val="FFFFFF"/>
+                    </a:solidFill>
+                    <a:latin typeface="Arial"/>
+                    <a:cs typeface="Arial"/>
+                  </a:rPr>
+                  <a:t>Victim</a:t>
+                </a:r>
+              </a:p>
+            </p:txBody>
+          </p:sp>
+          <p:sp>
+            <p:nvSpPr>
+              <p:cNvPr id="56" name="Rechteck 55">
+                <a:extLst>
+                  <a:ext uri="{FF2B5EF4-FFF2-40B4-BE49-F238E27FC236}">
+                    <a16:creationId xmlns:a16="http://schemas.microsoft.com/office/drawing/2014/main" id="{0A357C56-BAD9-4853-91EE-2F1649F1828A}"/>
+                  </a:ext>
+                </a:extLst>
+              </p:cNvPr>
+              <p:cNvSpPr/>
+              <p:nvPr/>
+            </p:nvSpPr>
+            <p:spPr bwMode="gray">
               <a:xfrm>
-                <a:off x="6257579" y="824166"/>
-                <a:ext cx="1598549" cy="292388"/>
+                <a:off x="625" y="0"/>
+                <a:ext cx="9000000" cy="5040000"/>
               </a:xfrm>
               <a:prstGeom prst="rect">
                 <a:avLst/>
               </a:prstGeom>
               <a:noFill/>
+              <a:ln w="76200" cap="flat" cmpd="sng" algn="ctr">
+                <a:solidFill>
+                  <a:srgbClr val="10384F"/>
+                </a:solidFill>
+                <a:prstDash val="solid"/>
+              </a:ln>
+              <a:effectLst/>
             </p:spPr>
             <p:txBody>
-              <a:bodyPr wrap="square" rIns="0" bIns="0" rtlCol="0" anchor="ctr">
-                <a:spAutoFit/>
-              </a:bodyPr>
+              <a:bodyPr rtlCol="0" anchor="ctr"/>
               <a:lstStyle/>
               <a:p>
-                <a:pPr marL="0" marR="0" lvl="0" indent="0" algn="ctr" defTabSz="1221456" eaLnBrk="1" fontAlgn="auto" latinLnBrk="0" hangingPunct="1">
-                  <a:lnSpc>
-                    <a:spcPct val="100000"/>
-                  </a:lnSpc>
-                  <a:spcBef>
-                    <a:spcPts val="0"/>
-                  </a:spcBef>
-                  <a:spcAft>
-                    <a:spcPts val="0"/>
-                  </a:spcAft>
-                  <a:buClrTx/>
-                  <a:buSzTx/>
-                  <a:buFontTx/>
-                  <a:buNone/>
-                  <a:tabLst/>
+                <a:pPr algn="ctr" defTabSz="914400">
                   <a:defRPr/>
                 </a:pPr>
-                <a:r>
-                  <a:rPr kumimoji="0" lang="en-US" sz="1600" b="1" i="0" u="none" strike="noStrike" kern="0" cap="none" spc="0" normalizeH="0" baseline="0" noProof="0" dirty="0">
-                    <a:ln>
-                      <a:noFill/>
-                    </a:ln>
-                    <a:solidFill>
-                      <a:srgbClr val="10384F"/>
-                    </a:solidFill>
-                    <a:effectLst/>
-                    <a:uLnTx/>
-                    <a:uFillTx/>
-                    <a:latin typeface="Arial"/>
-                    <a:cs typeface="Calibri" panose="020F0502020204030204" pitchFamily="34" charset="0"/>
-                  </a:rPr>
-                  <a:t>Clarithromycin</a:t>
-                </a:r>
-                <a:endParaRPr kumimoji="0" lang="de-DE" sz="1600" b="1" i="0" u="none" strike="noStrike" kern="0" cap="none" spc="0" normalizeH="0" baseline="0" noProof="0" dirty="0">
-                  <a:ln>
-                    <a:noFill/>
-                  </a:ln>
+                <a:endParaRPr lang="en-US" kern="0" dirty="0">
                   <a:solidFill>
-                    <a:srgbClr val="10384F"/>
+                    <a:srgbClr val="FFFFFF"/>
                   </a:solidFill>
-                  <a:effectLst/>
-                  <a:uLnTx/>
-                  <a:uFillTx/>
                   <a:latin typeface="Arial"/>
-                  <a:cs typeface="Calibri" panose="020F0502020204030204" pitchFamily="34" charset="0"/>
+                  <a:cs typeface="Arial"/>
                 </a:endParaRPr>
               </a:p>
             </p:txBody>
           </p:sp>
           <p:sp>
             <p:nvSpPr>
-              <p:cNvPr id="74" name="Textfeld 73">
+              <p:cNvPr id="89" name="Rechteck 88">
                 <a:extLst>
                   <a:ext uri="{FF2B5EF4-FFF2-40B4-BE49-F238E27FC236}">
-                    <a16:creationId xmlns:a16="http://schemas.microsoft.com/office/drawing/2014/main" id="{30AE1D67-1A73-4290-BF1C-838E2810220E}"/>
+                    <a16:creationId xmlns:a16="http://schemas.microsoft.com/office/drawing/2014/main" id="{B01FC0D7-7C44-4907-8594-22DB3C47610D}"/>
                   </a:ext>
                 </a:extLst>
               </p:cNvPr>
-              <p:cNvSpPr txBox="1"/>
+              <p:cNvSpPr/>
               <p:nvPr/>
             </p:nvSpPr>
-            <p:spPr>
-              <a:xfrm>
-                <a:off x="4515440" y="380347"/>
-                <a:ext cx="1633907" cy="292388"/>
+            <p:spPr bwMode="gray">
+              <a:xfrm rot="16200000">
+                <a:off x="-703723" y="1277947"/>
+                <a:ext cx="2462212" cy="542847"/>
               </a:xfrm>
               <a:prstGeom prst="rect">
                 <a:avLst/>
               </a:prstGeom>
-              <a:noFill/>
+              <a:gradFill flip="none" rotWithShape="1">
+                <a:gsLst>
+                  <a:gs pos="0">
+                    <a:srgbClr val="D30F4B">
+                      <a:shade val="30000"/>
+                      <a:satMod val="115000"/>
+                    </a:srgbClr>
+                  </a:gs>
+                  <a:gs pos="50000">
+                    <a:srgbClr val="BD0039"/>
+                  </a:gs>
+                  <a:gs pos="100000">
+                    <a:srgbClr val="D30F4B">
+                      <a:shade val="100000"/>
+                      <a:satMod val="115000"/>
+                    </a:srgbClr>
+                  </a:gs>
+                </a:gsLst>
+                <a:lin ang="2700000" scaled="1"/>
+                <a:tileRect/>
+              </a:gradFill>
+              <a:ln w="25400" cap="flat" cmpd="sng" algn="ctr">
+                <a:noFill/>
+                <a:prstDash val="solid"/>
+              </a:ln>
+              <a:effectLst/>
             </p:spPr>
             <p:txBody>
-              <a:bodyPr wrap="square" rIns="0" bIns="0" rtlCol="0" anchor="ctr">
-                <a:spAutoFit/>
-              </a:bodyPr>
+              <a:bodyPr rtlCol="0" anchor="ctr"/>
               <a:lstStyle/>
               <a:p>
-                <a:pPr marL="0" marR="0" lvl="0" indent="0" defTabSz="1221456" eaLnBrk="1" fontAlgn="auto" latinLnBrk="0" hangingPunct="1">
-                  <a:lnSpc>
-                    <a:spcPct val="100000"/>
-                  </a:lnSpc>
-                  <a:spcBef>
-                    <a:spcPts val="0"/>
-                  </a:spcBef>
-                  <a:spcAft>
-                    <a:spcPts val="0"/>
-                  </a:spcAft>
-                  <a:buClrTx/>
-                  <a:buSzTx/>
-                  <a:buFontTx/>
-                  <a:buNone/>
-                  <a:tabLst/>
+                <a:pPr algn="ctr" defTabSz="914400">
                   <a:defRPr/>
                 </a:pPr>
                 <a:r>
-                  <a:rPr kumimoji="0" lang="en-US" sz="1600" b="1" i="0" u="none" strike="noStrike" kern="0" cap="none" spc="0" normalizeH="0" baseline="0" noProof="0" dirty="0">
-                    <a:ln>
-                      <a:noFill/>
-                    </a:ln>
+                  <a:rPr lang="de-DE" sz="1600" b="1" kern="0" dirty="0">
+                    <a:solidFill>
+                      <a:srgbClr val="FFFFFF"/>
+                    </a:solidFill>
+                    <a:latin typeface="Arial"/>
+                    <a:cs typeface="Arial"/>
+                  </a:rPr>
+                  <a:t>Perpetrator</a:t>
+                </a:r>
+              </a:p>
+            </p:txBody>
+          </p:sp>
+        </p:grpSp>
+        <p:grpSp>
+          <p:nvGrpSpPr>
+            <p:cNvPr id="11" name="Group 10">
+              <a:extLst>
+                <a:ext uri="{FF2B5EF4-FFF2-40B4-BE49-F238E27FC236}">
+                  <a16:creationId xmlns:a16="http://schemas.microsoft.com/office/drawing/2014/main" id="{2922F67E-2DB7-2990-EE2E-9673A11E6930}"/>
+                </a:ext>
+              </a:extLst>
+            </p:cNvPr>
+            <p:cNvGrpSpPr/>
+            <p:nvPr/>
+          </p:nvGrpSpPr>
+          <p:grpSpPr>
+            <a:xfrm>
+              <a:off x="1459651" y="583096"/>
+              <a:ext cx="6996912" cy="3873808"/>
+              <a:chOff x="2044555" y="897964"/>
+              <a:chExt cx="6996912" cy="3873808"/>
+            </a:xfrm>
+          </p:grpSpPr>
+          <p:grpSp>
+            <p:nvGrpSpPr>
+              <p:cNvPr id="12" name="Group 11">
+                <a:extLst>
+                  <a:ext uri="{FF2B5EF4-FFF2-40B4-BE49-F238E27FC236}">
+                    <a16:creationId xmlns:a16="http://schemas.microsoft.com/office/drawing/2014/main" id="{71C12B27-F697-1BBA-708D-CEAA0133A417}"/>
+                  </a:ext>
+                </a:extLst>
+              </p:cNvPr>
+              <p:cNvGrpSpPr/>
+              <p:nvPr/>
+            </p:nvGrpSpPr>
+            <p:grpSpPr>
+              <a:xfrm>
+                <a:off x="2044555" y="897964"/>
+                <a:ext cx="6307099" cy="3873808"/>
+                <a:chOff x="3165475" y="1593396"/>
+                <a:chExt cx="6307098" cy="3873809"/>
+              </a:xfrm>
+            </p:grpSpPr>
+            <p:sp>
+              <p:nvSpPr>
+                <p:cNvPr id="16" name="TextBox 15">
+                  <a:extLst>
+                    <a:ext uri="{FF2B5EF4-FFF2-40B4-BE49-F238E27FC236}">
+                      <a16:creationId xmlns:a16="http://schemas.microsoft.com/office/drawing/2014/main" id="{FAEEA506-9E99-0620-5474-552E4B8AB421}"/>
+                    </a:ext>
+                  </a:extLst>
+                </p:cNvPr>
+                <p:cNvSpPr txBox="1"/>
+                <p:nvPr/>
+              </p:nvSpPr>
+              <p:spPr bwMode="gray">
+                <a:xfrm>
+                  <a:off x="4884085" y="5161993"/>
+                  <a:ext cx="800661" cy="305212"/>
+                </a:xfrm>
+                <a:prstGeom prst="rect">
+                  <a:avLst/>
+                </a:prstGeom>
+                <a:noFill/>
+              </p:spPr>
+              <p:txBody>
+                <a:bodyPr wrap="square" lIns="0" tIns="0" rIns="0" bIns="0" rtlCol="0">
+                  <a:spAutoFit/>
+                </a:bodyPr>
+                <a:lstStyle/>
+                <a:p>
+                  <a:pPr algn="ctr">
+                    <a:lnSpc>
+                      <a:spcPct val="140000"/>
+                    </a:lnSpc>
+                  </a:pPr>
+                  <a:r>
+                    <a:rPr lang="de-DE" sz="1600" b="1" kern="0" dirty="0">
+                      <a:solidFill>
+                        <a:srgbClr val="10384F"/>
+                      </a:solidFill>
+                      <a:latin typeface="Arial"/>
+                      <a:cs typeface="Calibri" panose="020F0502020204030204" pitchFamily="34" charset="0"/>
+                    </a:rPr>
+                    <a:t>Digoxin</a:t>
+                  </a:r>
+                  <a:endParaRPr lang="en-US" sz="1600" b="1" kern="0" dirty="0">
                     <a:solidFill>
                       <a:srgbClr val="10384F"/>
                     </a:solidFill>
-                    <a:effectLst/>
-                    <a:uLnTx/>
-                    <a:uFillTx/>
                     <a:latin typeface="Arial"/>
                     <a:cs typeface="Calibri" panose="020F0502020204030204" pitchFamily="34" charset="0"/>
-                  </a:rPr>
-                  <a:t>Erythromycin</a:t>
-                </a:r>
-                <a:endParaRPr kumimoji="0" lang="de-DE" sz="1600" b="1" i="0" u="none" strike="noStrike" kern="0" cap="none" spc="0" normalizeH="0" baseline="0" noProof="0" dirty="0">
-                  <a:ln>
-                    <a:noFill/>
-                  </a:ln>
-                  <a:solidFill>
-                    <a:srgbClr val="10384F"/>
-                  </a:solidFill>
-                  <a:effectLst/>
-                  <a:uLnTx/>
-                  <a:uFillTx/>
-                  <a:latin typeface="Arial"/>
-                  <a:cs typeface="Calibri" panose="020F0502020204030204" pitchFamily="34" charset="0"/>
-                </a:endParaRPr>
-              </a:p>
-            </p:txBody>
-          </p:sp>
-          <p:sp>
-            <p:nvSpPr>
-              <p:cNvPr id="75" name="Textfeld 74">
-                <a:extLst>
-                  <a:ext uri="{FF2B5EF4-FFF2-40B4-BE49-F238E27FC236}">
-                    <a16:creationId xmlns:a16="http://schemas.microsoft.com/office/drawing/2014/main" id="{234E6B2D-5E04-446D-9D83-8C86BAA818DE}"/>
-                  </a:ext>
-                </a:extLst>
-              </p:cNvPr>
-              <p:cNvSpPr txBox="1"/>
-              <p:nvPr/>
-            </p:nvSpPr>
-            <p:spPr>
-              <a:xfrm>
-                <a:off x="4071012" y="3550730"/>
-                <a:ext cx="1552673" cy="292388"/>
-              </a:xfrm>
-              <a:prstGeom prst="rect">
-                <a:avLst/>
-              </a:prstGeom>
-              <a:noFill/>
-            </p:spPr>
-            <p:txBody>
-              <a:bodyPr wrap="square" rIns="0" bIns="0" rtlCol="0">
-                <a:spAutoFit/>
-              </a:bodyPr>
-              <a:lstStyle/>
-              <a:p>
-                <a:pPr marL="0" marR="0" lvl="0" indent="0" algn="ctr" defTabSz="1221456" eaLnBrk="1" fontAlgn="auto" latinLnBrk="0" hangingPunct="1">
-                  <a:lnSpc>
-                    <a:spcPct val="100000"/>
-                  </a:lnSpc>
-                  <a:spcBef>
-                    <a:spcPts val="0"/>
-                  </a:spcBef>
-                  <a:spcAft>
-                    <a:spcPts val="0"/>
-                  </a:spcAft>
-                  <a:buClrTx/>
-                  <a:buSzTx/>
-                  <a:buFontTx/>
-                  <a:buNone/>
-                  <a:tabLst/>
-                  <a:defRPr/>
-                </a:pPr>
-                <a:r>
-                  <a:rPr kumimoji="0" lang="en-US" sz="1600" b="1" i="0" u="none" strike="noStrike" kern="0" cap="none" spc="0" normalizeH="0" baseline="0" noProof="0" dirty="0">
-                    <a:ln>
-                      <a:noFill/>
-                    </a:ln>
+                  </a:endParaRPr>
+                </a:p>
+              </p:txBody>
+            </p:sp>
+            <p:sp>
+              <p:nvSpPr>
+                <p:cNvPr id="17" name="TextBox 16">
+                  <a:extLst>
+                    <a:ext uri="{FF2B5EF4-FFF2-40B4-BE49-F238E27FC236}">
+                      <a16:creationId xmlns:a16="http://schemas.microsoft.com/office/drawing/2014/main" id="{4BC66516-0225-9376-98E0-E3C56EE24628}"/>
+                    </a:ext>
+                  </a:extLst>
+                </p:cNvPr>
+                <p:cNvSpPr txBox="1"/>
+                <p:nvPr/>
+              </p:nvSpPr>
+              <p:spPr bwMode="gray">
+                <a:xfrm>
+                  <a:off x="7016111" y="5143520"/>
+                  <a:ext cx="1084182" cy="312650"/>
+                </a:xfrm>
+                <a:prstGeom prst="rect">
+                  <a:avLst/>
+                </a:prstGeom>
+                <a:noFill/>
+              </p:spPr>
+              <p:txBody>
+                <a:bodyPr wrap="square" lIns="0" tIns="0" rIns="0" bIns="0" rtlCol="0">
+                  <a:spAutoFit/>
+                </a:bodyPr>
+                <a:lstStyle/>
+                <a:p>
+                  <a:pPr algn="ctr">
+                    <a:lnSpc>
+                      <a:spcPct val="140000"/>
+                    </a:lnSpc>
+                  </a:pPr>
+                  <a:r>
+                    <a:rPr lang="de-DE" sz="1600" b="1" kern="0" dirty="0">
+                      <a:solidFill>
+                        <a:srgbClr val="10384F"/>
+                      </a:solidFill>
+                      <a:latin typeface="Arial"/>
+                      <a:cs typeface="Calibri" panose="020F0502020204030204" pitchFamily="34" charset="0"/>
+                    </a:rPr>
+                    <a:t>Dabigatran</a:t>
+                  </a:r>
+                  <a:endParaRPr lang="en-US" sz="1600" b="1" kern="0" dirty="0">
                     <a:solidFill>
                       <a:srgbClr val="10384F"/>
                     </a:solidFill>
-                    <a:effectLst/>
-                    <a:uLnTx/>
-                    <a:uFillTx/>
                     <a:latin typeface="Arial"/>
                     <a:cs typeface="Calibri" panose="020F0502020204030204" pitchFamily="34" charset="0"/>
-                  </a:rPr>
-                  <a:t>Digoxin</a:t>
-                </a:r>
-                <a:endParaRPr kumimoji="0" lang="de-DE" sz="1600" b="1" i="0" u="none" strike="noStrike" kern="0" cap="none" spc="0" normalizeH="0" baseline="0" noProof="0" dirty="0">
-                  <a:ln>
-                    <a:noFill/>
-                  </a:ln>
+                  </a:endParaRPr>
+                </a:p>
+              </p:txBody>
+            </p:sp>
+            <p:cxnSp>
+              <p:nvCxnSpPr>
+                <p:cNvPr id="18" name="Straight Arrow Connector 17">
+                  <a:extLst>
+                    <a:ext uri="{FF2B5EF4-FFF2-40B4-BE49-F238E27FC236}">
+                      <a16:creationId xmlns:a16="http://schemas.microsoft.com/office/drawing/2014/main" id="{A9D3BD08-5D74-1C59-6F03-A3B275AC2933}"/>
+                    </a:ext>
+                  </a:extLst>
+                </p:cNvPr>
+                <p:cNvCxnSpPr>
+                  <a:cxnSpLocks/>
+                </p:cNvCxnSpPr>
+                <p:nvPr/>
+              </p:nvCxnSpPr>
+              <p:spPr bwMode="gray">
+                <a:xfrm>
+                  <a:off x="3623973" y="2691049"/>
+                  <a:ext cx="1461458" cy="2573555"/>
+                </a:xfrm>
+                <a:prstGeom prst="straightConnector1">
+                  <a:avLst/>
+                </a:prstGeom>
+                <a:ln w="28575">
                   <a:solidFill>
-                    <a:srgbClr val="10384F"/>
+                    <a:srgbClr val="00B050"/>
                   </a:solidFill>
-                  <a:effectLst/>
-                  <a:uLnTx/>
-                  <a:uFillTx/>
-                  <a:latin typeface="Arial"/>
-                  <a:cs typeface="Calibri" panose="020F0502020204030204" pitchFamily="34" charset="0"/>
-                </a:endParaRPr>
-              </a:p>
-            </p:txBody>
-          </p:sp>
-          <p:sp>
-            <p:nvSpPr>
-              <p:cNvPr id="82" name="Textfeld 81">
-                <a:extLst>
-                  <a:ext uri="{FF2B5EF4-FFF2-40B4-BE49-F238E27FC236}">
-                    <a16:creationId xmlns:a16="http://schemas.microsoft.com/office/drawing/2014/main" id="{901ABB62-9433-4052-B7AC-CC55EEC6EB10}"/>
-                  </a:ext>
-                </a:extLst>
-              </p:cNvPr>
-              <p:cNvSpPr txBox="1"/>
-              <p:nvPr/>
-            </p:nvSpPr>
-            <p:spPr>
-              <a:xfrm>
-                <a:off x="962526" y="1692360"/>
-                <a:ext cx="1184475" cy="292388"/>
-              </a:xfrm>
-              <a:prstGeom prst="rect">
-                <a:avLst/>
-              </a:prstGeom>
-              <a:noFill/>
-            </p:spPr>
-            <p:txBody>
-              <a:bodyPr wrap="square" rIns="0" bIns="0" rtlCol="0" anchor="ctr">
-                <a:spAutoFit/>
-              </a:bodyPr>
-              <a:lstStyle/>
-              <a:p>
-                <a:pPr marL="0" marR="0" lvl="0" indent="0" algn="ctr" defTabSz="1221456" eaLnBrk="1" fontAlgn="auto" latinLnBrk="0" hangingPunct="1">
-                  <a:lnSpc>
-                    <a:spcPct val="100000"/>
-                  </a:lnSpc>
-                  <a:spcBef>
-                    <a:spcPts val="0"/>
-                  </a:spcBef>
-                  <a:spcAft>
-                    <a:spcPts val="0"/>
-                  </a:spcAft>
-                  <a:buClrTx/>
-                  <a:buSzTx/>
-                  <a:buFontTx/>
-                  <a:buNone/>
-                  <a:tabLst/>
-                  <a:defRPr/>
-                </a:pPr>
-                <a:r>
-                  <a:rPr kumimoji="0" lang="en-US" sz="1600" b="1" i="0" u="none" strike="noStrike" kern="0" cap="none" spc="0" normalizeH="0" baseline="0" noProof="0" dirty="0">
-                    <a:ln>
-                      <a:noFill/>
-                    </a:ln>
+                  <a:tailEnd type="triangle"/>
+                </a:ln>
+              </p:spPr>
+              <p:style>
+                <a:lnRef idx="1">
+                  <a:schemeClr val="accent1"/>
+                </a:lnRef>
+                <a:fillRef idx="0">
+                  <a:schemeClr val="accent1"/>
+                </a:fillRef>
+                <a:effectRef idx="0">
+                  <a:schemeClr val="accent1"/>
+                </a:effectRef>
+                <a:fontRef idx="minor">
+                  <a:schemeClr val="tx1"/>
+                </a:fontRef>
+              </p:style>
+            </p:cxnSp>
+            <p:cxnSp>
+              <p:nvCxnSpPr>
+                <p:cNvPr id="19" name="Straight Arrow Connector 18">
+                  <a:extLst>
+                    <a:ext uri="{FF2B5EF4-FFF2-40B4-BE49-F238E27FC236}">
+                      <a16:creationId xmlns:a16="http://schemas.microsoft.com/office/drawing/2014/main" id="{EBDFFBD2-4AC4-A967-A5E0-7552C1BB0924}"/>
+                    </a:ext>
+                  </a:extLst>
+                </p:cNvPr>
+                <p:cNvCxnSpPr>
+                  <a:cxnSpLocks/>
+                </p:cNvCxnSpPr>
+                <p:nvPr/>
+              </p:nvCxnSpPr>
+              <p:spPr bwMode="gray">
+                <a:xfrm>
+                  <a:off x="4569710" y="2028120"/>
+                  <a:ext cx="613802" cy="3236484"/>
+                </a:xfrm>
+                <a:prstGeom prst="straightConnector1">
+                  <a:avLst/>
+                </a:prstGeom>
+                <a:ln w="25400">
+                  <a:solidFill>
+                    <a:srgbClr val="C00000"/>
+                  </a:solidFill>
+                  <a:tailEnd type="triangle"/>
+                </a:ln>
+              </p:spPr>
+              <p:style>
+                <a:lnRef idx="1">
+                  <a:schemeClr val="accent1"/>
+                </a:lnRef>
+                <a:fillRef idx="0">
+                  <a:schemeClr val="accent1"/>
+                </a:fillRef>
+                <a:effectRef idx="0">
+                  <a:schemeClr val="accent1"/>
+                </a:effectRef>
+                <a:fontRef idx="minor">
+                  <a:schemeClr val="tx1"/>
+                </a:fontRef>
+              </p:style>
+            </p:cxnSp>
+            <p:sp>
+              <p:nvSpPr>
+                <p:cNvPr id="20" name="TextBox 19">
+                  <a:extLst>
+                    <a:ext uri="{FF2B5EF4-FFF2-40B4-BE49-F238E27FC236}">
+                      <a16:creationId xmlns:a16="http://schemas.microsoft.com/office/drawing/2014/main" id="{9B6EB250-512B-E9EF-A835-21490F1E887B}"/>
+                    </a:ext>
+                  </a:extLst>
+                </p:cNvPr>
+                <p:cNvSpPr txBox="1"/>
+                <p:nvPr/>
+              </p:nvSpPr>
+              <p:spPr bwMode="gray">
+                <a:xfrm>
+                  <a:off x="3165475" y="2340335"/>
+                  <a:ext cx="1067028" cy="305212"/>
+                </a:xfrm>
+                <a:prstGeom prst="rect">
+                  <a:avLst/>
+                </a:prstGeom>
+                <a:noFill/>
+              </p:spPr>
+              <p:txBody>
+                <a:bodyPr wrap="square" lIns="0" tIns="0" rIns="0" bIns="0" rtlCol="0">
+                  <a:spAutoFit/>
+                </a:bodyPr>
+                <a:lstStyle/>
+                <a:p>
+                  <a:pPr algn="ctr">
+                    <a:lnSpc>
+                      <a:spcPct val="140000"/>
+                    </a:lnSpc>
+                  </a:pPr>
+                  <a:r>
+                    <a:rPr lang="de-DE" sz="1600" b="1" kern="0" dirty="0">
+                      <a:solidFill>
+                        <a:srgbClr val="10384F"/>
+                      </a:solidFill>
+                      <a:latin typeface="Arial"/>
+                      <a:cs typeface="Calibri" panose="020F0502020204030204" pitchFamily="34" charset="0"/>
+                    </a:rPr>
+                    <a:t>Rifampicin</a:t>
+                  </a:r>
+                  <a:endParaRPr lang="en-US" sz="1600" b="1" kern="0" dirty="0">
                     <a:solidFill>
                       <a:srgbClr val="10384F"/>
                     </a:solidFill>
-                    <a:effectLst/>
-                    <a:uLnTx/>
-                    <a:uFillTx/>
                     <a:latin typeface="Arial"/>
                     <a:cs typeface="Calibri" panose="020F0502020204030204" pitchFamily="34" charset="0"/>
-                  </a:rPr>
-                  <a:t>Rifampicin</a:t>
-                </a:r>
-                <a:endParaRPr kumimoji="0" lang="de-DE" sz="1600" b="1" i="0" u="none" strike="noStrike" kern="0" cap="none" spc="0" normalizeH="0" baseline="0" noProof="0" dirty="0">
-                  <a:ln>
-                    <a:noFill/>
-                  </a:ln>
+                  </a:endParaRPr>
+                </a:p>
+              </p:txBody>
+            </p:sp>
+            <p:sp>
+              <p:nvSpPr>
+                <p:cNvPr id="21" name="TextBox 20">
+                  <a:extLst>
+                    <a:ext uri="{FF2B5EF4-FFF2-40B4-BE49-F238E27FC236}">
+                      <a16:creationId xmlns:a16="http://schemas.microsoft.com/office/drawing/2014/main" id="{ECF526B3-0B08-A252-82DB-426F2F34CDB7}"/>
+                    </a:ext>
+                  </a:extLst>
+                </p:cNvPr>
+                <p:cNvSpPr txBox="1"/>
+                <p:nvPr/>
+              </p:nvSpPr>
+              <p:spPr bwMode="gray">
+                <a:xfrm>
+                  <a:off x="4046737" y="1715470"/>
+                  <a:ext cx="1063521" cy="305212"/>
+                </a:xfrm>
+                <a:prstGeom prst="rect">
+                  <a:avLst/>
+                </a:prstGeom>
+                <a:noFill/>
+              </p:spPr>
+              <p:txBody>
+                <a:bodyPr wrap="square" lIns="0" tIns="0" rIns="0" bIns="0" rtlCol="0">
+                  <a:spAutoFit/>
+                </a:bodyPr>
+                <a:lstStyle>
+                  <a:defPPr>
+                    <a:defRPr lang="en-US"/>
+                  </a:defPPr>
+                  <a:lvl1pPr algn="ctr">
+                    <a:lnSpc>
+                      <a:spcPct val="140000"/>
+                    </a:lnSpc>
+                    <a:defRPr sz="1600" b="1" kern="0">
+                      <a:solidFill>
+                        <a:srgbClr val="10384F"/>
+                      </a:solidFill>
+                      <a:latin typeface="Arial"/>
+                      <a:cs typeface="Calibri" panose="020F0502020204030204" pitchFamily="34" charset="0"/>
+                    </a:defRPr>
+                  </a:lvl1pPr>
+                </a:lstStyle>
+                <a:p>
+                  <a:r>
+                    <a:rPr lang="de-DE" dirty="0"/>
+                    <a:t>Verapamil</a:t>
+                  </a:r>
+                  <a:endParaRPr lang="en-US" dirty="0"/>
+                </a:p>
+              </p:txBody>
+            </p:sp>
+            <p:sp>
+              <p:nvSpPr>
+                <p:cNvPr id="22" name="TextBox 21">
+                  <a:extLst>
+                    <a:ext uri="{FF2B5EF4-FFF2-40B4-BE49-F238E27FC236}">
+                      <a16:creationId xmlns:a16="http://schemas.microsoft.com/office/drawing/2014/main" id="{B6FD63F9-DD07-D3D2-CFC5-5BEE09C24A0F}"/>
+                    </a:ext>
+                  </a:extLst>
+                </p:cNvPr>
+                <p:cNvSpPr txBox="1"/>
+                <p:nvPr/>
+              </p:nvSpPr>
+              <p:spPr bwMode="gray">
+                <a:xfrm>
+                  <a:off x="5563537" y="1593396"/>
+                  <a:ext cx="1433212" cy="305212"/>
+                </a:xfrm>
+                <a:prstGeom prst="rect">
+                  <a:avLst/>
+                </a:prstGeom>
+                <a:noFill/>
+              </p:spPr>
+              <p:txBody>
+                <a:bodyPr wrap="square" lIns="0" tIns="0" rIns="0" bIns="0" rtlCol="0">
+                  <a:spAutoFit/>
+                </a:bodyPr>
+                <a:lstStyle>
+                  <a:defPPr>
+                    <a:defRPr lang="en-US"/>
+                  </a:defPPr>
+                  <a:lvl1pPr algn="ctr">
+                    <a:lnSpc>
+                      <a:spcPct val="140000"/>
+                    </a:lnSpc>
+                    <a:defRPr sz="1600" b="1" kern="0">
+                      <a:solidFill>
+                        <a:srgbClr val="10384F"/>
+                      </a:solidFill>
+                      <a:latin typeface="Arial"/>
+                      <a:cs typeface="Calibri" panose="020F0502020204030204" pitchFamily="34" charset="0"/>
+                    </a:defRPr>
+                  </a:lvl1pPr>
+                </a:lstStyle>
+                <a:p>
+                  <a:r>
+                    <a:rPr lang="de-DE" dirty="0"/>
+                    <a:t>Erythromycin</a:t>
+                  </a:r>
+                  <a:endParaRPr lang="en-US" dirty="0"/>
+                </a:p>
+              </p:txBody>
+            </p:sp>
+            <p:sp>
+              <p:nvSpPr>
+                <p:cNvPr id="23" name="TextBox 22">
+                  <a:extLst>
+                    <a:ext uri="{FF2B5EF4-FFF2-40B4-BE49-F238E27FC236}">
+                      <a16:creationId xmlns:a16="http://schemas.microsoft.com/office/drawing/2014/main" id="{F179497C-7561-259C-418B-EB784ED1D0E5}"/>
+                    </a:ext>
+                  </a:extLst>
+                </p:cNvPr>
+                <p:cNvSpPr txBox="1"/>
+                <p:nvPr/>
+              </p:nvSpPr>
+              <p:spPr bwMode="gray">
+                <a:xfrm>
+                  <a:off x="7324447" y="1641487"/>
+                  <a:ext cx="1517042" cy="305212"/>
+                </a:xfrm>
+                <a:prstGeom prst="rect">
+                  <a:avLst/>
+                </a:prstGeom>
+                <a:noFill/>
+              </p:spPr>
+              <p:txBody>
+                <a:bodyPr wrap="square" lIns="0" tIns="0" rIns="0" bIns="0" rtlCol="0">
+                  <a:spAutoFit/>
+                </a:bodyPr>
+                <a:lstStyle/>
+                <a:p>
+                  <a:pPr algn="ctr">
+                    <a:lnSpc>
+                      <a:spcPct val="140000"/>
+                    </a:lnSpc>
+                  </a:pPr>
+                  <a:r>
+                    <a:rPr lang="de-DE" sz="1600" b="1" kern="0" dirty="0">
+                      <a:solidFill>
+                        <a:srgbClr val="10384F"/>
+                      </a:solidFill>
+                      <a:latin typeface="Arial"/>
+                      <a:cs typeface="Calibri" panose="020F0502020204030204" pitchFamily="34" charset="0"/>
+                    </a:rPr>
+                    <a:t>Clarithromycin</a:t>
+                  </a:r>
+                  <a:endParaRPr lang="en-US" sz="1600" b="1" kern="0" dirty="0">
+                    <a:solidFill>
+                      <a:srgbClr val="10384F"/>
+                    </a:solidFill>
+                    <a:latin typeface="Arial"/>
+                    <a:cs typeface="Calibri" panose="020F0502020204030204" pitchFamily="34" charset="0"/>
+                  </a:endParaRPr>
+                </a:p>
+              </p:txBody>
+            </p:sp>
+            <p:cxnSp>
+              <p:nvCxnSpPr>
+                <p:cNvPr id="24" name="Straight Arrow Connector 23">
+                  <a:extLst>
+                    <a:ext uri="{FF2B5EF4-FFF2-40B4-BE49-F238E27FC236}">
+                      <a16:creationId xmlns:a16="http://schemas.microsoft.com/office/drawing/2014/main" id="{02CB6076-457C-AC7D-BFDF-4E2DAEA11F14}"/>
+                    </a:ext>
+                  </a:extLst>
+                </p:cNvPr>
+                <p:cNvCxnSpPr>
+                  <a:cxnSpLocks/>
+                </p:cNvCxnSpPr>
+                <p:nvPr/>
+              </p:nvCxnSpPr>
+              <p:spPr bwMode="gray">
+                <a:xfrm>
+                  <a:off x="3757901" y="2686432"/>
+                  <a:ext cx="3529602" cy="2539910"/>
+                </a:xfrm>
+                <a:prstGeom prst="straightConnector1">
+                  <a:avLst/>
+                </a:prstGeom>
+                <a:ln w="25400">
                   <a:solidFill>
-                    <a:srgbClr val="10384F"/>
+                    <a:srgbClr val="00B050"/>
                   </a:solidFill>
-                  <a:effectLst/>
-                  <a:uLnTx/>
-                  <a:uFillTx/>
-                  <a:latin typeface="Arial"/>
-                  <a:cs typeface="Calibri" panose="020F0502020204030204" pitchFamily="34" charset="0"/>
-                </a:endParaRPr>
-              </a:p>
-            </p:txBody>
-          </p:sp>
+                  <a:tailEnd type="triangle"/>
+                </a:ln>
+              </p:spPr>
+              <p:style>
+                <a:lnRef idx="1">
+                  <a:schemeClr val="accent1"/>
+                </a:lnRef>
+                <a:fillRef idx="0">
+                  <a:schemeClr val="accent1"/>
+                </a:fillRef>
+                <a:effectRef idx="0">
+                  <a:schemeClr val="accent1"/>
+                </a:effectRef>
+                <a:fontRef idx="minor">
+                  <a:schemeClr val="tx1"/>
+                </a:fontRef>
+              </p:style>
+            </p:cxnSp>
+            <p:cxnSp>
+              <p:nvCxnSpPr>
+                <p:cNvPr id="25" name="Straight Arrow Connector 24">
+                  <a:extLst>
+                    <a:ext uri="{FF2B5EF4-FFF2-40B4-BE49-F238E27FC236}">
+                      <a16:creationId xmlns:a16="http://schemas.microsoft.com/office/drawing/2014/main" id="{B1039827-22D4-6E12-1D05-9B88876D51A5}"/>
+                    </a:ext>
+                  </a:extLst>
+                </p:cNvPr>
+                <p:cNvCxnSpPr>
+                  <a:cxnSpLocks/>
+                </p:cNvCxnSpPr>
+                <p:nvPr/>
+              </p:nvCxnSpPr>
+              <p:spPr bwMode="gray">
+                <a:xfrm>
+                  <a:off x="4689112" y="2037356"/>
+                  <a:ext cx="2717177" cy="3184627"/>
+                </a:xfrm>
+                <a:prstGeom prst="straightConnector1">
+                  <a:avLst/>
+                </a:prstGeom>
+                <a:ln w="25400">
+                  <a:solidFill>
+                    <a:srgbClr val="C00000"/>
+                  </a:solidFill>
+                  <a:tailEnd type="triangle"/>
+                </a:ln>
+              </p:spPr>
+              <p:style>
+                <a:lnRef idx="1">
+                  <a:schemeClr val="accent1"/>
+                </a:lnRef>
+                <a:fillRef idx="0">
+                  <a:schemeClr val="accent1"/>
+                </a:fillRef>
+                <a:effectRef idx="0">
+                  <a:schemeClr val="accent1"/>
+                </a:effectRef>
+                <a:fontRef idx="minor">
+                  <a:schemeClr val="tx1"/>
+                </a:fontRef>
+              </p:style>
+            </p:cxnSp>
+            <p:cxnSp>
+              <p:nvCxnSpPr>
+                <p:cNvPr id="28" name="Straight Arrow Connector 27">
+                  <a:extLst>
+                    <a:ext uri="{FF2B5EF4-FFF2-40B4-BE49-F238E27FC236}">
+                      <a16:creationId xmlns:a16="http://schemas.microsoft.com/office/drawing/2014/main" id="{D975009D-E693-2928-5226-B1ABC17ABF51}"/>
+                    </a:ext>
+                  </a:extLst>
+                </p:cNvPr>
+                <p:cNvCxnSpPr>
+                  <a:cxnSpLocks/>
+                </p:cNvCxnSpPr>
+                <p:nvPr/>
+              </p:nvCxnSpPr>
+              <p:spPr bwMode="gray">
+                <a:xfrm flipH="1">
+                  <a:off x="5256303" y="1922253"/>
+                  <a:ext cx="800661" cy="3346772"/>
+                </a:xfrm>
+                <a:prstGeom prst="straightConnector1">
+                  <a:avLst/>
+                </a:prstGeom>
+                <a:ln w="25400">
+                  <a:solidFill>
+                    <a:srgbClr val="C00000"/>
+                  </a:solidFill>
+                  <a:tailEnd type="triangle"/>
+                </a:ln>
+              </p:spPr>
+              <p:style>
+                <a:lnRef idx="1">
+                  <a:schemeClr val="accent1"/>
+                </a:lnRef>
+                <a:fillRef idx="0">
+                  <a:schemeClr val="accent1"/>
+                </a:fillRef>
+                <a:effectRef idx="0">
+                  <a:schemeClr val="accent1"/>
+                </a:effectRef>
+                <a:fontRef idx="minor">
+                  <a:schemeClr val="tx1"/>
+                </a:fontRef>
+              </p:style>
+            </p:cxnSp>
+            <p:cxnSp>
+              <p:nvCxnSpPr>
+                <p:cNvPr id="29" name="Straight Arrow Connector 28">
+                  <a:extLst>
+                    <a:ext uri="{FF2B5EF4-FFF2-40B4-BE49-F238E27FC236}">
+                      <a16:creationId xmlns:a16="http://schemas.microsoft.com/office/drawing/2014/main" id="{04ACA7D8-F5C4-522F-88FE-DE3634CE04E3}"/>
+                    </a:ext>
+                  </a:extLst>
+                </p:cNvPr>
+                <p:cNvCxnSpPr>
+                  <a:cxnSpLocks/>
+                </p:cNvCxnSpPr>
+                <p:nvPr/>
+              </p:nvCxnSpPr>
+              <p:spPr bwMode="gray">
+                <a:xfrm flipH="1">
+                  <a:off x="5344460" y="1970344"/>
+                  <a:ext cx="2502960" cy="3294260"/>
+                </a:xfrm>
+                <a:prstGeom prst="straightConnector1">
+                  <a:avLst/>
+                </a:prstGeom>
+                <a:ln w="25400">
+                  <a:solidFill>
+                    <a:srgbClr val="C00000"/>
+                  </a:solidFill>
+                  <a:tailEnd type="triangle"/>
+                </a:ln>
+              </p:spPr>
+              <p:style>
+                <a:lnRef idx="1">
+                  <a:schemeClr val="accent1"/>
+                </a:lnRef>
+                <a:fillRef idx="0">
+                  <a:schemeClr val="accent1"/>
+                </a:fillRef>
+                <a:effectRef idx="0">
+                  <a:schemeClr val="accent1"/>
+                </a:effectRef>
+                <a:fontRef idx="minor">
+                  <a:schemeClr val="tx1"/>
+                </a:fontRef>
+              </p:style>
+            </p:cxnSp>
+            <p:cxnSp>
+              <p:nvCxnSpPr>
+                <p:cNvPr id="30" name="Straight Arrow Connector 29">
+                  <a:extLst>
+                    <a:ext uri="{FF2B5EF4-FFF2-40B4-BE49-F238E27FC236}">
+                      <a16:creationId xmlns:a16="http://schemas.microsoft.com/office/drawing/2014/main" id="{D6831D0E-DD54-A009-E162-5710421E9306}"/>
+                    </a:ext>
+                  </a:extLst>
+                </p:cNvPr>
+                <p:cNvCxnSpPr>
+                  <a:cxnSpLocks/>
+                </p:cNvCxnSpPr>
+                <p:nvPr/>
+              </p:nvCxnSpPr>
+              <p:spPr bwMode="gray">
+                <a:xfrm flipH="1">
+                  <a:off x="7496976" y="1963373"/>
+                  <a:ext cx="462727" cy="3272205"/>
+                </a:xfrm>
+                <a:prstGeom prst="straightConnector1">
+                  <a:avLst/>
+                </a:prstGeom>
+                <a:ln w="25400">
+                  <a:solidFill>
+                    <a:srgbClr val="C00000"/>
+                  </a:solidFill>
+                  <a:tailEnd type="triangle"/>
+                </a:ln>
+              </p:spPr>
+              <p:style>
+                <a:lnRef idx="1">
+                  <a:schemeClr val="accent1"/>
+                </a:lnRef>
+                <a:fillRef idx="0">
+                  <a:schemeClr val="accent1"/>
+                </a:fillRef>
+                <a:effectRef idx="0">
+                  <a:schemeClr val="accent1"/>
+                </a:effectRef>
+                <a:fontRef idx="minor">
+                  <a:schemeClr val="tx1"/>
+                </a:fontRef>
+              </p:style>
+            </p:cxnSp>
+            <p:cxnSp>
+              <p:nvCxnSpPr>
+                <p:cNvPr id="31" name="Straight Arrow Connector 30">
+                  <a:extLst>
+                    <a:ext uri="{FF2B5EF4-FFF2-40B4-BE49-F238E27FC236}">
+                      <a16:creationId xmlns:a16="http://schemas.microsoft.com/office/drawing/2014/main" id="{F2193B45-F2FF-D269-ED33-DBBEFD0ED413}"/>
+                    </a:ext>
+                  </a:extLst>
+                </p:cNvPr>
+                <p:cNvCxnSpPr>
+                  <a:cxnSpLocks/>
+                </p:cNvCxnSpPr>
+                <p:nvPr/>
+              </p:nvCxnSpPr>
+              <p:spPr bwMode="gray">
+                <a:xfrm flipH="1">
+                  <a:off x="5465218" y="2601349"/>
+                  <a:ext cx="3886597" cy="2646021"/>
+                </a:xfrm>
+                <a:prstGeom prst="straightConnector1">
+                  <a:avLst/>
+                </a:prstGeom>
+                <a:ln w="25400">
+                  <a:solidFill>
+                    <a:srgbClr val="C00000"/>
+                  </a:solidFill>
+                  <a:tailEnd type="triangle"/>
+                </a:ln>
+              </p:spPr>
+              <p:style>
+                <a:lnRef idx="1">
+                  <a:schemeClr val="accent1"/>
+                </a:lnRef>
+                <a:fillRef idx="0">
+                  <a:schemeClr val="accent1"/>
+                </a:fillRef>
+                <a:effectRef idx="0">
+                  <a:schemeClr val="accent1"/>
+                </a:effectRef>
+                <a:fontRef idx="minor">
+                  <a:schemeClr val="tx1"/>
+                </a:fontRef>
+              </p:style>
+            </p:cxnSp>
+            <p:cxnSp>
+              <p:nvCxnSpPr>
+                <p:cNvPr id="32" name="Straight Arrow Connector 31">
+                  <a:extLst>
+                    <a:ext uri="{FF2B5EF4-FFF2-40B4-BE49-F238E27FC236}">
+                      <a16:creationId xmlns:a16="http://schemas.microsoft.com/office/drawing/2014/main" id="{0FD43DCB-F7C6-1B0E-F6A7-10B260C2CC9A}"/>
+                    </a:ext>
+                  </a:extLst>
+                </p:cNvPr>
+                <p:cNvCxnSpPr>
+                  <a:cxnSpLocks/>
+                </p:cNvCxnSpPr>
+                <p:nvPr/>
+              </p:nvCxnSpPr>
+              <p:spPr bwMode="gray">
+                <a:xfrm flipH="1">
+                  <a:off x="7603776" y="2600977"/>
+                  <a:ext cx="1868797" cy="2646844"/>
+                </a:xfrm>
+                <a:prstGeom prst="straightConnector1">
+                  <a:avLst/>
+                </a:prstGeom>
+                <a:ln w="25400">
+                  <a:solidFill>
+                    <a:srgbClr val="C00000"/>
+                  </a:solidFill>
+                  <a:tailEnd type="triangle"/>
+                </a:ln>
+              </p:spPr>
+              <p:style>
+                <a:lnRef idx="1">
+                  <a:schemeClr val="accent1"/>
+                </a:lnRef>
+                <a:fillRef idx="0">
+                  <a:schemeClr val="accent1"/>
+                </a:fillRef>
+                <a:effectRef idx="0">
+                  <a:schemeClr val="accent1"/>
+                </a:effectRef>
+                <a:fontRef idx="minor">
+                  <a:schemeClr val="tx1"/>
+                </a:fontRef>
+              </p:style>
+            </p:cxnSp>
+            <p:pic>
+              <p:nvPicPr>
+                <p:cNvPr id="33" name="Picture 32">
+                  <a:extLst>
+                    <a:ext uri="{FF2B5EF4-FFF2-40B4-BE49-F238E27FC236}">
+                      <a16:creationId xmlns:a16="http://schemas.microsoft.com/office/drawing/2014/main" id="{C9CE784B-DBE1-3AC9-A7FA-2F744289B107}"/>
+                    </a:ext>
+                  </a:extLst>
+                </p:cNvPr>
+                <p:cNvPicPr>
+                  <a:picLocks noChangeAspect="1"/>
+                </p:cNvPicPr>
+                <p:nvPr/>
+              </p:nvPicPr>
+              <p:blipFill>
+                <a:blip r:embed="rId2"/>
+                <a:stretch>
+                  <a:fillRect/>
+                </a:stretch>
+              </p:blipFill>
+              <p:spPr>
+                <a:xfrm rot="15967304">
+                  <a:off x="5678196" y="3446636"/>
+                  <a:ext cx="1080000" cy="1655878"/>
+                </a:xfrm>
+                <a:prstGeom prst="flowChartTerminator">
+                  <a:avLst/>
+                </a:prstGeom>
+                <a:solidFill>
+                  <a:schemeClr val="bg1"/>
+                </a:solidFill>
+              </p:spPr>
+            </p:pic>
+          </p:grpSp>
           <p:sp>
             <p:nvSpPr>
-              <p:cNvPr id="91" name="Rechteck 90">
+              <p:cNvPr id="13" name="Oval 12">
                 <a:extLst>
                   <a:ext uri="{FF2B5EF4-FFF2-40B4-BE49-F238E27FC236}">
-                    <a16:creationId xmlns:a16="http://schemas.microsoft.com/office/drawing/2014/main" id="{AEA17713-094A-4BDC-A237-886245610EB6}"/>
+                    <a16:creationId xmlns:a16="http://schemas.microsoft.com/office/drawing/2014/main" id="{B47A2F28-05AD-E08C-D62F-2B355417CF42}"/>
                   </a:ext>
                 </a:extLst>
               </p:cNvPr>
@@ -3428,7 +4285,79 @@
             </p:nvSpPr>
             <p:spPr>
               <a:xfrm>
-                <a:off x="7435898" y="1505092"/>
+                <a:off x="4602435" y="2773554"/>
+                <a:ext cx="958153" cy="389926"/>
+              </a:xfrm>
+              <a:prstGeom prst="ellipse">
+                <a:avLst/>
+              </a:prstGeom>
+              <a:solidFill>
+                <a:schemeClr val="bg1"/>
+              </a:solidFill>
+              <a:ln>
+                <a:noFill/>
+              </a:ln>
+            </p:spPr>
+            <p:style>
+              <a:lnRef idx="2">
+                <a:schemeClr val="accent1">
+                  <a:shade val="15000"/>
+                </a:schemeClr>
+              </a:lnRef>
+              <a:fillRef idx="1">
+                <a:schemeClr val="accent1"/>
+              </a:fillRef>
+              <a:effectRef idx="0">
+                <a:schemeClr val="accent1"/>
+              </a:effectRef>
+              <a:fontRef idx="minor">
+                <a:schemeClr val="lt1"/>
+              </a:fontRef>
+            </p:style>
+            <p:txBody>
+              <a:bodyPr lIns="0" tIns="0" rIns="0" bIns="0" rtlCol="0" anchor="ctr"/>
+              <a:lstStyle/>
+              <a:p>
+                <a:pPr algn="ctr" defTabSz="914388">
+                  <a:defRPr/>
+                </a:pPr>
+                <a:r>
+                  <a:rPr lang="de-DE" sz="2000" b="1" dirty="0">
+                    <a:solidFill>
+                      <a:prstClr val="black"/>
+                    </a:solidFill>
+                    <a:latin typeface="Arial" panose="020B0604020202020204" pitchFamily="34" charset="0"/>
+                    <a:ea typeface="Calibri" panose="020F0502020204030204" pitchFamily="34" charset="0"/>
+                    <a:cs typeface="Arial" panose="020B0604020202020204" pitchFamily="34" charset="0"/>
+                  </a:rPr>
+                  <a:t>P-gp</a:t>
+                </a:r>
+                <a:endParaRPr lang="en-US" sz="1400" b="1" dirty="0">
+                  <a:solidFill>
+                    <a:prstClr val="black"/>
+                  </a:solidFill>
+                  <a:latin typeface="Arial" panose="020B0604020202020204" pitchFamily="34" charset="0"/>
+                  <a:ea typeface="Calibri" panose="020F0502020204030204" pitchFamily="34" charset="0"/>
+                  <a:cs typeface="Arial" panose="020B0604020202020204" pitchFamily="34" charset="0"/>
+                </a:endParaRPr>
+              </a:p>
+            </p:txBody>
+          </p:sp>
+          <p:sp>
+            <p:nvSpPr>
+              <p:cNvPr id="14" name="Rechteck 90">
+                <a:extLst>
+                  <a:ext uri="{FF2B5EF4-FFF2-40B4-BE49-F238E27FC236}">
+                    <a16:creationId xmlns:a16="http://schemas.microsoft.com/office/drawing/2014/main" id="{9FA69C33-F653-ECCF-0169-D7739BE7DE74}"/>
+                  </a:ext>
+                </a:extLst>
+              </p:cNvPr>
+              <p:cNvSpPr/>
+              <p:nvPr/>
+            </p:nvSpPr>
+            <p:spPr>
+              <a:xfrm>
+                <a:off x="7661838" y="1449184"/>
                 <a:ext cx="1379629" cy="477054"/>
               </a:xfrm>
               <a:prstGeom prst="rect">
@@ -3441,34 +4370,14 @@
               </a:bodyPr>
               <a:lstStyle/>
               <a:p>
-                <a:pPr marL="0" marR="0" lvl="0" indent="0" algn="ctr" defTabSz="1221456" eaLnBrk="1" fontAlgn="auto" latinLnBrk="0" hangingPunct="1">
-                  <a:lnSpc>
-                    <a:spcPct val="100000"/>
-                  </a:lnSpc>
-                  <a:spcBef>
-                    <a:spcPts val="0"/>
-                  </a:spcBef>
-                  <a:spcAft>
-                    <a:spcPts val="0"/>
-                  </a:spcAft>
-                  <a:buClrTx/>
-                  <a:buSzTx/>
-                  <a:buFontTx/>
-                  <a:buNone/>
-                  <a:tabLst/>
+                <a:pPr algn="ctr" defTabSz="1221456">
                   <a:defRPr/>
                 </a:pPr>
                 <a:r>
-                  <a:rPr kumimoji="0" lang="en-US" sz="1600" b="1" i="0" u="none" strike="noStrike" kern="0" cap="none" spc="0" normalizeH="0" baseline="0" noProof="0" dirty="0">
-                    <a:ln>
-                      <a:noFill/>
-                    </a:ln>
+                  <a:rPr lang="en-US" sz="1600" b="1" kern="0" dirty="0">
                     <a:solidFill>
                       <a:srgbClr val="10384F"/>
                     </a:solidFill>
-                    <a:effectLst/>
-                    <a:uLnTx/>
-                    <a:uFillTx/>
                     <a:latin typeface="Arial"/>
                     <a:cs typeface="Calibri" panose="020F0502020204030204" pitchFamily="34" charset="0"/>
                   </a:rPr>
@@ -3476,126 +4385,23 @@
                 </a:r>
               </a:p>
               <a:p>
-                <a:pPr marL="0" marR="0" lvl="0" indent="0" algn="ctr" defTabSz="1221456" eaLnBrk="1" fontAlgn="auto" latinLnBrk="0" hangingPunct="1">
-                  <a:lnSpc>
-                    <a:spcPct val="100000"/>
-                  </a:lnSpc>
-                  <a:spcBef>
-                    <a:spcPts val="0"/>
-                  </a:spcBef>
-                  <a:spcAft>
-                    <a:spcPts val="0"/>
-                  </a:spcAft>
-                  <a:buClrTx/>
-                  <a:buSzTx/>
-                  <a:buFontTx/>
-                  <a:buNone/>
-                  <a:tabLst/>
+                <a:pPr algn="ctr" defTabSz="1221456">
                   <a:defRPr/>
                 </a:pPr>
                 <a:r>
-                  <a:rPr kumimoji="0" lang="en-US" sz="900" b="1" i="0" u="none" strike="noStrike" kern="0" cap="none" spc="0" normalizeH="0" baseline="0" noProof="0" dirty="0">
-                    <a:ln>
-                      <a:noFill/>
-                    </a:ln>
+                  <a:rPr lang="en-US" sz="900" b="1" kern="0" dirty="0">
                     <a:solidFill>
                       <a:srgbClr val="10384F"/>
                     </a:solidFill>
-                    <a:effectLst/>
-                    <a:uLnTx/>
-                    <a:uFillTx/>
                     <a:latin typeface="Arial"/>
                     <a:cs typeface="Calibri" panose="020F0502020204030204" pitchFamily="34" charset="0"/>
                   </a:rPr>
                   <a:t>(+ metabolites)</a:t>
                 </a:r>
-                <a:endParaRPr kumimoji="0" lang="de-DE" sz="900" b="1" i="0" u="none" strike="noStrike" kern="0" cap="none" spc="0" normalizeH="0" baseline="0" noProof="0" dirty="0">
-                  <a:ln>
-                    <a:noFill/>
-                  </a:ln>
+                <a:endParaRPr lang="de-DE" sz="900" b="1" kern="0" dirty="0">
                   <a:solidFill>
                     <a:srgbClr val="10384F"/>
                   </a:solidFill>
-                  <a:effectLst/>
-                  <a:uLnTx/>
-                  <a:uFillTx/>
-                  <a:latin typeface="Arial"/>
-                  <a:cs typeface="Calibri" panose="020F0502020204030204" pitchFamily="34" charset="0"/>
-                </a:endParaRPr>
-              </a:p>
-            </p:txBody>
-          </p:sp>
-          <p:sp>
-            <p:nvSpPr>
-              <p:cNvPr id="96" name="Textfeld 95">
-                <a:extLst>
-                  <a:ext uri="{FF2B5EF4-FFF2-40B4-BE49-F238E27FC236}">
-                    <a16:creationId xmlns:a16="http://schemas.microsoft.com/office/drawing/2014/main" id="{FD52EBD5-9379-49D0-8F14-2E922C6AE592}"/>
-                  </a:ext>
-                </a:extLst>
-              </p:cNvPr>
-              <p:cNvSpPr txBox="1"/>
-              <p:nvPr/>
-            </p:nvSpPr>
-            <p:spPr>
-              <a:xfrm>
-                <a:off x="2349698" y="532111"/>
-                <a:ext cx="1107368" cy="292388"/>
-              </a:xfrm>
-              <a:prstGeom prst="rect">
-                <a:avLst/>
-              </a:prstGeom>
-              <a:noFill/>
-            </p:spPr>
-            <p:txBody>
-              <a:bodyPr wrap="square" rIns="0" bIns="0" rtlCol="0" anchor="ctr">
-                <a:spAutoFit/>
-              </a:bodyPr>
-              <a:lstStyle/>
-              <a:p>
-                <a:pPr marL="0" marR="0" lvl="0" indent="0" algn="ctr" defTabSz="1221456" eaLnBrk="1" fontAlgn="auto" latinLnBrk="0" hangingPunct="1">
-                  <a:lnSpc>
-                    <a:spcPct val="100000"/>
-                  </a:lnSpc>
-                  <a:spcBef>
-                    <a:spcPts val="0"/>
-                  </a:spcBef>
-                  <a:spcAft>
-                    <a:spcPts val="0"/>
-                  </a:spcAft>
-                  <a:buClrTx/>
-                  <a:buSzTx/>
-                  <a:buFontTx/>
-                  <a:buNone/>
-                  <a:tabLst/>
-                  <a:defRPr/>
-                </a:pPr>
-                <a:r>
-                  <a:rPr kumimoji="0" lang="en-US" sz="1600" b="1" i="0" u="none" strike="noStrike" kern="0" cap="none" spc="0" normalizeH="0" baseline="0" noProof="0" dirty="0">
-                    <a:ln>
-                      <a:noFill/>
-                    </a:ln>
-                    <a:solidFill>
-                      <a:srgbClr val="10384F"/>
-                    </a:solidFill>
-                    <a:effectLst/>
-                    <a:uLnTx/>
-                    <a:uFillTx/>
-                    <a:latin typeface="Arial"/>
-                    <a:cs typeface="Calibri" panose="020F0502020204030204" pitchFamily="34" charset="0"/>
-                  </a:rPr>
-                  <a:t>Verapamil</a:t>
-                </a:r>
-                <a:endParaRPr kumimoji="0" lang="de-DE" sz="1600" b="1" i="0" u="none" strike="noStrike" kern="0" cap="none" spc="0" normalizeH="0" baseline="0" noProof="0" dirty="0">
-                  <a:ln>
-                    <a:noFill/>
-                  </a:ln>
-                  <a:solidFill>
-                    <a:srgbClr val="10384F"/>
-                  </a:solidFill>
-                  <a:effectLst/>
-                  <a:uLnTx/>
-                  <a:uFillTx/>
                   <a:latin typeface="Arial"/>
                   <a:cs typeface="Calibri" panose="020F0502020204030204" pitchFamily="34" charset="0"/>
                 </a:endParaRPr>
@@ -3603,606 +4409,7 @@
             </p:txBody>
           </p:sp>
         </p:grpSp>
-        <p:sp>
-          <p:nvSpPr>
-            <p:cNvPr id="56" name="Rechteck 55">
-              <a:extLst>
-                <a:ext uri="{FF2B5EF4-FFF2-40B4-BE49-F238E27FC236}">
-                  <a16:creationId xmlns:a16="http://schemas.microsoft.com/office/drawing/2014/main" id="{0A357C56-BAD9-4853-91EE-2F1649F1828A}"/>
-                </a:ext>
-              </a:extLst>
-            </p:cNvPr>
-            <p:cNvSpPr/>
-            <p:nvPr/>
-          </p:nvSpPr>
-          <p:spPr bwMode="gray">
-            <a:xfrm>
-              <a:off x="625" y="0"/>
-              <a:ext cx="10080000" cy="5040000"/>
-            </a:xfrm>
-            <a:prstGeom prst="rect">
-              <a:avLst/>
-            </a:prstGeom>
-            <a:noFill/>
-            <a:ln w="76200" cap="flat" cmpd="sng" algn="ctr">
-              <a:solidFill>
-                <a:srgbClr val="10384F"/>
-              </a:solidFill>
-              <a:prstDash val="solid"/>
-            </a:ln>
-            <a:effectLst/>
-          </p:spPr>
-          <p:txBody>
-            <a:bodyPr rtlCol="0" anchor="ctr"/>
-            <a:lstStyle/>
-            <a:p>
-              <a:pPr marL="0" marR="0" lvl="0" indent="0" algn="ctr" defTabSz="914400" eaLnBrk="1" fontAlgn="auto" latinLnBrk="0" hangingPunct="1">
-                <a:lnSpc>
-                  <a:spcPct val="100000"/>
-                </a:lnSpc>
-                <a:spcBef>
-                  <a:spcPts val="0"/>
-                </a:spcBef>
-                <a:spcAft>
-                  <a:spcPts val="0"/>
-                </a:spcAft>
-                <a:buClrTx/>
-                <a:buSzTx/>
-                <a:buFontTx/>
-                <a:buNone/>
-                <a:tabLst/>
-                <a:defRPr/>
-              </a:pPr>
-              <a:endParaRPr kumimoji="0" lang="en-US" sz="1800" b="0" i="0" u="none" strike="noStrike" kern="0" cap="none" spc="0" normalizeH="0" baseline="0" noProof="0" dirty="0">
-                <a:ln>
-                  <a:noFill/>
-                </a:ln>
-                <a:solidFill>
-                  <a:srgbClr val="FFFFFF"/>
-                </a:solidFill>
-                <a:effectLst/>
-                <a:uLnTx/>
-                <a:uFillTx/>
-                <a:latin typeface="Arial"/>
-                <a:cs typeface="Arial"/>
-              </a:endParaRPr>
-            </a:p>
-          </p:txBody>
-        </p:sp>
-        <p:cxnSp>
-          <p:nvCxnSpPr>
-            <p:cNvPr id="104" name="Gerade Verbindung mit Pfeil 103">
-              <a:extLst>
-                <a:ext uri="{FF2B5EF4-FFF2-40B4-BE49-F238E27FC236}">
-                  <a16:creationId xmlns:a16="http://schemas.microsoft.com/office/drawing/2014/main" id="{0FF9BEFE-B7A9-4FF4-89BB-33781F91CA30}"/>
-                </a:ext>
-              </a:extLst>
-            </p:cNvPr>
-            <p:cNvCxnSpPr>
-              <a:cxnSpLocks/>
-              <a:stCxn id="73" idx="2"/>
-              <a:endCxn id="75" idx="0"/>
-            </p:cNvCxnSpPr>
-            <p:nvPr/>
-          </p:nvCxnSpPr>
-          <p:spPr>
-            <a:xfrm flipH="1">
-              <a:off x="4847349" y="1280669"/>
-              <a:ext cx="2209505" cy="2434176"/>
-            </a:xfrm>
-            <a:prstGeom prst="straightConnector1">
-              <a:avLst/>
-            </a:prstGeom>
-            <a:noFill/>
-            <a:ln w="38100" cap="flat" cmpd="sng" algn="ctr">
-              <a:solidFill>
-                <a:srgbClr val="C00000"/>
-              </a:solidFill>
-              <a:prstDash val="solid"/>
-              <a:round/>
-              <a:headEnd type="none" w="med" len="med"/>
-              <a:tailEnd type="none" w="med" len="med"/>
-            </a:ln>
-            <a:effectLst>
-              <a:outerShdw blurRad="50800" dist="38100" dir="2700000" algn="tl" rotWithShape="0">
-                <a:prstClr val="black">
-                  <a:alpha val="40000"/>
-                </a:prstClr>
-              </a:outerShdw>
-            </a:effectLst>
-          </p:spPr>
-        </p:cxnSp>
-        <p:cxnSp>
-          <p:nvCxnSpPr>
-            <p:cNvPr id="112" name="Gerade Verbindung mit Pfeil 111">
-              <a:extLst>
-                <a:ext uri="{FF2B5EF4-FFF2-40B4-BE49-F238E27FC236}">
-                  <a16:creationId xmlns:a16="http://schemas.microsoft.com/office/drawing/2014/main" id="{D0917519-090A-4A49-ABD9-982827D3038F}"/>
-                </a:ext>
-              </a:extLst>
-            </p:cNvPr>
-            <p:cNvCxnSpPr>
-              <a:cxnSpLocks/>
-              <a:stCxn id="74" idx="2"/>
-              <a:endCxn id="75" idx="0"/>
-            </p:cNvCxnSpPr>
-            <p:nvPr/>
-          </p:nvCxnSpPr>
-          <p:spPr>
-            <a:xfrm flipH="1">
-              <a:off x="4847349" y="836850"/>
-              <a:ext cx="485045" cy="2877995"/>
-            </a:xfrm>
-            <a:prstGeom prst="straightConnector1">
-              <a:avLst/>
-            </a:prstGeom>
-            <a:noFill/>
-            <a:ln w="25400" cap="flat" cmpd="sng" algn="ctr">
-              <a:solidFill>
-                <a:srgbClr val="C00000"/>
-              </a:solidFill>
-              <a:prstDash val="solid"/>
-              <a:round/>
-              <a:headEnd type="none" w="med" len="med"/>
-              <a:tailEnd type="none" w="med" len="med"/>
-            </a:ln>
-            <a:effectLst>
-              <a:outerShdw blurRad="50800" dist="38100" dir="2700000" algn="tl" rotWithShape="0">
-                <a:prstClr val="black">
-                  <a:alpha val="40000"/>
-                </a:prstClr>
-              </a:outerShdw>
-            </a:effectLst>
-          </p:spPr>
-        </p:cxnSp>
-        <p:cxnSp>
-          <p:nvCxnSpPr>
-            <p:cNvPr id="117" name="Gerade Verbindung mit Pfeil 116">
-              <a:extLst>
-                <a:ext uri="{FF2B5EF4-FFF2-40B4-BE49-F238E27FC236}">
-                  <a16:creationId xmlns:a16="http://schemas.microsoft.com/office/drawing/2014/main" id="{9D2E5A2F-7F8C-401C-9C6A-2AF1D20AB953}"/>
-                </a:ext>
-              </a:extLst>
-            </p:cNvPr>
-            <p:cNvCxnSpPr>
-              <a:cxnSpLocks/>
-              <a:stCxn id="91" idx="2"/>
-              <a:endCxn id="75" idx="0"/>
-            </p:cNvCxnSpPr>
-            <p:nvPr/>
-          </p:nvCxnSpPr>
-          <p:spPr>
-            <a:xfrm flipH="1">
-              <a:off x="4847349" y="2146261"/>
-              <a:ext cx="3278364" cy="1568584"/>
-            </a:xfrm>
-            <a:prstGeom prst="straightConnector1">
-              <a:avLst/>
-            </a:prstGeom>
-            <a:noFill/>
-            <a:ln w="38100" cap="flat" cmpd="sng" algn="ctr">
-              <a:solidFill>
-                <a:srgbClr val="C00000"/>
-              </a:solidFill>
-              <a:prstDash val="solid"/>
-              <a:round/>
-              <a:headEnd type="none" w="med" len="med"/>
-              <a:tailEnd type="none" w="med" len="med"/>
-            </a:ln>
-            <a:effectLst>
-              <a:outerShdw blurRad="50800" dist="38100" dir="2700000" algn="tl" rotWithShape="0">
-                <a:prstClr val="black">
-                  <a:alpha val="40000"/>
-                </a:prstClr>
-              </a:outerShdw>
-            </a:effectLst>
-          </p:spPr>
-        </p:cxnSp>
-        <p:cxnSp>
-          <p:nvCxnSpPr>
-            <p:cNvPr id="143" name="Gerade Verbindung mit Pfeil 142">
-              <a:extLst>
-                <a:ext uri="{FF2B5EF4-FFF2-40B4-BE49-F238E27FC236}">
-                  <a16:creationId xmlns:a16="http://schemas.microsoft.com/office/drawing/2014/main" id="{BA060CCB-E7DC-4D18-9D56-E48AC35FC14C}"/>
-                </a:ext>
-              </a:extLst>
-            </p:cNvPr>
-            <p:cNvCxnSpPr>
-              <a:cxnSpLocks/>
-              <a:stCxn id="82" idx="2"/>
-            </p:cNvCxnSpPr>
-            <p:nvPr/>
-          </p:nvCxnSpPr>
-          <p:spPr>
-            <a:xfrm>
-              <a:off x="1554764" y="2148863"/>
-              <a:ext cx="3139213" cy="1565982"/>
-            </a:xfrm>
-            <a:prstGeom prst="straightConnector1">
-              <a:avLst/>
-            </a:prstGeom>
-            <a:noFill/>
-            <a:ln w="38100" cap="flat" cmpd="sng" algn="ctr">
-              <a:solidFill>
-                <a:srgbClr val="00B050"/>
-              </a:solidFill>
-              <a:prstDash val="solid"/>
-              <a:round/>
-              <a:headEnd type="none" w="med" len="med"/>
-              <a:tailEnd type="none" w="med" len="med"/>
-            </a:ln>
-            <a:effectLst>
-              <a:outerShdw blurRad="50800" dist="38100" dir="2700000" algn="tl" rotWithShape="0">
-                <a:prstClr val="black">
-                  <a:alpha val="40000"/>
-                </a:prstClr>
-              </a:outerShdw>
-            </a:effectLst>
-          </p:spPr>
-        </p:cxnSp>
-        <p:cxnSp>
-          <p:nvCxnSpPr>
-            <p:cNvPr id="149" name="Gerade Verbindung mit Pfeil 148">
-              <a:extLst>
-                <a:ext uri="{FF2B5EF4-FFF2-40B4-BE49-F238E27FC236}">
-                  <a16:creationId xmlns:a16="http://schemas.microsoft.com/office/drawing/2014/main" id="{DDE87805-09A5-4843-BA6D-48B3ED16FC1F}"/>
-                </a:ext>
-              </a:extLst>
-            </p:cNvPr>
-            <p:cNvCxnSpPr>
-              <a:cxnSpLocks/>
-              <a:stCxn id="96" idx="2"/>
-              <a:endCxn id="75" idx="0"/>
-            </p:cNvCxnSpPr>
-            <p:nvPr/>
-          </p:nvCxnSpPr>
-          <p:spPr>
-            <a:xfrm>
-              <a:off x="2903382" y="988614"/>
-              <a:ext cx="1943967" cy="2726231"/>
-            </a:xfrm>
-            <a:prstGeom prst="straightConnector1">
-              <a:avLst/>
-            </a:prstGeom>
-            <a:noFill/>
-            <a:ln w="25400" cap="flat" cmpd="sng" algn="ctr">
-              <a:solidFill>
-                <a:srgbClr val="C00000"/>
-              </a:solidFill>
-              <a:prstDash val="solid"/>
-              <a:round/>
-              <a:headEnd type="none" w="med" len="med"/>
-              <a:tailEnd type="none" w="med" len="med"/>
-            </a:ln>
-            <a:effectLst>
-              <a:outerShdw blurRad="50800" dist="38100" dir="2700000" algn="tl" rotWithShape="0">
-                <a:prstClr val="black">
-                  <a:alpha val="40000"/>
-                </a:prstClr>
-              </a:outerShdw>
-            </a:effectLst>
-          </p:spPr>
-        </p:cxnSp>
-        <p:sp>
-          <p:nvSpPr>
-            <p:cNvPr id="225" name="Gleichschenkliges Dreieck 224">
-              <a:extLst>
-                <a:ext uri="{FF2B5EF4-FFF2-40B4-BE49-F238E27FC236}">
-                  <a16:creationId xmlns:a16="http://schemas.microsoft.com/office/drawing/2014/main" id="{158BD913-E196-4523-91A6-0074CF2173D6}"/>
-                </a:ext>
-              </a:extLst>
-            </p:cNvPr>
-            <p:cNvSpPr/>
-            <p:nvPr/>
-          </p:nvSpPr>
-          <p:spPr>
-            <a:xfrm rot="12284709">
-              <a:off x="4775749" y="3710275"/>
-              <a:ext cx="108000" cy="108000"/>
-            </a:xfrm>
-            <a:prstGeom prst="triangle">
-              <a:avLst/>
-            </a:prstGeom>
-            <a:solidFill>
-              <a:srgbClr val="C00000"/>
-            </a:solidFill>
-            <a:ln>
-              <a:noFill/>
-            </a:ln>
-            <a:effectLst>
-              <a:outerShdw blurRad="50800" dist="38100" dir="2700000" algn="tl" rotWithShape="0">
-                <a:prstClr val="black">
-                  <a:alpha val="40000"/>
-                </a:prstClr>
-              </a:outerShdw>
-            </a:effectLst>
-          </p:spPr>
-          <p:style>
-            <a:lnRef idx="2">
-              <a:schemeClr val="accent1">
-                <a:shade val="50000"/>
-              </a:schemeClr>
-            </a:lnRef>
-            <a:fillRef idx="1">
-              <a:schemeClr val="accent1"/>
-            </a:fillRef>
-            <a:effectRef idx="0">
-              <a:schemeClr val="accent1"/>
-            </a:effectRef>
-            <a:fontRef idx="minor">
-              <a:schemeClr val="lt1"/>
-            </a:fontRef>
-          </p:style>
-          <p:txBody>
-            <a:bodyPr rtlCol="0" anchor="ctr"/>
-            <a:lstStyle/>
-            <a:p>
-              <a:pPr algn="ctr"/>
-              <a:endParaRPr lang="en-US"/>
-            </a:p>
-          </p:txBody>
-        </p:sp>
-        <p:sp>
-          <p:nvSpPr>
-            <p:cNvPr id="89" name="Rechteck 88">
-              <a:extLst>
-                <a:ext uri="{FF2B5EF4-FFF2-40B4-BE49-F238E27FC236}">
-                  <a16:creationId xmlns:a16="http://schemas.microsoft.com/office/drawing/2014/main" id="{B01FC0D7-7C44-4907-8594-22DB3C47610D}"/>
-                </a:ext>
-              </a:extLst>
-            </p:cNvPr>
-            <p:cNvSpPr/>
-            <p:nvPr/>
-          </p:nvSpPr>
-          <p:spPr bwMode="gray">
-            <a:xfrm rot="16200000">
-              <a:off x="-703723" y="1277947"/>
-              <a:ext cx="2462212" cy="542847"/>
-            </a:xfrm>
-            <a:prstGeom prst="rect">
-              <a:avLst/>
-            </a:prstGeom>
-            <a:gradFill flip="none" rotWithShape="1">
-              <a:gsLst>
-                <a:gs pos="0">
-                  <a:srgbClr val="D30F4B">
-                    <a:shade val="30000"/>
-                    <a:satMod val="115000"/>
-                  </a:srgbClr>
-                </a:gs>
-                <a:gs pos="50000">
-                  <a:srgbClr val="BD0039"/>
-                </a:gs>
-                <a:gs pos="100000">
-                  <a:srgbClr val="D30F4B">
-                    <a:shade val="100000"/>
-                    <a:satMod val="115000"/>
-                  </a:srgbClr>
-                </a:gs>
-              </a:gsLst>
-              <a:lin ang="2700000" scaled="1"/>
-              <a:tileRect/>
-            </a:gradFill>
-            <a:ln w="25400" cap="flat" cmpd="sng" algn="ctr">
-              <a:noFill/>
-              <a:prstDash val="solid"/>
-            </a:ln>
-            <a:effectLst/>
-          </p:spPr>
-          <p:txBody>
-            <a:bodyPr rtlCol="0" anchor="ctr"/>
-            <a:lstStyle/>
-            <a:p>
-              <a:pPr marL="0" marR="0" lvl="0" indent="0" algn="ctr" defTabSz="914400" eaLnBrk="1" fontAlgn="auto" latinLnBrk="0" hangingPunct="1">
-                <a:lnSpc>
-                  <a:spcPct val="100000"/>
-                </a:lnSpc>
-                <a:spcBef>
-                  <a:spcPts val="0"/>
-                </a:spcBef>
-                <a:spcAft>
-                  <a:spcPts val="0"/>
-                </a:spcAft>
-                <a:buClrTx/>
-                <a:buSzTx/>
-                <a:buFontTx/>
-                <a:buNone/>
-                <a:tabLst/>
-                <a:defRPr/>
-              </a:pPr>
-              <a:r>
-                <a:rPr kumimoji="0" lang="de-DE" sz="1600" b="1" i="0" u="none" strike="noStrike" kern="0" cap="none" spc="0" normalizeH="0" baseline="0" noProof="0" dirty="0">
-                  <a:ln>
-                    <a:noFill/>
-                  </a:ln>
-                  <a:solidFill>
-                    <a:srgbClr val="FFFFFF"/>
-                  </a:solidFill>
-                  <a:effectLst/>
-                  <a:uLnTx/>
-                  <a:uFillTx/>
-                  <a:latin typeface="Arial"/>
-                  <a:cs typeface="Arial"/>
-                </a:rPr>
-                <a:t>Perpetrator</a:t>
-              </a:r>
-            </a:p>
-          </p:txBody>
-        </p:sp>
-        <p:sp>
-          <p:nvSpPr>
-            <p:cNvPr id="244" name="Gleichschenkliges Dreieck 243">
-              <a:extLst>
-                <a:ext uri="{FF2B5EF4-FFF2-40B4-BE49-F238E27FC236}">
-                  <a16:creationId xmlns:a16="http://schemas.microsoft.com/office/drawing/2014/main" id="{F387589C-E349-4DAC-8146-D780AB632BC4}"/>
-                </a:ext>
-              </a:extLst>
-            </p:cNvPr>
-            <p:cNvSpPr/>
-            <p:nvPr/>
-          </p:nvSpPr>
-          <p:spPr>
-            <a:xfrm rot="6795186">
-              <a:off x="4665729" y="3675877"/>
-              <a:ext cx="108000" cy="108000"/>
-            </a:xfrm>
-            <a:prstGeom prst="triangle">
-              <a:avLst/>
-            </a:prstGeom>
-            <a:solidFill>
-              <a:srgbClr val="00B050"/>
-            </a:solidFill>
-            <a:ln>
-              <a:noFill/>
-            </a:ln>
-            <a:effectLst>
-              <a:outerShdw blurRad="50800" dist="38100" dir="2700000" algn="tl" rotWithShape="0">
-                <a:prstClr val="black">
-                  <a:alpha val="40000"/>
-                </a:prstClr>
-              </a:outerShdw>
-            </a:effectLst>
-          </p:spPr>
-          <p:style>
-            <a:lnRef idx="2">
-              <a:schemeClr val="accent1">
-                <a:shade val="50000"/>
-              </a:schemeClr>
-            </a:lnRef>
-            <a:fillRef idx="1">
-              <a:schemeClr val="accent1"/>
-            </a:fillRef>
-            <a:effectRef idx="0">
-              <a:schemeClr val="accent1"/>
-            </a:effectRef>
-            <a:fontRef idx="minor">
-              <a:schemeClr val="lt1"/>
-            </a:fontRef>
-          </p:style>
-          <p:txBody>
-            <a:bodyPr rtlCol="0" anchor="ctr"/>
-            <a:lstStyle/>
-            <a:p>
-              <a:pPr algn="ctr"/>
-              <a:endParaRPr lang="en-US"/>
-            </a:p>
-          </p:txBody>
-        </p:sp>
       </p:grpSp>
-      <p:pic>
-        <p:nvPicPr>
-          <p:cNvPr id="26" name="Grafik 25">
-            <a:extLst>
-              <a:ext uri="{FF2B5EF4-FFF2-40B4-BE49-F238E27FC236}">
-                <a16:creationId xmlns:a16="http://schemas.microsoft.com/office/drawing/2014/main" id="{A5DF4011-45B9-1D7F-98F9-EE7FEB6E0726}"/>
-              </a:ext>
-            </a:extLst>
-          </p:cNvPr>
-          <p:cNvPicPr>
-            <a:picLocks noChangeAspect="1"/>
-          </p:cNvPicPr>
-          <p:nvPr/>
-        </p:nvPicPr>
-        <p:blipFill>
-          <a:blip r:embed="rId3">
-            <a:extLst>
-              <a:ext uri="{96DAC541-7B7A-43D3-8B79-37D633B846F1}">
-                <asvg:svgBlip xmlns:asvg="http://schemas.microsoft.com/office/drawing/2016/SVG/main" r:embed="rId4"/>
-              </a:ext>
-            </a:extLst>
-          </a:blip>
-          <a:stretch>
-            <a:fillRect/>
-          </a:stretch>
-        </p:blipFill>
-        <p:spPr>
-          <a:xfrm>
-            <a:off x="4048074" y="1978074"/>
-            <a:ext cx="1678649" cy="1678649"/>
-          </a:xfrm>
-          <a:prstGeom prst="rect">
-            <a:avLst/>
-          </a:prstGeom>
-        </p:spPr>
-      </p:pic>
-      <p:sp>
-        <p:nvSpPr>
-          <p:cNvPr id="27" name="Textfeld 26">
-            <a:extLst>
-              <a:ext uri="{FF2B5EF4-FFF2-40B4-BE49-F238E27FC236}">
-                <a16:creationId xmlns:a16="http://schemas.microsoft.com/office/drawing/2014/main" id="{3529796A-F003-4598-96A5-F678DAE42860}"/>
-              </a:ext>
-            </a:extLst>
-          </p:cNvPr>
-          <p:cNvSpPr txBox="1"/>
-          <p:nvPr>
-            <p:custDataLst>
-              <p:tags r:id="rId1"/>
-            </p:custDataLst>
-          </p:nvPr>
-        </p:nvSpPr>
-        <p:spPr>
-          <a:xfrm>
-            <a:off x="4197142" y="2429029"/>
-            <a:ext cx="1478716" cy="461665"/>
-          </a:xfrm>
-          <a:prstGeom prst="rect">
-            <a:avLst/>
-          </a:prstGeom>
-          <a:noFill/>
-          <a:effectLst>
-            <a:outerShdw blurRad="50800" dist="38100" dir="2700000" algn="tl" rotWithShape="0">
-              <a:schemeClr val="bg1">
-                <a:alpha val="40000"/>
-              </a:schemeClr>
-            </a:outerShdw>
-          </a:effectLst>
-        </p:spPr>
-        <p:txBody>
-          <a:bodyPr wrap="square" rtlCol="0">
-            <a:spAutoFit/>
-          </a:bodyPr>
-          <a:lstStyle/>
-          <a:p>
-            <a:pPr marL="0" marR="0" lvl="0" indent="0" algn="ctr" defTabSz="1221456" eaLnBrk="1" fontAlgn="auto" latinLnBrk="0" hangingPunct="1">
-              <a:lnSpc>
-                <a:spcPct val="100000"/>
-              </a:lnSpc>
-              <a:spcBef>
-                <a:spcPts val="0"/>
-              </a:spcBef>
-              <a:spcAft>
-                <a:spcPts val="0"/>
-              </a:spcAft>
-              <a:buClrTx/>
-              <a:buSzTx/>
-              <a:buFontTx/>
-              <a:buNone/>
-              <a:tabLst/>
-              <a:defRPr/>
-            </a:pPr>
-            <a:r>
-              <a:rPr kumimoji="0" lang="de-DE" sz="2400" b="1" i="0" u="none" strike="noStrike" kern="0" cap="none" spc="0" normalizeH="0" baseline="0" noProof="0" dirty="0">
-                <a:ln>
-                  <a:noFill/>
-                </a:ln>
-                <a:solidFill>
-                  <a:schemeClr val="tx1">
-                    <a:lumMod val="85000"/>
-                    <a:lumOff val="15000"/>
-                  </a:schemeClr>
-                </a:solidFill>
-                <a:effectLst/>
-                <a:uLnTx/>
-                <a:uFillTx/>
-                <a:latin typeface="Arial"/>
-                <a:cs typeface="Calibri" panose="020F0502020204030204" pitchFamily="34" charset="0"/>
-              </a:rPr>
-              <a:t>P-gp</a:t>
-            </a:r>
-          </a:p>
-        </p:txBody>
-      </p:sp>
     </p:spTree>
     <p:extLst>
       <p:ext uri="{BB962C8B-B14F-4D97-AF65-F5344CB8AC3E}">
@@ -4225,21 +4432,10 @@
 </p:tagLst>
 </file>
 
-<file path=ppt/tags/tag2.xml><?xml version="1.0" encoding="utf-8"?>
-<p:tagLst xmlns:a="http://schemas.openxmlformats.org/drawingml/2006/main" xmlns:r="http://schemas.openxmlformats.org/officeDocument/2006/relationships" xmlns:p="http://schemas.openxmlformats.org/presentationml/2006/main">
-  <p:tag name="EMPOWERCHARTSPROPERTIES_B_0" val="AAAAAAH//////////wEAAAAAAAAAAAAAACoqIFRoaXMgaXMgYSBMaXRlREIgZmlsZSAqKgcFAP////8FAAAAAQAAAAAAAAAAAAAAAAAAAAAAAAAAAAAAAAAAAAAAAAAAAAAAAAABEQAAAFByb3BlcnR5RG9jdW1lbnRzAgAAAAAAAAAAAAAAAAAAAAAAAAAAAAAAAAAAAAAAAAAAAAAAAAAAAAAAAAAAAAAAAAAAAAAAAAAAAAAAAAAAAAAAAAAAAAAAAAAAAAAAAAAAAAAAAAAAAAAAAAAAAAAAAAAAAAAAAAAAAAAAAAAAAAAAAAAAAAAAAAAAAAAAAAAAAAAAAAAAAAAAAAAAAAAAAAAAAAAAAAAAAAAAAAAAAAAAAAAAAAAAAAAAAAAAAAAAAAAAAAAAAAAAAAAAAAAAAAAAAAAAAAAAAAAAAAAAAAAAAAAAAAAAAAAAAAAAAAAAAAAAAAAAAAAAAAAAAAAAAAAAAAAAAAAAAAAAAAAAAAAAAAAAAAAAAAAAAAAAAAAAAAAAAAAAAAAAAAAAAAAAAAAAAAAAAAAAAAAAAAAAAAAAAAAAAAAAAAAAAAAAAAAAAAAAAAAAAAAAAAAAAAAAAAAAAAAAAAAAAAAAAAAAAAAAAAAAAAAAAAAAAAAAAAAAAAAAAAAAAAAAAAAAAAAAAAAAAAAAAAAAAAAAAAAAAAAAAAAAAAAAAAAAAAAAAAAAAAAAAAAAAAAAAAAAAAAAAAAAAAAAAAAAAAAAAAAAAAAAAAAAAAAAAAAAAAAAAAAAAAAAAAAAAAAAAAAAAAAAAAAAAAAAAAAAAAAAAAAAAAAAAAAAAAAAAAAAAAAAAAAAAAAAAAAAAAAAAAAAAAAAAAAAAAAAAAAAAAAAAAAAAAAAAAAAAAAAAAAAAAAAAAAAAAAAAAAAAAAAAAAAAAAAAAAAAAAAAAAAAAAAAAAAAAAAAAAAAAAAAAAAAAAAAAAAAAAAAAAAAAAAAAAAAAAAAAAAAAAAAAAAAAAAAAAAAAAAAAAAAAAAAAAAAAAAAAAAAAAAAAAAAAAAAAAAAAAAAAAAAAAAAAAAAAAAAAAAAAAAAAAAAAAAAAAAAAAAAAAAAAAAAAAAAAAAAAAAAAAAAAAAAAAAAAAAAAAAAAAAAAAAAAAAAAAAAAAAAAAAAAAAAAAAAAAAAAAAAAAAAAAAAAAAAAAAAAAAAAAAAAAAAAAAAAAAAAAAAAAAAAAAAAAAAAAAAAAAAAAAAAAAAAAAAAAAAAAAAAAAAAAAAAAAAAAAAAAAAAAAAAAAAAAAAAAAAAAAAAAAAAAAAAAAAAAAAAAAAAAAAAAAAAAAAAAAAAAAAAAAAAAAAAAAAAAAAAAAAAAAAAAAAAAAAAAAAAAAAAAAAAAAAAAAAAAAAAAAAAAAAAAAAAAAAAAAAAAAAAAAAAAAAAAAAAAAAAAAAAAAAAAAAAAAAAAAAAAAAAAAAAAAAAAAAAAAAAAAAAAAAAAAAAAAAAAAAAAAAAAAAAAAAAAAAAAAAAAAAAAAAAAAAAAAAAAAAAAAAAAAAAAAAAAAAAAAAAAAAAAAAAAAAAAAAAAAAAAAAAAAAAAAAAAAAAAAAAAAAAAAAAAAAAAAAAAAAAAAAAAAAAAAAAAAAAAAAAAAAAAAAAAAAAAAAAAAAAAAAAAAAAAAAAAAAAAAAAAAAAAAAAAAAAAAAAAAAAAAAAAAAAAAAAAAAAAAAAAAAAAAAAAAAAAAAAAAAAAAAAAAAAAAAAAAAAAAAAAAAAAAAAAAAAAAAAAAAAAAAAAAAAAAAAAAAAAAAAAAAAAAAAAAAAAAAAAAAAAAAAAAAAAAAAAAAAAAAAAAAAAAAAAAAAAAAAAAAAAAAAAAAAAAAAAAAAAAAAAAAAAAAAAAAAAAAAAAAAAAAAAAAAAAAAAAAAAAAAAAAAAAAAAAAAAAAAAAAAAAAAAAAAAAAAAAAAAAAAAAAAAAAAAAAAAAAAAAAAAAAAAAAAAAAAAAAAAAAAAAAAAAAAAAAAAAAAAAAAAAAAAAAAAAAAAAAAAAAAAAAAAAAAAAAAAAAAAAAAAAAAAAAAAAAAAAAAAAAAAAAAAAAAAAAAAAAAAAAAAAAAAAAAAAAAAAAAAAAAAAAAAAAAAAAAAAAAAAAAAAAAAAAAAAAAAAAAAAAAAAAAAAAAAAAAAAAAAAAAAAAAAAAAAAAAAAAAAAAAAAAAAAAAAAAAAAAAAAAAAAAAAAAAAAAAAAAAAAAAAAAAAAAAAAAAAAAAAAAAAAAAAAAAAAAAAAAAAAAAAAAAAAAAAAAAAAAAAAAAAAAAAAAAAAAAAAAAAAAAAAAAAAAAAAAAAAAAAAAAAAAAAAAAAAAAAAAAAAAAAAAAAAAAAAAAAAAAAAAAAAAAAAAAAAAAAAAAAAAAAAAAAAAAAAAAAAAAAAAAAAAAAAAAAAAAAAAAAAAAAAAAAAAAAAAAAAAAAAAAAAAAAAAAAAAAAAAAAAAAAAAAAAAAAAAAAAAAAAAAAAAAAAAAAAAAAAAAAAAAAAAAAAAAAAAAAAAAAAAAAAAAAAAAAAAAAAAAAAAAAAAAAAAAAAAAAAAAAAAAAAAAAAAAAAAAAAAAAAAAAAAAAAAAAAAAAAAAAAAAAAAAAAAAAAAAAAAAAAAAAAAAAAAAAAAAAAAAAAAAAAAAAAAAAAAAAAAAAAAAAAAAAAAAAAAAAAAAAAAAAAAAAAAAAAAAAAAAAAAAAAAAAAAAAAAAAAAAAAAAAAAAAAAAAAAAAAAAAAAAAAAAAAAAAAAAAAAAAAAAAAAAAAAAAAAAAAAAAAAAAAAAAAAAAAAAAAAAAAAAAAAAAAAAAAAAAAAAAAAAAAAAAAAAAAAAAAAAAAAAAAAAAAAAAAAAAAAAAAAAAAAAAAAAAAAAAAAAAAAAAAAAAAAAAAAAAAAAAAAAAAAAAAAAAAAAAAAAAAAAAAAAAAAAAAAAAAAAAAAAAAAAAAAAAAAAAAAAAAAAAAAAAAAAAAAAAAAAAAAAAAAAAAAAAAAAAAAAAAAAAAAAAAAAAAAAAAAAAAAAAAAAAAAAAAAAAAAAAAAAAAAAAAAAAAAAAAAAAAAAAAAAAAAAAAAAAAAAAAAAAAAAAAAAAAAAAAAAAAAAAAAAAAAAAAAAAAAAAAAAAAAAAAAAAAAAAAAAAAAAAAAAAAAAAAAAAAAAAAAAAAAAAAAAAAAAAAAAAAAAAAAAAAAAAAAAAAAAAAAAAAAAAAAAAAAAAAAAAAAAAAAAAAAAAAAAAAAAAAAAAAAAAAAAAAAAAAAAAAAAAAAAAAAAAAAAAAAAAAAAAAAAAAAAAAAAAAAAAAAAAAAAAAAAAAAAAAAAAAAAAAAAAAAAAAAAAAAAAAAAAAAAAAAAAAAAAAAAAAAAAAAAAAAAAAAAAAAAAAAAAAAAAAAAAAAAAAAAAAAAAAAAAAAAAAAAAAAAAAAAAAAAAAAAAAAAAAAAAAAAAAAAAAAAAAAAAAAAAAAAAAAAAAAAAAAAAAAAAAAAAAAAAAAAAAAAAAAAAAAAAAAAAAAAAAAAAAAAAAAAAAAAAAAAAAAAAAAAAAAAAAAAAAAAAAAAAAAAAAAAAAAAAAAAAAAAAAAAAAAAAAAAAAAAAAAAAAAAAAAAAAAAAAAAAAAAAAAAAAAAAAAAAAAAAAAAAAAAAAAAAAAAAAAAAAAAAAAAAAAAAAAAAAAAAAAAAAAAAAAAAAAAAAAAAAAAAAAAAAAAAAAAAAAAAAAAAAAAAAAAAAAAAAAAAAAAAAAAAAAAAAAAAAAAAAAAAAAAAAAAAAAAAAAAAAAAAAAAAAAAAAAAAAAAAAAAAAAAAAAAAAAAAAAAAAAAAAAAAAAAAAAAAAAAAAAAAAAAAAAAAAAAAAAAAAAAAAAAAAAAAAAAAAAAAAAAAAAAAAAAAAAAAAAAAAAAAAAAAAAAAAAAAAAAAAAAAAAAAAAAAAAAAAAAAAAAAAAAAAAAAAAAAAAAAAAAAAAAAAAAAAAAAAAAAAAAAAAAAAAAAAAAAAAAAAAAAAAAAAAAAAAAAAAAAAAAAAAAAAAAAAAAAAAAAAAAAAAAAAAAAAAAAAAAAAAAAAAAAAAAAAAAAAAAAAAAAAAAAAAAAAAAAAAAAAAAAAAAAAAAAAAAAAAAAAAAAAAAAAAAAAAAAAAAAAAAAAAAAAAAAAAAAAAAAAAAAAAAAAAAAAAAAAAAAAAAAAAAAAAAAAAAAAAAAAAAAAAAAAAAAAAAAAAAAAAAAAAAAAAAAAAAAAAAAAAAAAAAAAAAAAAAAAAAAAAAAAAAAAAAAAAAAAAAAAAAAAAAAAAAAAAAAAAAAAAAAAAAAAAAAAAAAAAAAAAAAAAAAAAAAAAAAAAAAAAAAAAAAAAAAAAAAAAAAAAAAAAAAAAAAAAAAAAAAAAAAAAAAAAAAAAAAAAAAAAAAAAAAAAAAAAAAAAAAAAAAAAAAAAAAAAAAAAAAAAAAAAAAAAAAAAAAAAAAAAAAAAAAAAAAAAAAAAAAAAAAAAAAAAAAAAAAAAAAAAAAAAAAAAAAAAAAAAAAAAAAAAAAAAAAAAAAAAAAAAAAAAAAAAAAAAAAAAAAAAAAAAAAAAAAAAAAAAAAAAAAAAAAAAAAAAAAAAAAAAAAAAAAAAAAAAAAAAAAAAAAAAAAAAAAAAAAAAAAAAAAAAAAAAAAAAAAAAAAAAAAAAAAAAAAAAAAAAAAAAAAAAAAAAAAAAAAAAAAAAAAAAAAAAAAAAAAAAAAAAAAAAAAAAAAAAAAAAAAAAAAAAAAAAAAAAAAAAAAAAAAAAAAAAAAAAAAAAAAAAAAAAAAAAAAAAAAAAAAAAAAAAAAAAAAAAAAAAAAAAAAAAAAAAAAAAAAAAAAAAAAAAAAAAAAAAAAAAAAAAAAAAAAAAAAAAAAAAAAAAAAAAAAAAAAAAAAAAAAAAAAAAAAAAAAAAAAAAAAAAAAAAAAAAAAAAAAAAAAAAAAAAAAAAAAAAAAAAAAAAAAAAAAAAAAAAAAAAAAAAAAAAAAAAAAAAAAAAAAAAAAAAAAAAAAAAAAAAAAAAAAAAAAAAAAAAAAAAAAAAAAAAAAAAAAAAAAAAAAAAAAAAAAAAAAAAAAAAAAAAAAAAAAAAAAAAAAAAAAAAAAAAAAAAAAAAAAAAAAAAAAAAAAAAAAAAAAAAAAAAAAAAAAAAAAAAAAAAAAAAAAAAAAAAAAAAAAAAAAAAAAAAAAAAAAAAAAAAAAAAAAAAAAAAAAAAAAAAAAAAAAAAAAAAAAAAAAAAAAAAAAAAAAAAAAAAAAAAAAAAAAAAAAAAAAAAAAAAAAAAAAAAAAAAAAAAAAAAAAAAAAAAAAAAAAAAAAAAAAAAAAAAAAAAAAAAAAAAAAAAAAAAAAAAAAAAAAAAAAAAAAAAAAAAAAAAAAAAAAAAAAAAAAAAAAAAAAAAAAAAAAAAAAAAAAAAAAAAAAAAAAAAAAAAAAAAAAAAAAAAAAAAAAAAAAAAAAAAAAAAAAAAAAAAAAAAAAAAAAAAAAAAAAAAAAAAAAAAAAAAAAAAAAAAAAAAAAAAAAAAAAAAAAAAAAAAAAAAAAAAAAAAAAAAAAAAAAAAAAAAAAAAAAAAAAAAAAAAAAAAAAAAAAAAAAAAAAAAAAAAAAAAAAAAAAAAAAAAAAAAAAAAAAAAAAAAAAAAAAAAAAAAAAAAAAAAAAAAAAAAAAAAAAAAAAAAAAAAAAAAAAAAAAAAAAAAAAAAAAAAAAAAAAAAAAAAAAAAAAAAAAAAAAAAAAAAAAAAAAAAAAAAAAAAAAAAAAAAAAAAAAAAAAAAAAAAAAAAAAAAAAAAAAAAAAAAAAAAAAAAAAAAAAAAAAAAAAAAAAAAAAAAAAAAAAAAAAAAAAAAAAAAAAAAAAAAAAAAAAAAAAAAAAAAAAAAAAAAAAAAAAAAAAAAAAAAAAAAAAAAAAAAAAAAAAAAAAAAAAAAAAAAAAAAAAAAAAAAAAAAAAAAAAAAAAAAAAAAAAAAAAAAAAAAAAAAAAAAAAAAAAAAAAAAAAAAAAAAAAAAAAAAAAAAAAAAAAAAAAAAAAAAAAAAAAAAAAAAAAAAAAAAAAAAAAAAAAAAAAAAAAAAAAAAAAAAAAAAAAAAAAAAAAAAAAAAAAAAAAAAAAAAAAAAAAAAAAAAAAAAAAAAAAAAAAAAAAAAAAAAAAAAAAAAAAAAAAAAAAAAAAAAAAAAAAAAAAAAAAAAAAAAAAAAAAAAAAAAAAAAAAAAAAAAAAAAAAAAAAAAAAAAAAAAAAAAAAAAAAAAAAAAAAAAAAAAAAAAAAAAAAAAAAAAAAAAAAAAAAAAAAAAAAAAAAAAAAAAAAAAAAAAAAAAAAAAAAAAAAAAAAAAAAAAAAAAAAAAAAAAAAAAAAAAAAAAAAAAAAAAAAAAAAAAAAAAAAAAAAAAAAAAAAAAAAAAAAAAAAAAAAAAAAAAAAAAAAAAAAAAAAAAAAAAAAAAAAAAAAAAAAAAAAAAAAAAAAAAAAAAAAAAAAAAAAAAAAAAAAAAAAAAAAAAAAAAAAAAAAAAAAAAAAAAAAAAAAAAAAAAAAAAAAAAAAAAAAAAAAAAAAAAAAAAAAAAAAAAAAAAAAAAAAAAAAAAAAAAAAAAAAAAAAAAAAAAAAAAAAAAAAAAAAAAAAAAAAAAAAAAAAAAAAAAAAAAAAAAAAAAAAAAAAAAAAAAAAAAAAAAAAAAAAAAAAAAAAAAAAAAAAAAAAAAAAAAAAAAAAAAAAAAAAAAAAAAAAAAAAAAAAAAAAAAAAAAAAAAAAAAAAAAAAAAAAAAAAAAAAAAAAAAAAAAAAAAAAAAAAAAAAAAAAAAAAAAAAAAAAAAAAAAAAAAAAAAAAAAAAAAAAAAAAAAAAAAAAAAAAAAAAAAAAAAAAAAAAAAAAAAAAAAAAAAAAAAAAAAAAAAAAAAAAAAAAAAAAAAAAAAAAAAAAAAAAAAAAAAAAAAAAAAAAAAAAAAAAAAAAAAAAAAAAAAAAAAAAAAAAAAAAAAAAAAAAAAAAAAAAAAAAAAAAAAAAAAAAAAAAAAAAAAAAAAAAAAAAAAAAAAAAAAAAAAAAAAAAAAAAAAAAAAAAAAAAAAAAAAAAAAAAAAAAAAAAAAAAAAAAAAAAAAAAAAAAAAAAAAAAAAAAAAAAAAAAAAAAAAAAAAAAAAAAAAAAAAAAAAAAAAAAAAAAAAAAAAAAAAAAAAAAAAAAAAAAAAAAAAAAAAAAAAAAAAAAAAAAAAAAAAAAAAAAAAAAAAAAAAAAAAAAAAAAAAAAAAAAAAAAAAAAAAAAAAAAAAAAAAAAAAAAAAAAAAAAAAAAAAAAAAAAAAAAAAAAAAAAAAAAAAAAAAAAAAAAAAAAAAAAAAAAAAAAAAAAAAAAAAAAAAAAAAAAAAAAAAAAAAAAAAAAAAAAAAAAAAAAAAAAAAAAAAAAAAAAAAAAAAAAAAAAAAAAAAAAAAAAAAAAAAAAAAAAAAAAAAAAAAAAAAAAAAAAAAAAAAAAAAAAAAAAAAAAAAAAAAAAAAAAAAAAAAAAAAAAAAAAAAAAAAAAAAAAAAAAAAAAAAAAAAAAAAAAAAAAAAAAAAAAAAAAAAAAAAAAAAAAAAAAAAAAAAAAAAAAAAAAAAAAAAAAAAAAAAAAAAAAAAAAAAAAAAAAAAAAAAAAAAAAAAAAAAAAAAAAAAAAAAAAAAAAAAAAAAAAAAAAAAAAAAAAAAAAAAAAAAAAAAAAAAAAAAAAAAAAAAAAAAAAAAAAAAAAAAAAAAAAAAAAAAAAAAAAAAAAAAAAAAAAAAAAAAAAAAAAAAAAAAAAAAAAAAAAAAAAAAAAAAAAAAAAAAAAAAAAAAAAAAAAAAAAAAAAAAAAAAAAAAAAAAAAAAAAAAAAAAAAAAAAAAAAAAAAAAAAAAAAAAAAAAAAAAAAAAAAAAAAAAAAAAAAAAAAAAAAAAAAAAAAAAAAAAAAAAAAAAAAAAAAAAAAAAAAAAAAAAAAAAAAAAAAAAAAAAAAAAAAAAAAAAAAAAAAAAAAAAAAAAAAAAAAAAAAAAAAAAAAAAAAAAAAAAAAAAAAAAAAAAAAAAAAAAAAAAAAAAAAAAAAAAAAAAAAAAAAAAAAAAAAAAAAAAAAAAAAAAAAAAAAAAAAAAAAAAAAAAAAAAAAAAAAAAAAAAAAAAAAAAAAAAAAAAAAAAAAAAAAAAAAAAAAAAAAAAAAAAAAAAAAAAAAAAAAAAAAAAAAAAAAAAAAAAAAAAAAAAAAAAAAAAAAAAAAAAAAAAAAAAAAAAAAAAAAAAAAAAAAAAAAAAAAAAAAAAAAAAAAAAAAAAAAAAAAAAAAAAAAAAAAAAAAAAAAAAAAAAAAAAAAAAAAAAAAAAAAAAAAAAAAAAAAAAAAAAAAAAAAAAAAAAAAAAAAAAAAAAAAAAAAAAAAAAAAAAAAAAAAAAAAAAAAAAAAAAAAAAAAAAAAAAAAAAAAAAAAAAAAAAAAAAAAAAAAAAAAAAAAAAAAAAAAAAAAAAAAAAAAAAAAAAAAAAAAAAAAAAAAAAAAAAAAAAAAAAAAAAAAAAAAAAAAAAAAAAAAAAAAAAAAAAAAAAAAAAAAAAAAAAAAAAAAAAAAAAAAAAAAAAAAAAAAAAAAAAAAAAAAAAAAAAAAAAAAAAAAAAAAAAAAAAAAAAAAAAAAAAAAAAAAAAAAAAAAAAAAAAAAAAAAAAAAAAAAAAAAAAAAAAAAAAAAAAAAAAAAAAAAAAAAAAAAAAAAAAAAAAAAAAAAAAAAAAAAAAAAAAAAAAAAAAAAAAAAAAAAAAAAAAAAAAAAAAAAAAAAAAAAAAAAAAAAAAAAAAAAAAAAAAAAAAAAAAAAAAAAAAAAAAAAAAAAAAAAAAAAAAAAAAAAAAAAAAAAAAAAAAAAAAAAAAAAAAAAAAAAAAAAAAAAAAAAAAAAAAAAAAAAAAAAAAAAAAAAAAAAAAAAAAAAAAAAAAAAAAAAAAAAAAAAAAAAAAAAAAAAAAAAAAAAAAAAAAAAAAAAAAAAAAAAAAAAAAAAAAAAAAAAAAAAAAAAAAAAAAAAAAAAAAAAAAAAAAAAAAAAAAAAAAAAAAAAAAAAAAAAAAAAAAAAAAAAAAAAAAAAAAAAAAAAAAAAAAAAAAAAAAAAAAAAAAAAAAAAAAAAAAAAAAAAAAAAAAAAAAAAAAAAAAAAAAAAAAAAAAAAAAAAAAAAAAAAAAAAAAAAAAAAAAAAAAAAAAAAAAAAAAAAAAAAAAAAAAAAAAAAAAAAAAAAAAAAAAAAAAAAAAAAAAAAAAAAAAAAAAAAAAAAAAAAAAAAAAAAAAAAAAAAAAAAAAAAAAAAAAAAAAAAAAAAAAAAAAAAAAAAAAAAAAAAAAAAAAAAAAAAAAAAAAAAAAAAAAAAAAAAAAAAAAAAAAAAAAAAAAAAAAAAAAAAAAAAAAAAAAAAAAAAAAAAAAAAAAAAAAAAAAAAAAAAAAAAAAAAAAAAAAAAAAAAAAAAAAAAAAAAAAAAAAAAAAAAAAAAAAAAAAAAAAAAAAAAAAAAAAAAAAAAAAAAAAAAAAAAAAAAAAAAAAAAAAAAAAAAAAAAAAAAAAAAAAAAAAAAAAAAAAAAAAAAAAAAAAAAAAAAAAAAAAAAAAAAAAAAAAAAAAAAAAAAAAAAAAAAAAAAAAAAAAAAAAAAAAAAAAAAAAAAAAAAAAAAAAAAAAAAAAAAAAAAAAAAAAAAAAAAAAAAAAAAAAAAAAAAAAAAAAAAAAAAAAAAAAAAAAAAAAAAAAAAAAAAAAAAAAAAAAAAAAAAAAAAAAAAAAAAAAAAAAAAAAAAAAAAAAAAAAAAAAAAAAAAAAAAAAAAAAAAAAAAAAAAAAAAAAAAAAAAAAAAAAAAAAAAAAAAAAAAAAAAAAAAAAAAAAAAAAAAAAAAAAAAAAAAAAAAAAAAAAAAAAAAAAAAAAAAAAAAAAAAAAAAAAAAAAAAAAAAAAAAAAAAAAAAAAAAAAAAAAAAAAAAAAAAAAAAAAAAAAAAAAAAAAAAAAAAAAAAAAAAAAAAAAAAAAAAAAAAAAAAAAAAAAAAAAAAAAAAAAAAAAAAAAAAAAAAAAAAAAAAAAAAAAAAAAAAAAAAAAAAAAAAAAAAAAAAAAAAAAAAAAAAAAAAAAAAAAAAAAAAAAAAAAAAAAAAAAAAAAAAAAAAAAAAAAAAAAAAAAAAAAAAAAAAAAAAAAAAAAAAAAAAAAAAAAAAAAAAAAAAAAAAAAAAAAAAAAAAAAAAAAAAAAAAAAAAAAAAAAAAAAAAAAAAAAAAAAAAAAAAAAAAAAAAAAAAAAAAAAAAAAAAAAAAAAAAAAAAAAAAAAAAAAAAAAAAAAAAAAAAAAAAAAAAAAAAAAAAAAAAAAAAAAAAAAAAAAAAAAAAAAAAAAAAAAAAAAAAAAAAAAAAAAAAAAAAAAAAAAAAAAAAAAAAAAAAAAAAAAAAAAAAAAAAAAAAAAAAAAAAAAAAAAAAAAAAAAAAAAAAAAAAAAAAAAAAAAAAAAAAAAAAAAAAAAAAAAAAAAAAAAAAAAAAAAAAAAAAAAAAAAAAAAAAAAAAAAAAAAAAAAAAAAAAAAAAAAAAAAAAAAAAAAAAAAAAAAAAAAAAAAAAAAAAAAAAAAAAAAAAAAAAAAAAAAAAAAAAAAAAAAAAAAAAAAAAAAAAAAAAAAAAAAAAAAAAAAAAAAAAAAAAAAAAAAAAAAAAAAAAAAAAAAAAAAAAAAAAAAAAAAAAAAAAAAAAAAAAAAAAAAAAAAAAAAAAAAAAAAAAAAAAAAAAAAAAAAAAAAAAAAAAAAAAAAAAAAAAAAAAAAAAAAAAAAAAAAAAAAAAAAAAAAAAAAAAAAAAAAAAAAAAAAAAAAAAAAAAAAAAAAAAAAAAAAAAAAAAAAAAAAAAAAAAAAAAAAAAAAAAAAAAAAAAAAAAAAAAAAAAAAAAAAAAAAAAAAAAAAAAAAAAAAAAAAAAAAAAAAAAAAAAAAAAAAAAAAAACAAAAAv//////////AQAAAAAAAAAAAAAAEQAAAFByb3BlcnR5RG9jdW1lbnRzAwAAAAAAAAAEAAAACQAAAF9pZD0kLl9pZAEDAAAAAAADAAAAAQADAAAAIwAAAENvbWJpSW5kZXg9JC5OYW1lICsgJ18nICsgJC5WZXJzaW9uAQUAAAAAAAUAAAABAAUAAAAAAAAAAP///////wAAAAAAAP////8AAAAAAP///////wAAAAAAAP////8AAAAAAP///////wAAAAAAAP////8AAAAAAP///////wAAAAAAAP////8AAAAAAP///////wAAAAAAAP////8AAAAAAP///////wAAAAAAAP////8AAAAAAP///////wAAAAAAAP////8AAAAAAP///////wAAAAAAAP////8AAAAAAP///////wAAAAAAAP////8AAAAAAP///////wAAAAAAAP////8AAAAAAP///////wAAAAAAAP////8AAAAAAP///////wAAAAAAAP////8AAAAAAP///////wAAAAAAAP////8AAAAAAP///////wAAAAAAAP////8AAAAAAAAAAAAAAAAAAAAAAAAAAAAAAAAAAAAAAAAAAAAAAAAAAAAAAAAAAAAAAAAAAAAAAAAAAAAAAAAAAAAAAAAAAAAAAAAAAAAAAAAAAAAAAAAAAAAAAAAAAAAAAAAAAAAAAAAAAAAAAAAAAAAAAAAAAAAAAAAAAAAAAAAAAAAAAAAAAAAAAAAAAAAAAAAAAAAAAAAAAAAAAAAAAAAAAAAAAAAAAAAAAAAAAAAAAAAAAAAAAAAAAAAAAAAAAAAAAAAAAAAAAAAAAAAAAAAAAAAAAAAAAAAAAAAAAAAAAAAAAAAAAAAAAAAAAAAAAAAAAAAAAAAAAAAAAAAAAAAAAAAAAAAAAAAAAAAAAAAAAAAAAAAAAAAAAAAAAAAAAAAAAAAAAAAAAAAAAAAAAAAAAAAAAAAAAAAAAAAAAAAAAAAAAAAAAAAAAAAAAAAAAAAAAAAAAAAAAAAAAAAAAAAAAAAAAAAAAAAAAAAAAAAAAAAAAAAAAAAAAAAAAAAAAAAAAAAAAAAAAAAAAAAAAAAAAAAAAAAAAAAAAAAAAAAAAAAAAAAAAAAAAAAAAAAAAAAAAAAAAAAAAAAAAAAAAAAAAAAAAAAAAAAAAAAAAAAAAAAAAAAAAAAAAAAAAAAAAAAAAAAAAAAAAAAAAAAAAAAAAAAAAAAAAAAAAAAAAAAAAAAAAAAAAAAAAAAAAAAAAAAAAAAAAAAAAAAAAAAAAAAAAAAAAAAAAAAAAAAAAAAAAAAAAAAAAAAAAAAAAAAAAAAAAAAAAAAAAAAAAAAAAAAAAAAAAAAAAAAAAAAAAAAAAAAAAAAAAAAAAAAAAAAAAAAAAAAAAAAAAAAAAAAAAAAAAAAAAAAAAAAAAAAAAAAAAAAAAAAAAAAAAAAAAAAAAAAAAAAAAAAAAAAAAAAAAAAAAAAAAAAAAAAAAAAAAAAAAAAAAAAAAAAAAAAAAAAAAAAAAAAAAAAAAAAAAAAAAAAAAAAAAAAAAAAAAAAAAAAAAAAAAAAAAAAAAAAAAAAAAAAAAAAAAAAAAAAAAAAAAAAAAAAAAAAAAAAAAAAAAAAAAAAAAAAAAAAAAAAAAAAAAAAAAAAAAAAAAAAAAAAAAAAAAAAAAAAAAAAAAAAAAAAAAAAAAAAAAAAAAAAAAAAAAAAAAAAAAAAAAAAAAAAAAAAAAAAAAAAAAAAAAAAAAAAAAAAAAAAAAAAAAAAAAAAAAAAAAAAAAAAAAAAAAAAAAAAAAAAAAAAAAAAAAAAAAAAAAAAAAAAAAAAAAAAAAAAAAAAAAAAAAAAAAAAAAAAAAAAAAAAAAAAAAAAAAAAAAAAAAAAAAAAAAAAAAAAAAAAAAAAAAAAAAAAAAAAAAAAAAAAAAAAAAAAAAAAAAAAAAAAAAAAAAAAAAAAAAAAAAAAAAAAAAAAAAAAAAAAAAAAAAAAAAAAAAAAAAAAAAAAAAAAAAAAAAAAAAAAAAAAAAAAAAAAAAAAAAAAAAAAAAAAAAAAAAAAAAAAAAAAAAAAAAAAAAAAAAAAAAAAAAAAAAAAAAAAAAAAAAAAAAAAAAAAAAAAAAAAAAAAAAAAAAAAAAAAAAAAAAAAAAAAAAAAAAAAAAAAAAAAAAAAAAAAAAAAAAAAAAAAAAAAAAAAAAAAAAAAAAAAAAAAAAAAAAAAAAAAAAAAAAAAAAAAAAAAAAAAAAAAAAAAAAAAAAAAAAAAAAAAAAAAAAAAAAAAAAAAAAAAAAAAAAAAAAAAAAAAAAAAAAAAAAAAAAAAAAAAAAAAAAAAAAAAAAAAAAAAAAAAAAAAAAAAAAAAAAAAAAAAAAAAAAAAAAAAAAAAAAAAAAAAAAAAAAAAAAAAAAAAAAAAAAAAAAAAAAAAAAAAAAAAAAAAAAAAAAAAAAAAAAAAAAAAAAAAAAAAAAAAAAAAAAAAAAAAAAAAAAAAAAAAAAAAAAAAAAAAAAAAAAAAAAAAAAAAAAAAAAAAAAAAAAAAAAAAAAAAAAAAAAAAAAAAAAAAAAAAAAAAAAAAAAAAAAAAAAAAAAAAAAAAAAAAAAAAAAAAAAAAAAAAAAAAAAAAAAAAAAAAAAAAAAAAAAAAAAAAAAAAAAAAAAAAAAAAAAAAAAAAAAAAAAAAAAAAAAAAAAAAAAAAAAAAAAAAAAAAAAAAAAAAAAAAAAAAAAAAAAAAAAAAAAAAAAAAAAAAAAAAAAAAAAAAAAAAAAAAAAAAAAAAAAAAAAAAAAAAAAAAAAAAAAAAAAAAAAAAAAAAAAAAAAAAAAAAAAAAAAAAAAAAAAAAAAAAAAAAAAAAAAAAAAAAAAAAAAAAAAAAAAAAAAAAAAAAAAAAAAAAAAAAAAAAAAAAAAAAAAAAAAAAAAAAAAAAAAAAAAAAAAAAAAAAAAAAAAAAAAAAAAAAAAAAAAAAAAAAAAAAAAAAAAAAAAAAAAAAAAAAAAAAAAAAAAAAAAAAAAAAAAAAAAAAAAAAAAAAAAAAAAAAAAAAAAAAAAAAAAAAAAAAAAAAAAAAAAAAAAAAAAAAAAAAAAAAAAAAAAAAAAAAAAAAAAAAAAAAAAAAAAAAAAAAAAAAAAAAAAAAAAAAAAAAAAAAAAAAAAAAAAAAAAAAAAAAAAAAAAAAAAAAAAAAAAAAAAAAAAAAAAAAAAAAAAAAAAAAAAAAAAAAAAAAAAAAAAAAAAAAAAAAAAAAAAAAAAAAAAAAAAAAAAAAAAAAAAAAAAAAAAAAAAAAAAAAAAAAAAAAAAAAAAAAAAAAAAAAAAAAAAAAAAAAAAAAAAAAAAAAAAAAAAAAAAAAAAAAAAAAAAAAAAAAAAAAAAAAAAAAAAAAAAAAAAAAAAAAAAAAAAAAAAAAAAAAAAAAAAAAAAAAAAAAAAAAAAAAAAAAAAAAAAAAAAAAAAAAAAAAAAAAAAAAAAAAAAAAAAAAAAAAAAAAAAAAAAAAAAAAAAAAAAAAAAAAAAAAAAAAAAAAAAAAAAAAAAAAAAAAAAAAAAAAAAAAAAAAAAAAAAAAAAAAAAAAAAAAAAAAAAAAAAAAAAAAAAAAAAAAAAAAAAAAAAAAAAAAAAAAAAAAAAAAAAAAAAAAAAAAAAAAAAAAAAAAAAAAAAAAAAAAAAAAAAAAAAAAAAAAAAAAAAAAAAAAAAAAAAAAAAAAAAAAAAAAAAAAAAAAAAAAAAAAAAAAAAAAAAAAAAAAAAAAAAAAAAAAAAAAAAAAAAAAAAAAAAAAAAAAAAAAAAAAAAAAAAAAAAAAAAAAAAAAAAAAAAAAAAAAAAAAAAAAAAAAAAAAAAAAAAAAAAAAAAAAAAAAAAAAAAAAAAAAAAAAAAAAAAAAAAAAAAAAAAAAAAAAAAAAAAAAAAAAAAAAAAAAAAAAAAAAAAAAAAAAAAAAAAAAAAAAAAAAAAAAAAAAAAAAAAAAAAAAAAAAAAAAAAAAAAAAAAAAAAAAAAAAAAAAAAAAAAAAAAAAAAAAAAAAAAAAAAAAAAAAAAAAAAAAAAAAAAAAAAAAAAAAAAAAAAAAAAAAAAAAAAAAAAAAAAAAAAAAAAAAAAAAAAAAAAAAAAAAAAAAAAAAAAAAAAAAAAAAAAAAAAAAAAAAAAAAAAAAAAAAAAAAAAAAAAAAAAAAAAAAAAAAAAAAAAAAAAAAAAAAAAAAAAAAAAAAAAAAAAAAAAAAAAAAAAAAAAAAAAAAAAAAAAAAAAAAAAAAAAAAAAAAAAAAAAAAAAAAAAAAAAAAAAAAAAAAAAAAAAAAAAAAAAAAAAAAAAAAAAAAAAAAAAAAAAAAAAAAAAAAAAAAAAAAAAAAAAAAAAAAAAAAAAAAAAAAAAAAAAAAAAAAAAAAAAAAAAAAAAAAAAAAAAAAAAAAAAAAAAAAAAAAAAAAAAAAAAAAAAAAAAAAAAAAAAAAAAAAAAAAAAAAAAAAAAAAAAAAAAAAAAAAAAAAAAAAAAAAAAAAAAAAAAAAAAAAAAAAAAAAAAAAAAAAAAAAAAAAAAAAAAAAAAAAAAAAAAAAAAAAAAAAAAAAAAAAAAAAAAAAAAAAAAAAAAAAAAAAAAAAAAAAAAAAAAAAAAAAAAAAAAAAAAAAAAAAAAAAAAAAAAAAAAAAAAAAAAAAAAAAAAAAAAAAAAAAAAAAAAAAAAAAAAAAAAAAAAAAAAAAAAAAAAAAAAAAAAAAAAAAAAAAAAAAAAAAAAAAAAAAAAAAAAAAAAAAAAAAAAAAAAAAAAAAAAAAAAAAAAAAAAAAAAAAAAAAAAAAAAAAAAAAAAAAAAAAAAAAAAAAAAAAAAAAAAAAAAAAAAAAAAAAAAAAAAAAAAAAAAAAAAAAAAAAAAAAAAAAAAAAAAAAAAAAAAAAAAAAAAAAAAAAAAAAAAAAAAAAAAAAAAAAAAAAAAAAAAAAAAAAAAAAAAAAAAAAAAAAAAAAAAAAAAAAAAAAAAAAAAAAAAAAAAAAAAAAAAAAAAAAAAAAAAAAAAAAAAAAAAAAAAAAAAAAAAAAAAAAAAAAAAAAAAAAAAAAAAAAAAAAAAAAAAAAAAAAAAAAAAAAAAAAAAAAAAAAAAAAAAAAAAAAAAAAAAAAAAAAAAAAAAAAAAAAAAAAAAAAAAAAAAAAAAAAAAAAAAAAAAAAAAAAAAAAAAAAAAAAAAAAAAAAAAAAAAAAAAAAAAAAAAAAAAAAAAAAAAAAAAAAAAAAAAAAAAAAAAAAAAAAAAAAAAAAAAAAAAAAAAAAAAAAAAAAAAAAAAAAAAAAAAAAAAAAAAAAAAAAAAAAAAAAAAAAAAAAAAAAAAAAAAAAAAAAAAAAAAAAAAAAAAAAAAAAAAAAAAAAAAAAAAAAAAAAAAAAAAAAAAAAAAAAAAAAAAAAAAAAAAAAAAAAAAAAAAAAAAAAAAAAAAAAAAAAAAwMBAQEBAQEBAQEBAQEBAQMAAAAAAAAAAwAAAAMAAAAA/////wUAzgsAAAAAAAAAAAAAIAD///////////////8AAAD///////////////8DAAAABAD///////8DAAAABAD///////8DAAAABAD///////////////////////////////////////////////////////////////////////////////////////////////////////////////////////////////////////////////////////////////////////////////////////////////////////////////////////////////////////////////////////////////////////////////////////////////////////////////////////////////////////////////////////////////////////////////////////////////////////////////////////////////////////////////////////////////////////////////8BACAA////////////////AAAO////////AwAAAAMA////////////////////////////////////////////////////////////////////////////////////////////////////////////////////////////////////////////////////////////////////////////////////////////////////////////////////////////////////////////////////////////////////////////////////////////////////////////////////////////////////////////////////////////////////////////////////////////////////////////////////////////////////////////////////////////////////////////////////////////////////////////////////////AgADAP///////wUAAAACABAAC649jzGsyo5MrhhhU3645gUEAAAAAAADAAAABAADAAAAAwADAAAABAADAAAAAwADAAAABAADAAAAAwADAAMA////////BQAAAAMAEAAL6yQvx0w2tU2vdDQqP9t0fwQAAAABAAMAAAACAAMAAAABAAMAAAACAP///////wMAAAACAP///////wQAAwD///////8FAAAABAAQAAv0m2kprl8GQZVuzE4xfUJTBAAAAAIAAwAAAAAAAwAAAAIAAwAAAAAAAwAAAAIAAwAAAAAAAwAAAAIAAAAAAAAAAAAAAAAAAAAAAAAAAAAAAAAAAAAAAAAAAAAAAAAAAAAAAAAAAAAAAAAAAAAAAAAAAAAAAAAAAAAAAAAAAAAAAAAAAAAAAAAAAAAAAAAAAAAAAAAAAAAAAAAAAAAAAAAAAAAAAAAAAAAAAAAAAAAAAAAAAAAAAAAAAAAAAAAAAAAAAAAAAAAAAAAAAAAAAAAAAAAAAAAAAAAAAAAAAAAAAAAAAAAAAAAAAAAAAAAAAAAAAAAAAAAAAAAAAAAAAAAAAAAAAAAAAAAAAAAAAAAAAAAAAAAAAAAAAAAAAAAAAAAAAAAAAAAAAAAAAAAAAAAAAAAAAAAAAAAAAAAAAAAAAAAAAAAAAAAAAAAAAAAAAAAAAAAAAAAAAAAAAAAAAAAAAAAAAAAAAAAAAAAAAAAAAAAAAAAAAAAAAAAAAAAAAAAAAAAAAAAAAAAAAAAAAAAAAAAAAAAAAAAAAAAAAAAAAAAAAAAAAAAAAAAAAAAAAAAAAAAAAAAAAAAAAAAAAAAAAAAAAAAAAAAAAAAAAAAAAAAAAAAAAAAAAAAAAAAAAAAAAAAAAAAAAAAAAAAAAAAAAAAAAAAAAAAAAAAAAAAAAAAAAAAAAAAAAAAAAAAAAAAAAAAAAAAAAAAAAAAAAAAAAAAAAAAAAAAAAAAAAAAAAAAAAAAAAAAAAAAAAAAAAAAAAAAAAAAAAAAAAAAAAAAAAAAAAAAAAAAAAAAAAAAAAAAAAAAAAAAAAAAAAAAAAAAAAAAAAAAAAAAAAAAAAAAAAAAAAAAAAAAAAAAAAAAAAAAAAAAAAAAAAAAAAAAAAAAAAAAAAAAAAAAAAAAAAAAAAAAAAAAAAAAAAAAAAAAAAAAAAAAAAAAAAAAAAAAAAAAAAAAAAAAAAAAAAAAAAAAAAAAAAAAAAAAAAAAAAAAAAAAAAAAAAAAAAAAAAAAAAAAAAAAAAAAAAAAAAAAAAAAAAAAAAAAAAAAAAAAAAAAAAAAAAAAAAAAAAAAAAAAAAAAAAAAAAAAAAAAAAAAAAAAAAAAAAAAAAAAAAAAAAAAAAAAAAAAAAAAAAAAAAAAAAAAAAAAAAAAAAAAAAAAAAAAAAAAAAAAAAAAAAAAAAAAAAAAAAAAAAAAAAAAAAAAAAAAAAAAAAAAAAAAAAAAAAAAAAAAAAAAAAAAAAAAAAAAAAAAAAAAAAAAAAAAAAAAAAAAAAAAAAAAAAAAAAAAAAAAAAAAAAAAAAAAAAAAAAAAAAAAAAAAAAAAAAAAAAAAAAAAAAAAAAAAAAAAAAAAAAAAAAAAAAAAAAAAAAAAAAAAAAAAAAAAAAAAAAAAAAAAAAAAAAAAAAAAAAAAAAAAAAAAAAAAAAAAAAAAAAAAAAAAAAAAAAAAAAAAAAAAAAAAAAAAAAAAAAAAAAAAAAAAAAAAAAAAAAAAAAAAAAAAAAAAAAAAAAAAAAAAAAAAAAAAAAAAAAAAAAAAAAAAAAAAAAAAAAAAAAAAAAAAAAAAAAAAAAAAAAAAAAAAAAAAAAAAAAAAAAAAAAAAAAAAAAAAAAAAAAAAAAAAAAAAAAAAAAAAAAAAAAAAAAAAAAAAAAAAAAAAAAAAAAAAAAAAAAAAAAAAAAAAAAAAAAAAAAAAAAAAAAAAAAAAAAAAAAAAAAAAAAAAAAAAAAAAAAAAAAAAAAAAAAAAAAAAAAAAAAAAAAAAAAAAAAAAAAAAAAAAAAAAAAAAAAAAAAAAAAAAAAAAAAAAAAAAAAAAAAAAAAAAAAAAAAAAAAAAAAAAAAAAAAAAAAAAAAAAAAAAAAAAAAAAAAAAAAAAAAAAAAAAAAAAAAAAAAAAAAAAAAAAAAAAAAAAAAAAAAAAAAAAAAAAAAAAAAAAAAAAAAAAAAAAAAAAAAAAAAAAAAAAAAAAAAAAAAAAAAAAAAAAAAAAAAAAAAAAAAAAAAAAAAAAAAAAAAAAAAAAAAAAAAAAAAAAAAAAAAAAAAAAAAAAAAAAAAAAAAAAAAAAAAAAAAAAAAAAAAAAAAAAAAAAAAAAAAAAAAAAAAAAAAAAAAAAAAAAAAAAAAAAAAAAAAAAAAAAAAAAAAAAAAAAAAAAAAAAAAAAAAAAAAAAAAAAAAAAAAAAAAAAAAAAAAAAAAAAAAAAAAAAAAAAAAAAAAAAAAAAAAAAAAAAAAAAAAAAAAAAAAAAAAAAAAAAAAAAAAAAAAAAAAAAAAAAAAAAAAAAAAAAAAAAAAAAAAAAAAAAAAAAAAAAAAAAAAAAAAAAAAAAAAAAAAAAAAAAAAAAAAAAAAAAAAAAAAAAAAAAAAAAAAAAAAAAAAAAAAAAAAAAAAAAAAAAAAAAAAAAAAAAAAAAAAAAAAAAAAAAAAAAAAAAAAAAAAAAAAAAAAAAAAAAAAAAAAAAAAAAAAAAAAAAAAAAAAAAAAAAAAAAAAAAAAAAAAAAAAAAAAAAAAAAAAAAAAAAAAAAAAAAAAAAAAAAAAAAAAAAAAAAAAAAAAAAAAAAAAAAAAAAAAAAAAAAAAAAAAAAAAAAAAAAAAAAAAAAAAAAAAAAAAAAAAAAAAAAAAAAAAAAAAAAAAAAAAAAAAAAAAAAAAAAAAAAAAAAAAAAAAAAAAAAAAAAAAAAAAAAAAAAAAAAAAAAAAAAAAAAAAAAAAAAAAAAAAAAAAAAAAAAAAAAAAAAAAAAAAAAAAAAAAAAAAAAAAAAAAAAAAAAAAAAAAAAAAAAAAAAAAAAAAAAAAAAAAAAAAAAAAAAAAAAAAAAAAAAAAAAAAAAAAAAAAAAAAAAAAAAAAAAAAAAAAAAAAAAAAAAAAAAAAAAAAAAAAAAAAAAAAAAAAAAAAAAAAAAAAAAAAAAAAAAAAAAAAAAAAAAAAAAAAAAAAAAAAAAAAAAAAAAAAAAAAAAAAAAAAAAAAAAAAAAAAAAAAAAAAAAAAAAAAAAAAAAAAAAAAAAAAAAAAAAAAAAAAAAAAAAAAAAAAAAAAAAAAAAAAAAAAAAAAAAAAAAAAAAAAAAAAAAAAAAAAAAAAAAAAAAAAAAAAAAAAAAAAAAAAAAAAAAAAAAAAAAAAAAAAAAAAAAAAAAAAAAAAAAAAAAAAAAAAAAAAAAAAAAAAAAAAAAAAAAAAAAAAAAAAAAAAAAAAAAAAAAAAAAAAAAAAAAAAAAAAAAAAAAAAAAAAAAAAAAAAAAAAAAAAAAAAAAAAAAAAAAAAAAAAAAAAAAAAAAAAAAAAAAAAAAAAAAAAAAAAAAAAAAAAAAAAAAAAAAAAAAAAAAAAAAAAAAAAAAAAAAAAAAAAAAAAAAAAAAAAAAAAAAAAAAAAAAAAAAAAAAAAAAAAAAAAAAAAAAAAAAAAAAAAAAAAAAAAAAAAAAAAAAAAAAAAAAAAAAAAAAAAAAAAAAAAAAAAAAAAAAAAAAAAAAAAAAAAAAAAAAAAAAAAAAAAAAAAAAAAAAAAAAAAAAAAAAAAAAAAAAAAAAAAAAAAAAAAAAAAAAAAAAAAAAAAAAAAAAAAAAAAAAAAAAAAAAAAAAAAAAAAAAAAAAAAAAAAAAAAAAAAAAAAAAAAAAAAAAAAAAAAAAAAAAAAAAAAAAAAAAAAAAAAAAAAAAAAAAAAAAAAAAAAAAAAAAAAAAAAAAAAAAAAAAAAAAAAAAAAAAAAAAAAAAAAAAAAAAAAAAAAAAAAAAAAAAAAAAAAAAAAAAAAAAAAAAAAAAAAAAAAAAAAAAAAAAAAAAAAAAAAAAAAAAAAAAAAAAAAAAAAAAAAAAAAAAAAAAAAAAAAAAAAAAAAAAAAAAAAAAAAAAAAAAAAAAAAAAAAAAAAAAAAAAAAAAAAAAAAAAAAAAAAAAAAAAAAAAAAAAAAAAAAAAAAAAAAAAAAAAAAAAAAAAAAAAAAAAAAAAAAAAAAAAAAAAAAAAAAAAAAAAAAAAAAAAAAAAAAAAAAAAAAAAAAAAAAAAAAAAAAAAAAAAAAAAAAAAAAAAAAAAAAAAAAAAAAAAAAAAAAAAAAAAAAAAAAAAAAAAAAAAAAAAAAAAAAAAAAAAAAAAAAAAAAAAAAAAAAAAAAAAAAAAAAAQAAAAEAAAAAP////8DAJ0OAAAAAAAAAAAAAP////9hAGEAAAAFX2lkABAAAAAErj2PMazKjkyuGGFTfrjmBQREYXRhAAUAAAAAAk5hbWUADQAAAExpbmtEYXRhTGlzdAAQVmVyc2lvbgAAAAAACUxhc3RXcml0ZQBF1T9pkwEAAAABAP////9hAGEAAAAFX2lkABAAAAAE6yQvx0w2tU2vdDQqP9t0fwREYXRhAAUAAAAAAk5hbWUADQAAAExpbmtEYXRhTGlzdAAQVmVyc2lvbgABAAAACUxhc3RXcml0ZQBK1T9pkwEAAAACAP////9wAHAAAAAFX2lkABAAAAAE9JtpKa5fBkGVbsxOMX1CUwNEYXRhABYAAAACUGVyc29uYWxJZAABAAAAAAACTmFtZQALAAAAUGVyc29uYWxJZAAQVmVyc2lvbgAAAAAACUxhc3RXcml0ZQBv1T9pkwEAAAAAAAAAAAAAAAAAAAAAAAAAAAAAAAAAAAAAAAAAAAAAAAAAAAAAAAAAAAAAAAAAAAAAAAAAAAAAAAAAAAAAAAAAAAAAAAAAAAAAAAAAAAAAAAAAAAAAAAAAAAAAAAAAAAAAAAAAAAAAAAAAAAAAAAAAAAAAAAAAAAAAAAAAAAAAAAAAAAAAAAAAAAAAAAAAAAAAAAAAAAAAAAAAAAAAAAAAAAAAAAAAAAAAAAAAAAAAAAAAAAAAAAAAAAAAAAAAAAAAAAAAAAAAAAAAAAAAAAAAAAAAAAAAAAAAAAAAAAAAAAAAAAAAAAAAAAAAAAAAAAAAAAAAAAAAAAAAAAAAAAAAAAAAAAAAAAAAAAAAAAAAAAAAAAAAAAAAAAAAAAAAAAAAAAAAAAAAAAAAAAAAAAAAAAAAAAAAAAAAAAAAAAAAAAAAAAAAAAAAAAAAAAAAAAAAAAAAAAAAAAAAAAAAAAAAAAAAAAAAAAAAAAAAAAAAAAAAAAAAAAAAAAAAAAAAAAAAAAAAAAAAAAAAAAAAAAAAAAAAAAAAAAAAAAAAAAAAAAAAAAAAAAAAAAAAAAAAAAAAAAAAAAAAAAAAAAAAAAAAAAAAAAAAAAAAAAAAAAAAAAAAAAAAAAAAAAAAAAAAAAAAAAAAAAAAAAAAAAAAAAAAAAAAAAAAAAAAAAAAAAAAAAAAAAAAAAAAAAAAAAAAAAAAAAAAAAAAAAAAAAAAAAAAAAAAAAAAAAAAAAAAAAAAAAAAAAAAAAAAAAAAAAAAAAAAAAAAAAAAAAAAAAAAAAAAAAAAAAAAAAAAAAAAAAAAAAAAAAAAAAAAAAAAAAAAAAAAAAAAAAAAAAAAAAAAAAAAAAAAAAAAAAAAAAAAAAAAAAAAAAAAAAAAAAAAAAAAAAAAAAAAAAAAAAAAAAAAAAAAAAAAAAAAAAAAAAAAAAAAAAAAAAAAAAAAAAAAAAAAAAAAAAAAAAAAAAAAAAAAAAAAAAAAAAAAAAAAAAAAAAAAAAAAAAAAAAAAAAAAAAAAAAAAAAAAAAAAAAAAAAAAAAAAAAAAAAAAAAAAAAAAAAAAAAAAAAAAAAAAAAAAAAAAAAAAAAAAAAAAAAAAAAAAAAAAAAAAAAAAAAAAAAAAAAAAAAAAAAAAAAAAAAAAAAAAAAAAAAAAAAAAAAAAAAAAAAAAAAAAAAAAAAAAAAAAAAAAAAAAAAAAAAAAAAAAAAAAAAAAAAAAAAAAAAAAAAAAAAAAAAAAAAAAAAAAAAAAAAAAAAAAAAAAAAAAAAAAAAAAAAAAAAAAAAAAAAAAAAAAAAAAAAAAAAAAAAAAAAAAAAAAAAAAAAAAAAAAAAAAAAAAAAAAAAAAAAAAAAAAAAAAAAAAAAAAAAAAAAAAAAAAAAAAAAAAAAAAAAAAAAAAAAAAAAAAAAAAAAAAAAAAAAAAAAAAAAAAAAAAAAAAAAAAAAAAAAAAAAAAAAAAAAAAAAAAAAAAAAAAAAAAAAAAAAAAAAAAAAAAAAAAAAAAAAAAAAAAAAAAAAAAAAAAAAAAAAAAAAAAAAAAAAAAAAAAAAAAAAAAAAAAAAAAAAAAAAAAAAAAAAAAAAAAAAAAAAAAAAAAAAAAAAAAAAAAAAAAAAAAAAAAAAAAAAAAAAAAAAAAAAAAAAAAAAAAAAAAAAAAAAAAAAAAAAAAAAAAAAAAAAAAAAAAAAAAAAAAAAAAAAAAAAAAAAAAAAAAAAAAAAAAAAAAAAAAAAAAAAAAAAAAAAAAAAAAAAAAAAAAAAAAAAAAAAAAAAAAAAAAAAAAAAAAAAAAAAAAAAAAAAAAAAAAAAAAAAAAAAAAAAAAAAAAAAAAAAAAAAAAAAAAAAAAAAAAAAAAAAAAAAAAAAAAAAAAAAAAAAAAAAAAAAAAAAAAAAAAAAAAAAAAAAAAAAAAAAAAAAAAAAAAAAAAAAAAAAAAAAAAAAAAAAAAAAAAAAAAAAAAAAAAAAAAAAAAAAAAAAAAAAAAAAAAAAAAAAAAAAAAAAAAAAAAAAAAAAAAAAAAAAAAAAAAAAAAAAAAAAAAAAAAAAAAAAAAAAAAAAAAAAAAAAAAAAAAAAAAAAAAAAAAAAAAAAAAAAAAAAAAAAAAAAAAAAAAAAAAAAAAAAAAAAAAAAAAAAAAAAAAAAAAAAAAAAAAAAAAAAAAAAAAAAAAAAAAAAAAAAAAAAAAAAAAAAAAAAAAAAAAAAAAAAAAAAAAAAAAAAAAAAAAAAAAAAAAAAAAAAAAAAAAAAAAAAAAAAAAAAAAAAAAAAAAAAAAAAAAAAAAAAAAAAAAAAAAAAAAAAAAAAAAAAAAAAAAAAAAAAAAAAAAAAAAAAAAAAAAAAAAAAAAAAAAAAAAAAAAAAAAAAAAAAAAAAAAAAAAAAAAAAAAAAAAAAAAAAAAAAAAAAAAAAAAAAAAAAAAAAAAAAAAAAAAAAAAAAAAAAAAAAAAAAAAAAAAAAAAAAAAAAAAAAAAAAAAAAAAAAAAAAAAAAAAAAAAAAAAAAAAAAAAAAAAAAAAAAAAAAAAAAAAAAAAAAAAAAAAAAAAAAAAAAAAAAAAAAAAAAAAAAAAAAAAAAAAAAAAAAAAAAAAAAAAAAAAAAAAAAAAAAAAAAAAAAAAAAAAAAAAAAAAAAAAAAAAAAAAAAAAAAAAAAAAAAAAAAAAAAAAAAAAAAAAAAAAAAAAAAAAAAAAAAAAAAAAAAAAAAAAAAAAAAAAAAAAAAAAAAAAAAAAAAAAAAAAAAAAAAAAAAAAAAAAAAAAAAAAAAAAAAAAAAAAAAAAAAAAAAAAAAAAAAAAAAAAAAAAAAAAAAAAAAAAAAAAAAAAAAAAAAAAAAAAAAAAAAAAAAAAAAAAAAAAAAAAAAAAAAAAAAAAAAAAAAAAAAAAAAAAAAAAAAAAAAAAAAAAAAAAAAAAAAAAAAAAAAAAAAAAAAAAAAAAAAAAAAAAAAAAAAAAAAAAAAAAAAAAAAAAAAAAAAAAAAAAAAAAAAAAAAAAAAAAAAAAAAAAAAAAAAAAAAAAAAAAAAAAAAAAAAAAAAAAAAAAAAAAAAAAAAAAAAAAAAAAAAAAAAAAAAAAAAAAAAAAAAAAAAAAAAAAAAAAAAAAAAAAAAAAAAAAAAAAAAAAAAAAAAAAAAAAAAAAAAAAAAAAAAAAAAAAAAAAAAAAAAAAAAAAAAAAAAAAAAAAAAAAAAAAAAAAAAAAAAAAAAAAAAAAAAAAAAAAAAAAAAAAAAAAAAAAAAAAAAAAAAAAAAAAAAAAAAAAAAAAAAAAAAAAAAAAAAAAAAAAAAAAAAAAAAAAAAAAAAAAAAAAAAAAAAAAAAAAAAAAAAAAAAAAAAAAAAAAAAAAAAAAAAAAAAAAAAAAAAAAAAAAAAAAAAAAAAAAAAAAAAAAAAAAAAAAAAAAAAAAAAAAAAAAAAAAAAAAAAAAAAAAAAAAAAAAAAAAAAAAAAAAAAAAAAAAAAAAAAAAAAAAAAAAAAAAAAAAAAAAAAAAAAAAAAAAAAAAAAAAAAAAAAAAAAAAAAAAAAAAAAAAAAAAAAAAAAAAAAAAAAAAAAAAAAAAAAAAAAAAAAAAAAAAAAAAAAAAAAAAAAAAAAAAAAAAAAAAAAAAAAAAAAAAAAAAAAAAAAAAAAAAAAAAAAAAAAAAAAAAAAAAAAAAAAAAAAAAAAAAAAAAAAAAAAAAAAAAAAAAAAAAAAAAAAAAAAAAAAAAAAAAAAAAAAAAAAAAAAAAAAAAAAAAAAAAAAAAAAAAAAAAAAAAAAAAAAAAAAAAAAAAAAAAAAAAAAAAAAAAAAAAAAAAAAAAAAAAAAAAAAAAAAAAAAAAAAAAAAAAAAAAAAAAAAAAAAAAAAAAAAAAAAAAAAAAAAAAAAAAAAAAAAAAAAAAAAAAAAAAAAAAAAAAAAAAAAAAAAAAAAAAAAAAAAAAAAAAAAAAAAAAAAAAAAAAAAAAAAAAAAAAAAAAAAAAAAAAAAAAAAAAAAAAAAAAAAAAAAAAAAAAAAAAAAAAAAAAAAAAAAAAAAAAAAAAAAAAAAAAAAAAAAAAAAAAAAAAAAAAAAAAAAAAAAAAAAAAAAAAAAAAAAAAAAAAAAAAAAAAAAAAAAAAAAAAAAAAAAAAAAAAAAAAAAAAAAAAAAAAAAAAAAAAAAAAAAAAAAAAAAAAAAAAAAAAAAAAAAAAAAAAAAAAAAAAAAAAAAAAAAAAAAAAAAAAAAAAAAAAAAAAAAAAAAAAAAAAAAAAAAAAAAAAAAAAAAAAAAAAAAAAAAAAAAAAAAAAAAAAAAAAAAAAAAAAAAAAAAAAAAAAAAAAAAAAAAAAAAAAAAAAAAAAAAAAAAAAAAAAAAAAAAAAAAAAAAAAAAAAAAAAAAAAAAAAAAAAAAAAAAAAAAAAAAAAAAAAAAAAAAAAAAAAAAAAAAAAAAAAAAAAAAAAAAAAAAAAAAAAAAAAAAAAAAAAAAAAAAAAAAAAAAAAAAAAAAAAAAAAAAAAAAAAAAAAAAAAAAAAAAAAAAAAAAAAAAAAAAAAAAAAAAAAAAAAAAAAAAAAAAAAAAAAAAAAAAAAAAAAAAAAAAAAAAAAAAAAAAAAAAAAAAAAAAAAAAAAAAAAAAAAAAAAAAAAAAAAAAAAAAAAAAAAAAAAAAAAAAAAAAAAAAAAAAAAAAAAAAAAAAAAAAAAAAAAAAAAAAAAAAAAAAAAAAAAAAAAAAAAAAAAAAAAAAAAAAAAAAAAAAAAAAAAAAAAAAAAAAAAAAAAAAAAAAAAAAAAAAAAAAAAAAAAAAAAAAAAAAAAAAAAAAAAAAAAAAAAAAAAAAAAAAAAAAAAAAAAAAAAAAAAAAAAAAAAAAAAAAAAAAAAAAAAAAAAAAAAAAAAAAAAAAAAAAAAAAAAAAAAAAAAAAAAAAAAAAAAAAAAAAAAAAAAAAAAAAAAAAAAAAAAAAAAAAAAAAAAAAAAAAAAAAAAAAAAAAAAAAAAAAAAAAAAAAAAAAAAAAAAAAAAAAAAAAAAAAAAAAAAAAAAAAAAAAAAAAAAAAAFAAAAAwAAAAD/////BQDiCwAAAAAAAAAAAAAgAf///////////////wAAAP///////////////wUAAAACAP///////wUAAAACAP///////wUAAAACAP///////////////////////////////////////////////////////////////////////////////////////////////////////////////////////////////////////////////////////////////////////////////////////////////////////////////////////////////////////////////////////////////////////////////////////////////////////////////////////////////////////////////////////////////////////////////////////////////////////////////////////////////////////////////////////////////////////////////wEAIAH///////////////8AAA7///////8FAAAABAD///////////////////////////////////////////////////////////////////////////////////////////////////////////////////////////////////////////////////////////////////////////////////////////////////////////////////////////////////////////////////////////////////////////////////////////////////////////////////////////////////////////////////////////////////////////////////////////////////////////////////////////////////////////////////////////////////////////////////////////////////////////////////////8CAAMBAwAAAAIA////////DgAGTGlua0RhdGFMaXN0XzAEAAAAAAAFAAAAAAAFAAAAAwAFAAAAAAAFAAAAAwAFAAAAAAAFAAAAAwADAAMBAwAAAAMA////////DgAGTGlua0RhdGFMaXN0XzEEAAAAAQAFAAAAAgAFAAAABAAFAAAAAgAFAAAABAAFAAAAAgD///////8EAAIBAwAAAAQA////////DAAGUGVyc29uYWxJZF8wBAAAAAIABQAAAAMABQAAAAEABQAAAAMA////////AAAAAAAAAAAAAAAAAAAAAAAAAAAAAAAAAAAAAAAAAAAAAAAAAAAAAAAAAAAAAAAAAAAAAAAAAAAAAAAAAAAAAAAAAAAAAAAAAAAAAAAAAAAAAAAAAAAAAAAAAAAAAAAAAAAAAAAAAAAAAAAAAAAAAAAAAAAAAAAAAAAAAAAAAAAAAAAAAAAAAAAAAAAAAAAAAAAAAAAAAAAAAAAAAAAAAAAAAAAAAAAAAAAAAAAAAAAAAAAAAAAAAAAAAAAAAAAAAAAAAAAAAAAAAAAAAAAAAAAAAAAAAAAAAAAAAAAAAAAAAAAAAAAAAAAAAAAAAAAAAAAAAAAAAAAAAAAAAAAAAAAAAAAAAAAAAAAAAAAAAAAAAAAAAAAAAAAAAAAAAAAAAAAAAAAAAAAAAAAAAAAAAAAAAAAAAAAAAAAAAAAAAAAAAAAAAAAAAAAAAAAAAAAAAAAAAAAAAAAAAAAAAAAAAAAAAAAAAAAAAAAAAAAAAAAAAAAAAAAAAAAAAAAAAAAAAAAAAAAAAAAAAAAAAAAAAAAAAAAAAAAAAAAAAAAAAAAAAAAAAAAAAAAAAAAAAAAAAAAAAAAAAAAAAAAAAAAAAAAAAAAAAAAAAAAAAAAAAAAAAAAAAAAAAAAAAAAAAAAAAAAAAAAAAAAAAAAAAAAAAAAAAAAAAAAAAAAAAAAAAAAAAAAAAAAAAAAAAAAAAAAAAAAAAAAAAAAAAAAAAAAAAAAAAAAAAAAAAAAAAAAAAAAAAAAAAAAAAAAAAAAAAAAAAAAAAAAAAAAAAAAAAAAAAAAAAAAAAAAAAAAAAAAAAAAAAAAAAAAAAAAAAAAAAAAAAAAAAAAAAAAAAAAAAAAAAAAAAAAAAAAAAAAAAAAAAAAAAAAAAAAAAAAAAAAAAAAAAAAAAAAAAAAAAAAAAAAAAAAAAAAAAAAAAAAAAAAAAAAAAAAAAAAAAAAAAAAAAAAAAAAAAAAAAAAAAAAAAAAAAAAAAAAAAAAAAAAAAAAAAAAAAAAAAAAAAAAAAAAAAAAAAAAAAAAAAAAAAAAAAAAAAAAAAAAAAAAAAAAAAAAAAAAAAAAAAAAAAAAAAAAAAAAAAAAAAAAAAAAAAAAAAAAAAAAAAAAAAAAAAAAAAAAAAAAAAAAAAAAAAAAAAAAAAAAAAAAAAAAAAAAAAAAAAAAAAAAAAAAAAAAAAAAAAAAAAAAAAAAAAAAAAAAAAAAAAAAAAAAAAAAAAAAAAAAAAAAAAAAAAAAAAAAAAAAAAAAAAAAAAAAAAAAAAAAAAAAAAAAAAAAAAAAAAAAAAAAAAAAAAAAAAAAAAAAAAAAAAAAAAAAAAAAAAAAAAAAAAAAAAAAAAAAAAAAAAAAAAAAAAAAAAAAAAAAAAAAAAAAAAAAAAAAAAAAAAAAAAAAAAAAAAAAAAAAAAAAAAAAAAAAAAAAAAAAAAAAAAAAAAAAAAAAAAAAAAAAAAAAAAAAAAAAAAAAAAAAAAAAAAAAAAAAAAAAAAAAAAAAAAAAAAAAAAAAAAAAAAAAAAAAAAAAAAAAAAAAAAAAAAAAAAAAAAAAAAAAAAAAAAAAAAAAAAAAAAAAAAAAAAAAAAAAAAAAAAAAAAAAAAAAAAAAAAAAAAAAAAAAAAAAAAAAAAAAAAAAAAAAAAAAAAAAAAAAAAAAAAAAAAAAAAAAAAAAAAAAAAAAAAAAAAAAAAAAAAAAAAAAAAAAAAAAAAAAAAAAAAAAAAAAAAAAAAAAAAAAAAAAAAAAAAAAAAAAAAAAAAAAAAAAAAAAAAAAAAAAAAAAAAAAAAAAAAAAAAAAAAAAAAAAAAAAAAAAAAAAAAAAAAAAAAAAAAAAAAAAAAAAAAAAAAAAAAAAAAAAAAAAAAAAAAAAAAAAAAAAAAAAAAAAAAAAAAAAAAAAAAAAAAAAAAAAAAAAAAAAAAAAAAAAAAAAAAAAAAAAAAAAAAAAAAAAAAAAAAAAAAAAAAAAAAAAAAAAAAAAAAAAAAAAAAAAAAAAAAAAAAAAAAAAAAAAAAAAAAAAAAAAAAAAAAAAAAAAAAAAAAAAAAAAAAAAAAAAAAAAAAAAAAAAAAAAAAAAAAAAAAAAAAAAAAAAAAAAAAAAAAAAAAAAAAAAAAAAAAAAAAAAAAAAAAAAAAAAAAAAAAAAAAAAAAAAAAAAAAAAAAAAAAAAAAAAAAAAAAAAAAAAAAAAAAAAAAAAAAAAAAAAAAAAAAAAAAAAAAAAAAAAAAAAAAAAAAAAAAAAAAAAAAAAAAAAAAAAAAAAAAAAAAAAAAAAAAAAAAAAAAAAAAAAAAAAAAAAAAAAAAAAAAAAAAAAAAAAAAAAAAAAAAAAAAAAAAAAAAAAAAAAAAAAAAAAAAAAAAAAAAAAAAAAAAAAAAAAAAAAAAAAAAAAAAAAAAAAAAAAAAAAAAAAAAAAAAAAAAAAAAAAAAAAAAAAAAAAAAAAAAAAAAAAAAAAAAAAAAAAAAAAAAAAAAAAAAAAAAAAAAAAAAAAAAAAAAAAAAAAAAAAAAAAAAAAAAAAAAAAAAAAAAAAAAAAAAAAAAAAAAAAAAAAAAAAAAAAAAAAAAAAAAAAAAAAAAAAAAAAAAAAAAAAAAAAAAAAAAAAAAAAAAAAAAAAAAAAAAAAAAAAAAAAAAAAAAAAAAAAAAAAAAAAAAAAAAAAAAAAAAAAAAAAAAAAAAAAAAAAAAAAAAAAAAAAAAAAAAAAAAAAAAAAAAAAAAAAAAAAAAAAAAAAAAAAAAAAAAAAAAAAAAAAAAAAAAAAAAAAAAAAAAAAAAAAAAAAAAAAAAAAAAAAAAAAAAAAAAAAAAAAAAAAAAAAAAAAAAAAAAAAAAAAAAAAAAAAAAAAAAAAAAAAAAAAAAAAAAAAAAAAAAAAAAAAAAAAAAAAAAAAAAAAAAAAAAAAAAAAAAAAAAAAAAAAAAAAAAAAAAAAAAAAAAAAAAAAAAAAAAAAAAAAAAAAAAAAAAAAAAAAAAAAAAAAAAAAAAAAAAAAAAAAAAAAAAAAAAAAAAAAAAAAAAAAAAAAAAAAAAAAAAAAAAAAAAAAAAAAAAAAAAAAAAAAAAAAAAAAAAAAAAAAAAAAAAAAAAAAAAAAAAAAAAAAAAAAAAAAAAAAAAAAAAAAAAAAAAAAAAAAAAAAAAAAAAAAAAAAAAAAAAAAAAAAAAAAAAAAAAAAAAAAAAAAAAAAAAAAAAAAAAAAAAAAAAAAAAAAAAAAAAAAAAAAAAAAAAAAAAAAAAAAAAAAAAAAAAAAAAAAAAAAAAAAAAAAAAAAAAAAAAAAAAAAAAAAAAAAAAAAAAAAAAAAAAAAAAAAAAAAAAAAAAAAAAAAAAAAAAAAAAAAAAAAAAAAAAAAAAAAAAAAAAAAAAAAAAAAAAAAAAAAAAAAAAAAAAAAAAAAAAAAAAAAAAAAAAAAAAAAAAAAAAAAAAAAAAAAAAAAAAAAAAAAAAAAAAAAAAAAAAAAAAAAAAAAAAAAAAAAAAAAAAAAAAAAAAAAAAAAAAAAAAAAAAAAAAAAAAAAAAAAAAAAAAAAAAAAAAAAAAAAAAAAAAAAAAAAAAAAAAAAAAAAAAAAAAAAAAAAAAAAAAAAAAAAAAAAAAAAAAAAAAAAAAAAAAAAAAAAAAAAAAAAAAAAAAAAAAAAAAAAAAAAAAAAAAAAAAAAAAAAAAAAAAAAAAAAAAAAAAAAAAAAAAAAAAAAAAAAAAAAAAAAAAAAAAAAAAAAAAAAAAAAAAAAAAAAAAAAAAAAAAAAAAAAAAAAAAAAAAAAAAAAAAAAAAAAAAAAAAAAAAAAAAAAAAAAAAAAAAAAAAAAAAAAAAAAAAAAAAAAAAAAAAAAAAAAAAAAAAAAAAAAAAAAAAAAAAAAAAAAAAAAAAAAAAAAAAAAAAAAAAAAAAAAAAAAAAAAAAAAAAAAAAAAAAAAAAAAAAAAAAAAAAAAAAAAAAAAAAAAAAAAAAAAAAAAAAAAAAAAAAAAAAAAAAAAAAAAAAAAAAAAAAAAAAAAAAAAAAAAAAAAAAAAAAAAAAAAAAAAAAAAAAAAAAAAAAAAAAAAAAAAAAAAAAAAAAAAAAAAAAAAAAAAAAAAA"/>
-  <p:tag name="EMPOWERCHARTSPROPERTIES_SLOT" val="B"/>
-  <p:tag name="EMPOWERCHARTSPROPERTIES_LASTWRITEDATE" val="638682344113893487"/>
-  <p:tag name="EMPOWERCHARTSPROPERTIES_B_LENGTH" val="24576"/>
-  <p:tag name="DOWN_MIGRATION_INITIAL_LAYOUT_REQUIRED" val="9.2.99"/>
-  <p:tag name="RUNTIME_ID" val="b2d7fdd6-934f-4a63-937e-eb6337ae1bcb"/>
-</p:tagLst>
-</file>
-
 <file path=ppt/theme/theme1.xml><?xml version="1.0" encoding="utf-8"?>
-<a:theme xmlns:a="http://schemas.openxmlformats.org/drawingml/2006/main" name="Office">
+<a:theme xmlns:a="http://schemas.openxmlformats.org/drawingml/2006/main" name="Office 2013 - 2022 Theme">
   <a:themeElements>
-    <a:clrScheme name="Office">
+    <a:clrScheme name="Office 2013 - 2022 Theme">
       <a:dk1>
         <a:sysClr val="windowText" lastClr="000000"/>
       </a:dk1>
@@ -4277,7 +4473,7 @@
         <a:srgbClr val="954F72"/>
       </a:folHlink>
     </a:clrScheme>
-    <a:fontScheme name="Office">
+    <a:fontScheme name="Office 2013 - 2022 Theme">
       <a:majorFont>
         <a:latin typeface="Calibri Light" panose="020F0302020204030204"/>
         <a:ea typeface=""/>
@@ -4349,7 +4545,7 @@
         <a:font script="Geor" typeface="Sylfaen"/>
       </a:minorFont>
     </a:fontScheme>
-    <a:fmtScheme name="Office">
+    <a:fmtScheme name="Office 2013 - 2022 Theme">
       <a:fillStyleLst>
         <a:solidFill>
           <a:schemeClr val="phClr"/>
@@ -4491,27 +4687,24 @@
   <a:extraClrSchemeLst/>
   <a:extLst>
     <a:ext uri="{05A4C25C-085E-4340-85A3-A5531E510DB2}">
-      <thm15:themeFamily xmlns:thm15="http://schemas.microsoft.com/office/thememl/2012/main" name="Office Theme" id="{62F939B6-93AF-4DB8-9C6B-D6C7DFDC589F}" vid="{4A3C46E8-61CC-4603-A589-7422A47A8E4A}"/>
+      <thm15:themeFamily xmlns:thm15="http://schemas.microsoft.com/office/thememl/2012/main" name="Office 2013 - 2022 Theme" id="{62F939B6-93AF-4DB8-9C6B-D6C7DFDC589F}" vid="{4A3C46E8-61CC-4603-A589-7422A47A8E4A}"/>
     </a:ext>
   </a:extLst>
 </a:theme>
 </file>
 
 <file path=customXml/item1.xml><?xml version="1.0" encoding="utf-8"?>
-<?mso-contentType ?>
-<FormTemplates xmlns="http://schemas.microsoft.com/sharepoint/v3/contenttype/forms">
-  <Display>DocumentLibraryForm</Display>
-  <Edit>DocumentLibraryForm</Edit>
-  <New>DocumentLibraryForm</New>
-</FormTemplates>
+<p:properties xmlns:p="http://schemas.microsoft.com/office/2006/metadata/properties" xmlns:xsi="http://www.w3.org/2001/XMLSchema-instance" xmlns:pc="http://schemas.microsoft.com/office/infopath/2007/PartnerControls">
+  <documentManagement>
+    <TaxCatchAll xmlns="1a4d292e-883c-434b-96e3-060cfff16c86"/>
+    <_dlc_ExpireDateSaved xmlns="http://schemas.microsoft.com/sharepoint/v3" xsi:nil="true"/>
+    <_dlc_ExpireDate xmlns="http://schemas.microsoft.com/sharepoint/v3" xsi:nil="true"/>
+    <_dlc_Exempt xmlns="http://schemas.microsoft.com/sharepoint/v3" xsi:nil="true"/>
+  </documentManagement>
+</p:properties>
 </file>
 
 <file path=customXml/item2.xml><?xml version="1.0" encoding="utf-8"?>
-<?mso-contentType ?>
-<SharedContentType xmlns="Microsoft.SharePoint.Taxonomy.ContentTypeSync" SourceId="7bc43322-b630-4bac-8b27-31def233d1d0" ContentTypeId="0x0101" PreviousValue="false"/>
-</file>
-
-<file path=customXml/item3.xml><?xml version="1.0" encoding="utf-8"?>
 <ct:contentTypeSchema xmlns:ct="http://schemas.microsoft.com/office/2006/metadata/contentType" xmlns:ma="http://schemas.microsoft.com/office/2006/metadata/properties/metaAttributes" ct:_="" ma:_="" ma:contentTypeName="Dokument" ma:contentTypeID="0x0101000A02AC6D9EF9CA44BE2D7FE53E0F875C" ma:contentTypeVersion="12" ma:contentTypeDescription="Ein neues Dokument erstellen." ma:contentTypeScope="" ma:versionID="6c6d252082fd9ae2dc48941f9a6fd36f">
   <xsd:schema xmlns:xsd="http://www.w3.org/2001/XMLSchema" xmlns:xs="http://www.w3.org/2001/XMLSchema" xmlns:p="http://schemas.microsoft.com/office/2006/metadata/properties" xmlns:ns1="http://schemas.microsoft.com/sharepoint/v3" xmlns:ns2="1a4d292e-883c-434b-96e3-060cfff16c86" xmlns:ns3="aecc70ee-2d6e-4d6b-a98f-0dfc4d2572dc" xmlns:ns4="3f1a0a6d-c532-4d53-8c70-93adc7cbe80c" targetNamespace="http://schemas.microsoft.com/office/2006/metadata/properties" ma:root="true" ma:fieldsID="7789a1f2097b8e592a747d770cd7424d" ns1:_="" ns2:_="" ns3:_="" ns4:_="">
     <xsd:import namespace="http://schemas.microsoft.com/sharepoint/v3"/>
@@ -4774,34 +4967,32 @@
 </ct:contentTypeSchema>
 </file>
 
+<file path=customXml/item3.xml><?xml version="1.0" encoding="utf-8"?>
+<?mso-contentType ?>
+<SharedContentType xmlns="Microsoft.SharePoint.Taxonomy.ContentTypeSync" SourceId="7bc43322-b630-4bac-8b27-31def233d1d0" ContentTypeId="0x0101" PreviousValue="false"/>
+</file>
+
 <file path=customXml/item4.xml><?xml version="1.0" encoding="utf-8"?>
-<p:properties xmlns:p="http://schemas.microsoft.com/office/2006/metadata/properties" xmlns:xsi="http://www.w3.org/2001/XMLSchema-instance" xmlns:pc="http://schemas.microsoft.com/office/infopath/2007/PartnerControls">
-  <documentManagement>
-    <TaxCatchAll xmlns="1a4d292e-883c-434b-96e3-060cfff16c86"/>
-    <_dlc_ExpireDateSaved xmlns="http://schemas.microsoft.com/sharepoint/v3" xsi:nil="true"/>
-    <_dlc_ExpireDate xmlns="http://schemas.microsoft.com/sharepoint/v3" xsi:nil="true"/>
-    <_dlc_Exempt xmlns="http://schemas.microsoft.com/sharepoint/v3" xsi:nil="true"/>
-  </documentManagement>
-</p:properties>
+<?mso-contentType ?>
+<FormTemplates xmlns="http://schemas.microsoft.com/sharepoint/v3/contenttype/forms">
+  <Display>DocumentLibraryForm</Display>
+  <Edit>DocumentLibraryForm</Edit>
+  <New>DocumentLibraryForm</New>
+</FormTemplates>
 </file>
 
 <file path=customXml/itemProps1.xml><?xml version="1.0" encoding="utf-8"?>
-<ds:datastoreItem xmlns:ds="http://schemas.openxmlformats.org/officeDocument/2006/customXml" ds:itemID="{04D729A8-6F7F-45FE-91C8-CB5671C0CFA0}">
+<ds:datastoreItem xmlns:ds="http://schemas.openxmlformats.org/officeDocument/2006/customXml" ds:itemID="{0ACF9CDC-7187-4C27-99A4-44DD755F7818}">
   <ds:schemaRefs>
-    <ds:schemaRef ds:uri="http://schemas.microsoft.com/sharepoint/v3/contenttype/forms"/>
+    <ds:schemaRef ds:uri="http://schemas.microsoft.com/office/2006/metadata/properties"/>
+    <ds:schemaRef ds:uri="http://schemas.microsoft.com/office/infopath/2007/PartnerControls"/>
+    <ds:schemaRef ds:uri="1a4d292e-883c-434b-96e3-060cfff16c86"/>
+    <ds:schemaRef ds:uri="http://schemas.microsoft.com/sharepoint/v3"/>
   </ds:schemaRefs>
 </ds:datastoreItem>
 </file>
 
 <file path=customXml/itemProps2.xml><?xml version="1.0" encoding="utf-8"?>
-<ds:datastoreItem xmlns:ds="http://schemas.openxmlformats.org/officeDocument/2006/customXml" ds:itemID="{E2E7F328-0877-4E3B-89D4-88D98111FCAF}">
-  <ds:schemaRefs>
-    <ds:schemaRef ds:uri="Microsoft.SharePoint.Taxonomy.ContentTypeSync"/>
-  </ds:schemaRefs>
-</ds:datastoreItem>
-</file>
-
-<file path=customXml/itemProps3.xml><?xml version="1.0" encoding="utf-8"?>
 <ds:datastoreItem xmlns:ds="http://schemas.openxmlformats.org/officeDocument/2006/customXml" ds:itemID="{3AFBB2A2-6AEA-44D3-9E19-77C2996646D1}">
   <ds:schemaRefs>
     <ds:schemaRef ds:uri="http://schemas.microsoft.com/office/2006/metadata/contentType"/>
@@ -4822,13 +5013,24 @@
 </ds:datastoreItem>
 </file>
 
-<file path=customXml/itemProps4.xml><?xml version="1.0" encoding="utf-8"?>
-<ds:datastoreItem xmlns:ds="http://schemas.openxmlformats.org/officeDocument/2006/customXml" ds:itemID="{0ACF9CDC-7187-4C27-99A4-44DD755F7818}">
+<file path=customXml/itemProps3.xml><?xml version="1.0" encoding="utf-8"?>
+<ds:datastoreItem xmlns:ds="http://schemas.openxmlformats.org/officeDocument/2006/customXml" ds:itemID="{E2E7F328-0877-4E3B-89D4-88D98111FCAF}">
   <ds:schemaRefs>
-    <ds:schemaRef ds:uri="http://schemas.microsoft.com/office/2006/metadata/properties"/>
-    <ds:schemaRef ds:uri="http://schemas.microsoft.com/office/infopath/2007/PartnerControls"/>
-    <ds:schemaRef ds:uri="1a4d292e-883c-434b-96e3-060cfff16c86"/>
-    <ds:schemaRef ds:uri="http://schemas.microsoft.com/sharepoint/v3"/>
+    <ds:schemaRef ds:uri="Microsoft.SharePoint.Taxonomy.ContentTypeSync"/>
   </ds:schemaRefs>
 </ds:datastoreItem>
+</file>
+
+<file path=customXml/itemProps4.xml><?xml version="1.0" encoding="utf-8"?>
+<ds:datastoreItem xmlns:ds="http://schemas.openxmlformats.org/officeDocument/2006/customXml" ds:itemID="{04D729A8-6F7F-45FE-91C8-CB5671C0CFA0}">
+  <ds:schemaRefs>
+    <ds:schemaRef ds:uri="http://schemas.microsoft.com/sharepoint/v3/contenttype/forms"/>
+  </ds:schemaRefs>
+</ds:datastoreItem>
+</file>
+
+<file path=docMetadata/LabelInfo.xml><?xml version="1.0" encoding="utf-8"?>
+<clbl:labelList xmlns:clbl="http://schemas.microsoft.com/office/2020/mipLabelMetadata">
+  <clbl:label id="{bfd0b529-4a04-4616-88d2-531082d94bb8}" enabled="1" method="Standard" siteId="{e1f8af86-ee95-4718-bd0d-375b37366c83}" removed="0"/>
+</clbl:labelList>
 </file>